--- a/others/paper-reviews/literature-review.pptx
+++ b/others/paper-reviews/literature-review.pptx
@@ -1,34 +1,41 @@
 
 <file path=ppt/presentation.xml><?xml version="1.0" encoding="utf-8"?>
-<p:presentation xmlns:a="http://schemas.openxmlformats.org/drawingml/2006/main" xmlns:r="http://schemas.openxmlformats.org/officeDocument/2006/relationships" xmlns:p="http://schemas.openxmlformats.org/presentationml/2006/main" saveSubsetFonts="1" embedTrueTypeFonts="true">
+<p:presentation xmlns:a="http://schemas.openxmlformats.org/drawingml/2006/main" xmlns:r="http://schemas.openxmlformats.org/officeDocument/2006/relationships" xmlns:p="http://schemas.openxmlformats.org/presentationml/2006/main" embedTrueTypeFonts="1" saveSubsetFonts="1">
   <p:sldMasterIdLst>
     <p:sldMasterId id="2147483648" r:id="rId1"/>
   </p:sldMasterIdLst>
   <p:notesMasterIdLst>
-    <p:notesMasterId r:id="rId16"/>
+    <p:notesMasterId r:id="rId12"/>
   </p:notesMasterIdLst>
   <p:sldIdLst>
-    <p:sldId id="256" r:id="rId6"/>
-    <p:sldId id="257" r:id="rId7"/>
-    <p:sldId id="258" r:id="rId8"/>
-    <p:sldId id="259" r:id="rId9"/>
-    <p:sldId id="260" r:id="rId10"/>
-    <p:sldId id="261" r:id="rId11"/>
-    <p:sldId id="262" r:id="rId12"/>
-    <p:sldId id="263" r:id="rId13"/>
-    <p:sldId id="264" r:id="rId14"/>
-    <p:sldId id="265" r:id="rId15"/>
+    <p:sldId id="256" r:id="rId2"/>
+    <p:sldId id="257" r:id="rId3"/>
+    <p:sldId id="258" r:id="rId4"/>
+    <p:sldId id="259" r:id="rId5"/>
+    <p:sldId id="260" r:id="rId6"/>
+    <p:sldId id="261" r:id="rId7"/>
+    <p:sldId id="262" r:id="rId8"/>
+    <p:sldId id="263" r:id="rId9"/>
+    <p:sldId id="264" r:id="rId10"/>
+    <p:sldId id="265" r:id="rId11"/>
   </p:sldIdLst>
   <p:sldSz cx="18288000" cy="10287000"/>
   <p:notesSz cx="6858000" cy="9144000"/>
   <p:embeddedFontLst>
     <p:embeddedFont>
-      <p:font typeface="Inter Bold" charset="1" panose="02000503000000020004"/>
-      <p:regular r:id="rId19"/>
+      <p:font typeface="Calibri" panose="020F0502020204030204" pitchFamily="34" charset="0"/>
+      <p:regular r:id="rId13"/>
+      <p:bold r:id="rId14"/>
+      <p:italic r:id="rId15"/>
+      <p:boldItalic r:id="rId16"/>
     </p:embeddedFont>
     <p:embeddedFont>
-      <p:font typeface="Inter" charset="1" panose="02000503000000020004"/>
-      <p:regular r:id="rId20"/>
+      <p:font typeface="Inter" panose="020B0604020202020204" charset="0"/>
+      <p:regular r:id="rId17"/>
+    </p:embeddedFont>
+    <p:embeddedFont>
+      <p:font typeface="Inter Bold" panose="020B0604020202020204" charset="0"/>
+      <p:regular r:id="rId18"/>
     </p:embeddedFont>
   </p:embeddedFontLst>
   <p:defaultTextStyle>
@@ -126,6 +133,22 @@
       </a:defRPr>
     </a:lvl9pPr>
   </p:defaultTextStyle>
+  <p:extLst>
+    <p:ext uri="{EFAFB233-063F-42B5-8137-9DF3F51BA10A}">
+      <p15:sldGuideLst xmlns:p15="http://schemas.microsoft.com/office/powerpoint/2012/main">
+        <p15:guide id="1" orient="horz" pos="2160">
+          <p15:clr>
+            <a:srgbClr val="A4A3A4"/>
+          </p15:clr>
+        </p15:guide>
+        <p15:guide id="2" pos="2880">
+          <p15:clr>
+            <a:srgbClr val="A4A3A4"/>
+          </p15:clr>
+        </p15:guide>
+      </p15:sldGuideLst>
+    </p:ext>
+  </p:extLst>
 </p:presentation>
 </file>
 
@@ -211,7 +234,7 @@
           <a:p>
             <a:fld id="{B7268E1E-0E44-426D-905E-8AD9B19D2182}" type="datetimeFigureOut">
               <a:rPr lang="cs-CZ" smtClean="0"/>
-              <a:t>1.7.2013</a:t>
+              <a:t>08.07.2026</a:t>
             </a:fld>
             <a:endParaRPr lang="cs-CZ"/>
           </a:p>
@@ -275,35 +298,35 @@
           <a:p>
             <a:pPr lvl="0"/>
             <a:r>
-              <a:rPr lang="en-US" smtClean="0"/>
+              <a:rPr lang="en-US"/>
               <a:t>Click to edit Master text styles</a:t>
             </a:r>
           </a:p>
           <a:p>
             <a:pPr lvl="1"/>
             <a:r>
-              <a:rPr lang="en-US" smtClean="0"/>
+              <a:rPr lang="en-US"/>
               <a:t>Second level</a:t>
             </a:r>
           </a:p>
           <a:p>
             <a:pPr lvl="2"/>
             <a:r>
-              <a:rPr lang="en-US" smtClean="0"/>
+              <a:rPr lang="en-US"/>
               <a:t>Third level</a:t>
             </a:r>
           </a:p>
           <a:p>
             <a:pPr lvl="3"/>
             <a:r>
-              <a:rPr lang="en-US" smtClean="0"/>
+              <a:rPr lang="en-US"/>
               <a:t>Fourth level</a:t>
             </a:r>
           </a:p>
           <a:p>
             <a:pPr lvl="4"/>
             <a:r>
-              <a:rPr lang="en-US" smtClean="0"/>
+              <a:rPr lang="en-US"/>
               <a:t>Fifth level</a:t>
             </a:r>
             <a:endParaRPr lang="cs-CZ"/>
@@ -480,9 +503,9 @@
 </file>
 
 <file path=ppt/notesSlides/notesSlide1.xml><?xml version="1.0" encoding="utf-8"?>
-<p:notes xmlns:p="http://schemas.openxmlformats.org/presentationml/2006/main" xmlns:a="http://schemas.openxmlformats.org/drawingml/2006/main">
+<p:notes xmlns:a="http://schemas.openxmlformats.org/drawingml/2006/main" xmlns:r="http://schemas.openxmlformats.org/officeDocument/2006/relationships" xmlns:p="http://schemas.openxmlformats.org/presentationml/2006/main">
   <p:cSld>
-    <p:spTree xmlns:r="http://schemas.openxmlformats.org/officeDocument/2006/relationships">
+    <p:spTree>
       <p:nvGrpSpPr>
         <p:cNvPr id="1" name=""/>
         <p:cNvGrpSpPr/>
@@ -522,7 +545,9 @@
               <a:defRPr sz="1200"/>
             </a:lvl1pPr>
           </a:lstStyle>
-          <a:p/>
+          <a:p>
+            <a:endParaRPr/>
+          </a:p>
         </p:txBody>
       </p:sp>
       <p:sp>
@@ -552,8 +577,8 @@
             </a:lvl1pPr>
           </a:lstStyle>
           <a:p>
-            <a:r id="{B7268E1E-0E44-426D-905E-8AD9B19D2182}" type="datetimeFigureOut">
-              <a:rPr lang="cs-CZ" smtClean="0"/>
+            <a:r>
+              <a:rPr lang="cs-CZ"/>
               <a:t>1.7.2013</a:t>
             </a:r>
           </a:p>
@@ -587,7 +612,9 @@
         <p:txBody>
           <a:bodyPr vert="horz" lIns="91440" tIns="45720" rIns="91440" bIns="45720" rtlCol="0" anchor="ctr"/>
           <a:lstStyle/>
-          <a:p/>
+          <a:p>
+            <a:endParaRPr/>
+          </a:p>
         </p:txBody>
       </p:sp>
       <p:sp>
@@ -617,7 +644,6 @@
               <a:rPr lang="en-US"/>
               <a:t>1</a:t>
             </a:r>
-            <a:endParaRPr lang="en-US" smtClean="0"/>
           </a:p>
         </p:txBody>
       </p:sp>
@@ -647,7 +673,9 @@
               <a:defRPr sz="1200"/>
             </a:lvl1pPr>
           </a:lstStyle>
-          <a:p/>
+          <a:p>
+            <a:endParaRPr/>
+          </a:p>
         </p:txBody>
       </p:sp>
       <p:sp>
@@ -677,8 +705,8 @@
             </a:lvl1pPr>
           </a:lstStyle>
           <a:p>
-            <a:r id="{871B2431-D351-4C6E-A3CF-9DFAC0E3E050}" type="slidenum">
-              <a:rPr lang="cs-CZ" smtClean="0"/>
+            <a:r>
+              <a:rPr lang="cs-CZ"/>
               <a:t>‹#›</a:t>
             </a:r>
           </a:p>
@@ -693,9 +721,9 @@
 </file>
 
 <file path=ppt/notesSlides/notesSlide10.xml><?xml version="1.0" encoding="utf-8"?>
-<p:notes xmlns:p="http://schemas.openxmlformats.org/presentationml/2006/main" xmlns:a="http://schemas.openxmlformats.org/drawingml/2006/main">
+<p:notes xmlns:a="http://schemas.openxmlformats.org/drawingml/2006/main" xmlns:r="http://schemas.openxmlformats.org/officeDocument/2006/relationships" xmlns:p="http://schemas.openxmlformats.org/presentationml/2006/main">
   <p:cSld>
-    <p:spTree xmlns:r="http://schemas.openxmlformats.org/officeDocument/2006/relationships">
+    <p:spTree>
       <p:nvGrpSpPr>
         <p:cNvPr id="1" name=""/>
         <p:cNvGrpSpPr/>
@@ -735,7 +763,9 @@
               <a:defRPr sz="1200"/>
             </a:lvl1pPr>
           </a:lstStyle>
-          <a:p/>
+          <a:p>
+            <a:endParaRPr/>
+          </a:p>
         </p:txBody>
       </p:sp>
       <p:sp>
@@ -765,8 +795,8 @@
             </a:lvl1pPr>
           </a:lstStyle>
           <a:p>
-            <a:r id="{B7268E1E-0E44-426D-905E-8AD9B19D2182}" type="datetimeFigureOut">
-              <a:rPr lang="cs-CZ" smtClean="0"/>
+            <a:r>
+              <a:rPr lang="cs-CZ"/>
               <a:t>1.7.2013</a:t>
             </a:r>
           </a:p>
@@ -800,7 +830,9 @@
         <p:txBody>
           <a:bodyPr vert="horz" lIns="91440" tIns="45720" rIns="91440" bIns="45720" rtlCol="0" anchor="ctr"/>
           <a:lstStyle/>
-          <a:p/>
+          <a:p>
+            <a:endParaRPr/>
+          </a:p>
         </p:txBody>
       </p:sp>
       <p:sp>
@@ -830,7 +862,6 @@
               <a:rPr lang="en-US"/>
               <a:t>10</a:t>
             </a:r>
-            <a:endParaRPr lang="en-US" smtClean="0"/>
           </a:p>
         </p:txBody>
       </p:sp>
@@ -860,7 +891,9 @@
               <a:defRPr sz="1200"/>
             </a:lvl1pPr>
           </a:lstStyle>
-          <a:p/>
+          <a:p>
+            <a:endParaRPr/>
+          </a:p>
         </p:txBody>
       </p:sp>
       <p:sp>
@@ -890,8 +923,8 @@
             </a:lvl1pPr>
           </a:lstStyle>
           <a:p>
-            <a:r id="{871B2431-D351-4C6E-A3CF-9DFAC0E3E050}" type="slidenum">
-              <a:rPr lang="cs-CZ" smtClean="0"/>
+            <a:r>
+              <a:rPr lang="cs-CZ"/>
               <a:t>‹#›</a:t>
             </a:r>
           </a:p>
@@ -906,9 +939,9 @@
 </file>
 
 <file path=ppt/notesSlides/notesSlide2.xml><?xml version="1.0" encoding="utf-8"?>
-<p:notes xmlns:p="http://schemas.openxmlformats.org/presentationml/2006/main" xmlns:a="http://schemas.openxmlformats.org/drawingml/2006/main">
+<p:notes xmlns:a="http://schemas.openxmlformats.org/drawingml/2006/main" xmlns:r="http://schemas.openxmlformats.org/officeDocument/2006/relationships" xmlns:p="http://schemas.openxmlformats.org/presentationml/2006/main">
   <p:cSld>
-    <p:spTree xmlns:r="http://schemas.openxmlformats.org/officeDocument/2006/relationships">
+    <p:spTree>
       <p:nvGrpSpPr>
         <p:cNvPr id="1" name=""/>
         <p:cNvGrpSpPr/>
@@ -948,7 +981,9 @@
               <a:defRPr sz="1200"/>
             </a:lvl1pPr>
           </a:lstStyle>
-          <a:p/>
+          <a:p>
+            <a:endParaRPr/>
+          </a:p>
         </p:txBody>
       </p:sp>
       <p:sp>
@@ -978,8 +1013,8 @@
             </a:lvl1pPr>
           </a:lstStyle>
           <a:p>
-            <a:r id="{B7268E1E-0E44-426D-905E-8AD9B19D2182}" type="datetimeFigureOut">
-              <a:rPr lang="cs-CZ" smtClean="0"/>
+            <a:r>
+              <a:rPr lang="cs-CZ"/>
               <a:t>1.7.2013</a:t>
             </a:r>
           </a:p>
@@ -1013,7 +1048,9 @@
         <p:txBody>
           <a:bodyPr vert="horz" lIns="91440" tIns="45720" rIns="91440" bIns="45720" rtlCol="0" anchor="ctr"/>
           <a:lstStyle/>
-          <a:p/>
+          <a:p>
+            <a:endParaRPr/>
+          </a:p>
         </p:txBody>
       </p:sp>
       <p:sp>
@@ -1043,7 +1080,6 @@
               <a:rPr lang="en-US"/>
               <a:t>2</a:t>
             </a:r>
-            <a:endParaRPr lang="en-US" smtClean="0"/>
           </a:p>
         </p:txBody>
       </p:sp>
@@ -1073,7 +1109,9 @@
               <a:defRPr sz="1200"/>
             </a:lvl1pPr>
           </a:lstStyle>
-          <a:p/>
+          <a:p>
+            <a:endParaRPr/>
+          </a:p>
         </p:txBody>
       </p:sp>
       <p:sp>
@@ -1103,8 +1141,8 @@
             </a:lvl1pPr>
           </a:lstStyle>
           <a:p>
-            <a:r id="{871B2431-D351-4C6E-A3CF-9DFAC0E3E050}" type="slidenum">
-              <a:rPr lang="cs-CZ" smtClean="0"/>
+            <a:r>
+              <a:rPr lang="cs-CZ"/>
               <a:t>‹#›</a:t>
             </a:r>
           </a:p>
@@ -1119,9 +1157,9 @@
 </file>
 
 <file path=ppt/notesSlides/notesSlide3.xml><?xml version="1.0" encoding="utf-8"?>
-<p:notes xmlns:p="http://schemas.openxmlformats.org/presentationml/2006/main" xmlns:a="http://schemas.openxmlformats.org/drawingml/2006/main">
+<p:notes xmlns:a="http://schemas.openxmlformats.org/drawingml/2006/main" xmlns:r="http://schemas.openxmlformats.org/officeDocument/2006/relationships" xmlns:p="http://schemas.openxmlformats.org/presentationml/2006/main">
   <p:cSld>
-    <p:spTree xmlns:r="http://schemas.openxmlformats.org/officeDocument/2006/relationships">
+    <p:spTree>
       <p:nvGrpSpPr>
         <p:cNvPr id="1" name=""/>
         <p:cNvGrpSpPr/>
@@ -1161,7 +1199,9 @@
               <a:defRPr sz="1200"/>
             </a:lvl1pPr>
           </a:lstStyle>
-          <a:p/>
+          <a:p>
+            <a:endParaRPr/>
+          </a:p>
         </p:txBody>
       </p:sp>
       <p:sp>
@@ -1191,8 +1231,8 @@
             </a:lvl1pPr>
           </a:lstStyle>
           <a:p>
-            <a:r id="{B7268E1E-0E44-426D-905E-8AD9B19D2182}" type="datetimeFigureOut">
-              <a:rPr lang="cs-CZ" smtClean="0"/>
+            <a:r>
+              <a:rPr lang="cs-CZ"/>
               <a:t>1.7.2013</a:t>
             </a:r>
           </a:p>
@@ -1210,8 +1250,8 @@
         </p:nvSpPr>
         <p:spPr>
           <a:xfrm>
-            <a:off x="2857500" y="512763"/>
-            <a:ext cx="3429000" cy="2566987"/>
+            <a:off x="2290763" y="512763"/>
+            <a:ext cx="4562475" cy="2566987"/>
           </a:xfrm>
           <a:prstGeom prst="rect">
             <a:avLst/>
@@ -1226,7 +1266,9 @@
         <p:txBody>
           <a:bodyPr vert="horz" lIns="91440" tIns="45720" rIns="91440" bIns="45720" rtlCol="0" anchor="ctr"/>
           <a:lstStyle/>
-          <a:p/>
+          <a:p>
+            <a:endParaRPr/>
+          </a:p>
         </p:txBody>
       </p:sp>
       <p:sp>
@@ -1256,7 +1298,6 @@
               <a:rPr lang="en-US"/>
               <a:t>3</a:t>
             </a:r>
-            <a:endParaRPr lang="en-US" smtClean="0"/>
           </a:p>
         </p:txBody>
       </p:sp>
@@ -1286,7 +1327,9 @@
               <a:defRPr sz="1200"/>
             </a:lvl1pPr>
           </a:lstStyle>
-          <a:p/>
+          <a:p>
+            <a:endParaRPr/>
+          </a:p>
         </p:txBody>
       </p:sp>
       <p:sp>
@@ -1316,8 +1359,8 @@
             </a:lvl1pPr>
           </a:lstStyle>
           <a:p>
-            <a:r id="{871B2431-D351-4C6E-A3CF-9DFAC0E3E050}" type="slidenum">
-              <a:rPr lang="cs-CZ" smtClean="0"/>
+            <a:r>
+              <a:rPr lang="cs-CZ"/>
               <a:t>‹#›</a:t>
             </a:r>
           </a:p>
@@ -1332,9 +1375,9 @@
 </file>
 
 <file path=ppt/notesSlides/notesSlide4.xml><?xml version="1.0" encoding="utf-8"?>
-<p:notes xmlns:p="http://schemas.openxmlformats.org/presentationml/2006/main" xmlns:a="http://schemas.openxmlformats.org/drawingml/2006/main">
+<p:notes xmlns:a="http://schemas.openxmlformats.org/drawingml/2006/main" xmlns:r="http://schemas.openxmlformats.org/officeDocument/2006/relationships" xmlns:p="http://schemas.openxmlformats.org/presentationml/2006/main">
   <p:cSld>
-    <p:spTree xmlns:r="http://schemas.openxmlformats.org/officeDocument/2006/relationships">
+    <p:spTree>
       <p:nvGrpSpPr>
         <p:cNvPr id="1" name=""/>
         <p:cNvGrpSpPr/>
@@ -1374,7 +1417,9 @@
               <a:defRPr sz="1200"/>
             </a:lvl1pPr>
           </a:lstStyle>
-          <a:p/>
+          <a:p>
+            <a:endParaRPr/>
+          </a:p>
         </p:txBody>
       </p:sp>
       <p:sp>
@@ -1404,8 +1449,8 @@
             </a:lvl1pPr>
           </a:lstStyle>
           <a:p>
-            <a:r id="{B7268E1E-0E44-426D-905E-8AD9B19D2182}" type="datetimeFigureOut">
-              <a:rPr lang="cs-CZ" smtClean="0"/>
+            <a:r>
+              <a:rPr lang="cs-CZ"/>
               <a:t>1.7.2013</a:t>
             </a:r>
           </a:p>
@@ -1439,7 +1484,9 @@
         <p:txBody>
           <a:bodyPr vert="horz" lIns="91440" tIns="45720" rIns="91440" bIns="45720" rtlCol="0" anchor="ctr"/>
           <a:lstStyle/>
-          <a:p/>
+          <a:p>
+            <a:endParaRPr/>
+          </a:p>
         </p:txBody>
       </p:sp>
       <p:sp>
@@ -1469,7 +1516,6 @@
               <a:rPr lang="en-US"/>
               <a:t>4</a:t>
             </a:r>
-            <a:endParaRPr lang="en-US" smtClean="0"/>
           </a:p>
         </p:txBody>
       </p:sp>
@@ -1499,7 +1545,9 @@
               <a:defRPr sz="1200"/>
             </a:lvl1pPr>
           </a:lstStyle>
-          <a:p/>
+          <a:p>
+            <a:endParaRPr/>
+          </a:p>
         </p:txBody>
       </p:sp>
       <p:sp>
@@ -1529,8 +1577,8 @@
             </a:lvl1pPr>
           </a:lstStyle>
           <a:p>
-            <a:r id="{871B2431-D351-4C6E-A3CF-9DFAC0E3E050}" type="slidenum">
-              <a:rPr lang="cs-CZ" smtClean="0"/>
+            <a:r>
+              <a:rPr lang="cs-CZ"/>
               <a:t>‹#›</a:t>
             </a:r>
           </a:p>
@@ -1545,9 +1593,9 @@
 </file>
 
 <file path=ppt/notesSlides/notesSlide5.xml><?xml version="1.0" encoding="utf-8"?>
-<p:notes xmlns:p="http://schemas.openxmlformats.org/presentationml/2006/main" xmlns:a="http://schemas.openxmlformats.org/drawingml/2006/main">
+<p:notes xmlns:a="http://schemas.openxmlformats.org/drawingml/2006/main" xmlns:r="http://schemas.openxmlformats.org/officeDocument/2006/relationships" xmlns:p="http://schemas.openxmlformats.org/presentationml/2006/main">
   <p:cSld>
-    <p:spTree xmlns:r="http://schemas.openxmlformats.org/officeDocument/2006/relationships">
+    <p:spTree>
       <p:nvGrpSpPr>
         <p:cNvPr id="1" name=""/>
         <p:cNvGrpSpPr/>
@@ -1587,7 +1635,9 @@
               <a:defRPr sz="1200"/>
             </a:lvl1pPr>
           </a:lstStyle>
-          <a:p/>
+          <a:p>
+            <a:endParaRPr/>
+          </a:p>
         </p:txBody>
       </p:sp>
       <p:sp>
@@ -1617,8 +1667,8 @@
             </a:lvl1pPr>
           </a:lstStyle>
           <a:p>
-            <a:r id="{B7268E1E-0E44-426D-905E-8AD9B19D2182}" type="datetimeFigureOut">
-              <a:rPr lang="cs-CZ" smtClean="0"/>
+            <a:r>
+              <a:rPr lang="cs-CZ"/>
               <a:t>1.7.2013</a:t>
             </a:r>
           </a:p>
@@ -1652,7 +1702,9 @@
         <p:txBody>
           <a:bodyPr vert="horz" lIns="91440" tIns="45720" rIns="91440" bIns="45720" rtlCol="0" anchor="ctr"/>
           <a:lstStyle/>
-          <a:p/>
+          <a:p>
+            <a:endParaRPr/>
+          </a:p>
         </p:txBody>
       </p:sp>
       <p:sp>
@@ -1682,7 +1734,6 @@
               <a:rPr lang="en-US"/>
               <a:t>5</a:t>
             </a:r>
-            <a:endParaRPr lang="en-US" smtClean="0"/>
           </a:p>
         </p:txBody>
       </p:sp>
@@ -1712,7 +1763,9 @@
               <a:defRPr sz="1200"/>
             </a:lvl1pPr>
           </a:lstStyle>
-          <a:p/>
+          <a:p>
+            <a:endParaRPr/>
+          </a:p>
         </p:txBody>
       </p:sp>
       <p:sp>
@@ -1742,8 +1795,8 @@
             </a:lvl1pPr>
           </a:lstStyle>
           <a:p>
-            <a:r id="{871B2431-D351-4C6E-A3CF-9DFAC0E3E050}" type="slidenum">
-              <a:rPr lang="cs-CZ" smtClean="0"/>
+            <a:r>
+              <a:rPr lang="cs-CZ"/>
               <a:t>‹#›</a:t>
             </a:r>
           </a:p>
@@ -1758,9 +1811,9 @@
 </file>
 
 <file path=ppt/notesSlides/notesSlide6.xml><?xml version="1.0" encoding="utf-8"?>
-<p:notes xmlns:p="http://schemas.openxmlformats.org/presentationml/2006/main" xmlns:a="http://schemas.openxmlformats.org/drawingml/2006/main">
+<p:notes xmlns:a="http://schemas.openxmlformats.org/drawingml/2006/main" xmlns:r="http://schemas.openxmlformats.org/officeDocument/2006/relationships" xmlns:p="http://schemas.openxmlformats.org/presentationml/2006/main">
   <p:cSld>
-    <p:spTree xmlns:r="http://schemas.openxmlformats.org/officeDocument/2006/relationships">
+    <p:spTree>
       <p:nvGrpSpPr>
         <p:cNvPr id="1" name=""/>
         <p:cNvGrpSpPr/>
@@ -1800,7 +1853,9 @@
               <a:defRPr sz="1200"/>
             </a:lvl1pPr>
           </a:lstStyle>
-          <a:p/>
+          <a:p>
+            <a:endParaRPr/>
+          </a:p>
         </p:txBody>
       </p:sp>
       <p:sp>
@@ -1830,8 +1885,8 @@
             </a:lvl1pPr>
           </a:lstStyle>
           <a:p>
-            <a:r id="{B7268E1E-0E44-426D-905E-8AD9B19D2182}" type="datetimeFigureOut">
-              <a:rPr lang="cs-CZ" smtClean="0"/>
+            <a:r>
+              <a:rPr lang="cs-CZ"/>
               <a:t>1.7.2013</a:t>
             </a:r>
           </a:p>
@@ -1865,7 +1920,9 @@
         <p:txBody>
           <a:bodyPr vert="horz" lIns="91440" tIns="45720" rIns="91440" bIns="45720" rtlCol="0" anchor="ctr"/>
           <a:lstStyle/>
-          <a:p/>
+          <a:p>
+            <a:endParaRPr/>
+          </a:p>
         </p:txBody>
       </p:sp>
       <p:sp>
@@ -1895,7 +1952,6 @@
               <a:rPr lang="en-US"/>
               <a:t>6</a:t>
             </a:r>
-            <a:endParaRPr lang="en-US" smtClean="0"/>
           </a:p>
         </p:txBody>
       </p:sp>
@@ -1925,7 +1981,9 @@
               <a:defRPr sz="1200"/>
             </a:lvl1pPr>
           </a:lstStyle>
-          <a:p/>
+          <a:p>
+            <a:endParaRPr/>
+          </a:p>
         </p:txBody>
       </p:sp>
       <p:sp>
@@ -1955,8 +2013,8 @@
             </a:lvl1pPr>
           </a:lstStyle>
           <a:p>
-            <a:r id="{871B2431-D351-4C6E-A3CF-9DFAC0E3E050}" type="slidenum">
-              <a:rPr lang="cs-CZ" smtClean="0"/>
+            <a:r>
+              <a:rPr lang="cs-CZ"/>
               <a:t>‹#›</a:t>
             </a:r>
           </a:p>
@@ -1971,9 +2029,9 @@
 </file>
 
 <file path=ppt/notesSlides/notesSlide7.xml><?xml version="1.0" encoding="utf-8"?>
-<p:notes xmlns:p="http://schemas.openxmlformats.org/presentationml/2006/main" xmlns:a="http://schemas.openxmlformats.org/drawingml/2006/main">
+<p:notes xmlns:a="http://schemas.openxmlformats.org/drawingml/2006/main" xmlns:r="http://schemas.openxmlformats.org/officeDocument/2006/relationships" xmlns:p="http://schemas.openxmlformats.org/presentationml/2006/main">
   <p:cSld>
-    <p:spTree xmlns:r="http://schemas.openxmlformats.org/officeDocument/2006/relationships">
+    <p:spTree>
       <p:nvGrpSpPr>
         <p:cNvPr id="1" name=""/>
         <p:cNvGrpSpPr/>
@@ -2013,7 +2071,9 @@
               <a:defRPr sz="1200"/>
             </a:lvl1pPr>
           </a:lstStyle>
-          <a:p/>
+          <a:p>
+            <a:endParaRPr/>
+          </a:p>
         </p:txBody>
       </p:sp>
       <p:sp>
@@ -2043,8 +2103,8 @@
             </a:lvl1pPr>
           </a:lstStyle>
           <a:p>
-            <a:r id="{B7268E1E-0E44-426D-905E-8AD9B19D2182}" type="datetimeFigureOut">
-              <a:rPr lang="cs-CZ" smtClean="0"/>
+            <a:r>
+              <a:rPr lang="cs-CZ"/>
               <a:t>1.7.2013</a:t>
             </a:r>
           </a:p>
@@ -2078,7 +2138,9 @@
         <p:txBody>
           <a:bodyPr vert="horz" lIns="91440" tIns="45720" rIns="91440" bIns="45720" rtlCol="0" anchor="ctr"/>
           <a:lstStyle/>
-          <a:p/>
+          <a:p>
+            <a:endParaRPr/>
+          </a:p>
         </p:txBody>
       </p:sp>
       <p:sp>
@@ -2108,7 +2170,6 @@
               <a:rPr lang="en-US"/>
               <a:t>7</a:t>
             </a:r>
-            <a:endParaRPr lang="en-US" smtClean="0"/>
           </a:p>
         </p:txBody>
       </p:sp>
@@ -2138,7 +2199,9 @@
               <a:defRPr sz="1200"/>
             </a:lvl1pPr>
           </a:lstStyle>
-          <a:p/>
+          <a:p>
+            <a:endParaRPr/>
+          </a:p>
         </p:txBody>
       </p:sp>
       <p:sp>
@@ -2168,8 +2231,8 @@
             </a:lvl1pPr>
           </a:lstStyle>
           <a:p>
-            <a:r id="{871B2431-D351-4C6E-A3CF-9DFAC0E3E050}" type="slidenum">
-              <a:rPr lang="cs-CZ" smtClean="0"/>
+            <a:r>
+              <a:rPr lang="cs-CZ"/>
               <a:t>‹#›</a:t>
             </a:r>
           </a:p>
@@ -2184,9 +2247,9 @@
 </file>
 
 <file path=ppt/notesSlides/notesSlide8.xml><?xml version="1.0" encoding="utf-8"?>
-<p:notes xmlns:p="http://schemas.openxmlformats.org/presentationml/2006/main" xmlns:a="http://schemas.openxmlformats.org/drawingml/2006/main">
+<p:notes xmlns:a="http://schemas.openxmlformats.org/drawingml/2006/main" xmlns:r="http://schemas.openxmlformats.org/officeDocument/2006/relationships" xmlns:p="http://schemas.openxmlformats.org/presentationml/2006/main">
   <p:cSld>
-    <p:spTree xmlns:r="http://schemas.openxmlformats.org/officeDocument/2006/relationships">
+    <p:spTree>
       <p:nvGrpSpPr>
         <p:cNvPr id="1" name=""/>
         <p:cNvGrpSpPr/>
@@ -2226,7 +2289,9 @@
               <a:defRPr sz="1200"/>
             </a:lvl1pPr>
           </a:lstStyle>
-          <a:p/>
+          <a:p>
+            <a:endParaRPr/>
+          </a:p>
         </p:txBody>
       </p:sp>
       <p:sp>
@@ -2256,8 +2321,8 @@
             </a:lvl1pPr>
           </a:lstStyle>
           <a:p>
-            <a:r id="{B7268E1E-0E44-426D-905E-8AD9B19D2182}" type="datetimeFigureOut">
-              <a:rPr lang="cs-CZ" smtClean="0"/>
+            <a:r>
+              <a:rPr lang="cs-CZ"/>
               <a:t>1.7.2013</a:t>
             </a:r>
           </a:p>
@@ -2291,7 +2356,9 @@
         <p:txBody>
           <a:bodyPr vert="horz" lIns="91440" tIns="45720" rIns="91440" bIns="45720" rtlCol="0" anchor="ctr"/>
           <a:lstStyle/>
-          <a:p/>
+          <a:p>
+            <a:endParaRPr/>
+          </a:p>
         </p:txBody>
       </p:sp>
       <p:sp>
@@ -2321,7 +2388,6 @@
               <a:rPr lang="en-US"/>
               <a:t>8</a:t>
             </a:r>
-            <a:endParaRPr lang="en-US" smtClean="0"/>
           </a:p>
         </p:txBody>
       </p:sp>
@@ -2351,7 +2417,9 @@
               <a:defRPr sz="1200"/>
             </a:lvl1pPr>
           </a:lstStyle>
-          <a:p/>
+          <a:p>
+            <a:endParaRPr/>
+          </a:p>
         </p:txBody>
       </p:sp>
       <p:sp>
@@ -2381,8 +2449,8 @@
             </a:lvl1pPr>
           </a:lstStyle>
           <a:p>
-            <a:r id="{871B2431-D351-4C6E-A3CF-9DFAC0E3E050}" type="slidenum">
-              <a:rPr lang="cs-CZ" smtClean="0"/>
+            <a:r>
+              <a:rPr lang="cs-CZ"/>
               <a:t>‹#›</a:t>
             </a:r>
           </a:p>
@@ -2397,9 +2465,9 @@
 </file>
 
 <file path=ppt/notesSlides/notesSlide9.xml><?xml version="1.0" encoding="utf-8"?>
-<p:notes xmlns:p="http://schemas.openxmlformats.org/presentationml/2006/main" xmlns:a="http://schemas.openxmlformats.org/drawingml/2006/main">
+<p:notes xmlns:a="http://schemas.openxmlformats.org/drawingml/2006/main" xmlns:r="http://schemas.openxmlformats.org/officeDocument/2006/relationships" xmlns:p="http://schemas.openxmlformats.org/presentationml/2006/main">
   <p:cSld>
-    <p:spTree xmlns:r="http://schemas.openxmlformats.org/officeDocument/2006/relationships">
+    <p:spTree>
       <p:nvGrpSpPr>
         <p:cNvPr id="1" name=""/>
         <p:cNvGrpSpPr/>
@@ -2439,7 +2507,9 @@
               <a:defRPr sz="1200"/>
             </a:lvl1pPr>
           </a:lstStyle>
-          <a:p/>
+          <a:p>
+            <a:endParaRPr/>
+          </a:p>
         </p:txBody>
       </p:sp>
       <p:sp>
@@ -2469,8 +2539,8 @@
             </a:lvl1pPr>
           </a:lstStyle>
           <a:p>
-            <a:r id="{B7268E1E-0E44-426D-905E-8AD9B19D2182}" type="datetimeFigureOut">
-              <a:rPr lang="cs-CZ" smtClean="0"/>
+            <a:r>
+              <a:rPr lang="cs-CZ"/>
               <a:t>1.7.2013</a:t>
             </a:r>
           </a:p>
@@ -2488,8 +2558,8 @@
         </p:nvSpPr>
         <p:spPr>
           <a:xfrm>
-            <a:off x="2857500" y="512763"/>
-            <a:ext cx="3429000" cy="2566987"/>
+            <a:off x="2290763" y="512763"/>
+            <a:ext cx="4562475" cy="2566987"/>
           </a:xfrm>
           <a:prstGeom prst="rect">
             <a:avLst/>
@@ -2504,7 +2574,9 @@
         <p:txBody>
           <a:bodyPr vert="horz" lIns="91440" tIns="45720" rIns="91440" bIns="45720" rtlCol="0" anchor="ctr"/>
           <a:lstStyle/>
-          <a:p/>
+          <a:p>
+            <a:endParaRPr/>
+          </a:p>
         </p:txBody>
       </p:sp>
       <p:sp>
@@ -2534,7 +2606,6 @@
               <a:rPr lang="en-US"/>
               <a:t>9</a:t>
             </a:r>
-            <a:endParaRPr lang="en-US" smtClean="0"/>
           </a:p>
         </p:txBody>
       </p:sp>
@@ -2564,7 +2635,9 @@
               <a:defRPr sz="1200"/>
             </a:lvl1pPr>
           </a:lstStyle>
-          <a:p/>
+          <a:p>
+            <a:endParaRPr/>
+          </a:p>
         </p:txBody>
       </p:sp>
       <p:sp>
@@ -2594,8 +2667,8 @@
             </a:lvl1pPr>
           </a:lstStyle>
           <a:p>
-            <a:r id="{871B2431-D351-4C6E-A3CF-9DFAC0E3E050}" type="slidenum">
-              <a:rPr lang="cs-CZ" smtClean="0"/>
+            <a:r>
+              <a:rPr lang="cs-CZ"/>
               <a:t>‹#›</a:t>
             </a:r>
           </a:p>
@@ -2647,10 +2720,9 @@
           <a:lstStyle/>
           <a:p>
             <a:r>
-              <a:rPr lang="en-US" smtClean="0"/>
+              <a:rPr lang="en-US"/>
               <a:t>Click to edit Master title style</a:t>
             </a:r>
-            <a:endParaRPr lang="en-US"/>
           </a:p>
         </p:txBody>
       </p:sp>
@@ -2766,10 +2838,9 @@
           </a:lstStyle>
           <a:p>
             <a:r>
-              <a:rPr lang="en-US" smtClean="0"/>
+              <a:rPr lang="en-US"/>
               <a:t>Click to edit Master subtitle style</a:t>
             </a:r>
-            <a:endParaRPr lang="en-US"/>
           </a:p>
         </p:txBody>
       </p:sp>
@@ -2791,7 +2862,7 @@
             <a:fld id="{1D8BD707-D9CF-40AE-B4C6-C98DA3205C09}" type="datetimeFigureOut">
               <a:rPr lang="en-US" smtClean="0"/>
               <a:pPr/>
-              <a:t>8/1/2011</a:t>
+              <a:t>7/8/2026</a:t>
             </a:fld>
             <a:endParaRPr lang="en-US"/>
           </a:p>
@@ -2881,10 +2952,9 @@
           <a:lstStyle/>
           <a:p>
             <a:r>
-              <a:rPr lang="en-US" smtClean="0"/>
+              <a:rPr lang="en-US"/>
               <a:t>Click to edit Master title style</a:t>
             </a:r>
-            <a:endParaRPr lang="en-US"/>
           </a:p>
         </p:txBody>
       </p:sp>
@@ -2905,38 +2975,37 @@
           <a:p>
             <a:pPr lvl="0"/>
             <a:r>
-              <a:rPr lang="en-US" smtClean="0"/>
+              <a:rPr lang="en-US"/>
               <a:t>Click to edit Master text styles</a:t>
             </a:r>
           </a:p>
           <a:p>
             <a:pPr lvl="1"/>
             <a:r>
-              <a:rPr lang="en-US" smtClean="0"/>
+              <a:rPr lang="en-US"/>
               <a:t>Second level</a:t>
             </a:r>
           </a:p>
           <a:p>
             <a:pPr lvl="2"/>
             <a:r>
-              <a:rPr lang="en-US" smtClean="0"/>
+              <a:rPr lang="en-US"/>
               <a:t>Third level</a:t>
             </a:r>
           </a:p>
           <a:p>
             <a:pPr lvl="3"/>
             <a:r>
-              <a:rPr lang="en-US" smtClean="0"/>
+              <a:rPr lang="en-US"/>
               <a:t>Fourth level</a:t>
             </a:r>
           </a:p>
           <a:p>
             <a:pPr lvl="4"/>
             <a:r>
-              <a:rPr lang="en-US" smtClean="0"/>
+              <a:rPr lang="en-US"/>
               <a:t>Fifth level</a:t>
             </a:r>
-            <a:endParaRPr lang="en-US"/>
           </a:p>
         </p:txBody>
       </p:sp>
@@ -2958,7 +3027,7 @@
             <a:fld id="{1D8BD707-D9CF-40AE-B4C6-C98DA3205C09}" type="datetimeFigureOut">
               <a:rPr lang="en-US" smtClean="0"/>
               <a:pPr/>
-              <a:t>8/1/2011</a:t>
+              <a:t>7/8/2026</a:t>
             </a:fld>
             <a:endParaRPr lang="en-US"/>
           </a:p>
@@ -3053,10 +3122,9 @@
           <a:lstStyle/>
           <a:p>
             <a:r>
-              <a:rPr lang="en-US" smtClean="0"/>
+              <a:rPr lang="en-US"/>
               <a:t>Click to edit Master title style</a:t>
             </a:r>
-            <a:endParaRPr lang="en-US"/>
           </a:p>
         </p:txBody>
       </p:sp>
@@ -3082,38 +3150,37 @@
           <a:p>
             <a:pPr lvl="0"/>
             <a:r>
-              <a:rPr lang="en-US" smtClean="0"/>
+              <a:rPr lang="en-US"/>
               <a:t>Click to edit Master text styles</a:t>
             </a:r>
           </a:p>
           <a:p>
             <a:pPr lvl="1"/>
             <a:r>
-              <a:rPr lang="en-US" smtClean="0"/>
+              <a:rPr lang="en-US"/>
               <a:t>Second level</a:t>
             </a:r>
           </a:p>
           <a:p>
             <a:pPr lvl="2"/>
             <a:r>
-              <a:rPr lang="en-US" smtClean="0"/>
+              <a:rPr lang="en-US"/>
               <a:t>Third level</a:t>
             </a:r>
           </a:p>
           <a:p>
             <a:pPr lvl="3"/>
             <a:r>
-              <a:rPr lang="en-US" smtClean="0"/>
+              <a:rPr lang="en-US"/>
               <a:t>Fourth level</a:t>
             </a:r>
           </a:p>
           <a:p>
             <a:pPr lvl="4"/>
             <a:r>
-              <a:rPr lang="en-US" smtClean="0"/>
+              <a:rPr lang="en-US"/>
               <a:t>Fifth level</a:t>
             </a:r>
-            <a:endParaRPr lang="en-US"/>
           </a:p>
         </p:txBody>
       </p:sp>
@@ -3135,7 +3202,7 @@
             <a:fld id="{1D8BD707-D9CF-40AE-B4C6-C98DA3205C09}" type="datetimeFigureOut">
               <a:rPr lang="en-US" smtClean="0"/>
               <a:pPr/>
-              <a:t>8/1/2011</a:t>
+              <a:t>7/8/2026</a:t>
             </a:fld>
             <a:endParaRPr lang="en-US"/>
           </a:p>
@@ -3225,10 +3292,9 @@
           <a:lstStyle/>
           <a:p>
             <a:r>
-              <a:rPr lang="en-US" smtClean="0"/>
+              <a:rPr lang="en-US"/>
               <a:t>Click to edit Master title style</a:t>
             </a:r>
-            <a:endParaRPr lang="en-US"/>
           </a:p>
         </p:txBody>
       </p:sp>
@@ -3249,38 +3315,37 @@
           <a:p>
             <a:pPr lvl="0"/>
             <a:r>
-              <a:rPr lang="en-US" smtClean="0"/>
+              <a:rPr lang="en-US"/>
               <a:t>Click to edit Master text styles</a:t>
             </a:r>
           </a:p>
           <a:p>
             <a:pPr lvl="1"/>
             <a:r>
-              <a:rPr lang="en-US" smtClean="0"/>
+              <a:rPr lang="en-US"/>
               <a:t>Second level</a:t>
             </a:r>
           </a:p>
           <a:p>
             <a:pPr lvl="2"/>
             <a:r>
-              <a:rPr lang="en-US" smtClean="0"/>
+              <a:rPr lang="en-US"/>
               <a:t>Third level</a:t>
             </a:r>
           </a:p>
           <a:p>
             <a:pPr lvl="3"/>
             <a:r>
-              <a:rPr lang="en-US" smtClean="0"/>
+              <a:rPr lang="en-US"/>
               <a:t>Fourth level</a:t>
             </a:r>
           </a:p>
           <a:p>
             <a:pPr lvl="4"/>
             <a:r>
-              <a:rPr lang="en-US" smtClean="0"/>
+              <a:rPr lang="en-US"/>
               <a:t>Fifth level</a:t>
             </a:r>
-            <a:endParaRPr lang="en-US"/>
           </a:p>
         </p:txBody>
       </p:sp>
@@ -3302,7 +3367,7 @@
             <a:fld id="{1D8BD707-D9CF-40AE-B4C6-C98DA3205C09}" type="datetimeFigureOut">
               <a:rPr lang="en-US" smtClean="0"/>
               <a:pPr/>
-              <a:t>8/1/2011</a:t>
+              <a:t>7/8/2026</a:t>
             </a:fld>
             <a:endParaRPr lang="en-US"/>
           </a:p>
@@ -3401,10 +3466,9 @@
           </a:lstStyle>
           <a:p>
             <a:r>
-              <a:rPr lang="en-US" smtClean="0"/>
+              <a:rPr lang="en-US"/>
               <a:t>Click to edit Master title style</a:t>
             </a:r>
-            <a:endParaRPr lang="en-US"/>
           </a:p>
         </p:txBody>
       </p:sp>
@@ -3521,7 +3585,7 @@
           <a:p>
             <a:pPr lvl="0"/>
             <a:r>
-              <a:rPr lang="en-US" smtClean="0"/>
+              <a:rPr lang="en-US"/>
               <a:t>Click to edit Master text styles</a:t>
             </a:r>
           </a:p>
@@ -3545,7 +3609,7 @@
             <a:fld id="{1D8BD707-D9CF-40AE-B4C6-C98DA3205C09}" type="datetimeFigureOut">
               <a:rPr lang="en-US" smtClean="0"/>
               <a:pPr/>
-              <a:t>8/1/2011</a:t>
+              <a:t>7/8/2026</a:t>
             </a:fld>
             <a:endParaRPr lang="en-US"/>
           </a:p>
@@ -3635,10 +3699,9 @@
           <a:lstStyle/>
           <a:p>
             <a:r>
-              <a:rPr lang="en-US" smtClean="0"/>
+              <a:rPr lang="en-US"/>
               <a:t>Click to edit Master title style</a:t>
             </a:r>
-            <a:endParaRPr lang="en-US"/>
           </a:p>
         </p:txBody>
       </p:sp>
@@ -3692,38 +3755,37 @@
           <a:p>
             <a:pPr lvl="0"/>
             <a:r>
-              <a:rPr lang="en-US" smtClean="0"/>
+              <a:rPr lang="en-US"/>
               <a:t>Click to edit Master text styles</a:t>
             </a:r>
           </a:p>
           <a:p>
             <a:pPr lvl="1"/>
             <a:r>
-              <a:rPr lang="en-US" smtClean="0"/>
+              <a:rPr lang="en-US"/>
               <a:t>Second level</a:t>
             </a:r>
           </a:p>
           <a:p>
             <a:pPr lvl="2"/>
             <a:r>
-              <a:rPr lang="en-US" smtClean="0"/>
+              <a:rPr lang="en-US"/>
               <a:t>Third level</a:t>
             </a:r>
           </a:p>
           <a:p>
             <a:pPr lvl="3"/>
             <a:r>
-              <a:rPr lang="en-US" smtClean="0"/>
+              <a:rPr lang="en-US"/>
               <a:t>Fourth level</a:t>
             </a:r>
           </a:p>
           <a:p>
             <a:pPr lvl="4"/>
             <a:r>
-              <a:rPr lang="en-US" smtClean="0"/>
+              <a:rPr lang="en-US"/>
               <a:t>Fifth level</a:t>
             </a:r>
-            <a:endParaRPr lang="en-US"/>
           </a:p>
         </p:txBody>
       </p:sp>
@@ -3777,38 +3839,37 @@
           <a:p>
             <a:pPr lvl="0"/>
             <a:r>
-              <a:rPr lang="en-US" smtClean="0"/>
+              <a:rPr lang="en-US"/>
               <a:t>Click to edit Master text styles</a:t>
             </a:r>
           </a:p>
           <a:p>
             <a:pPr lvl="1"/>
             <a:r>
-              <a:rPr lang="en-US" smtClean="0"/>
+              <a:rPr lang="en-US"/>
               <a:t>Second level</a:t>
             </a:r>
           </a:p>
           <a:p>
             <a:pPr lvl="2"/>
             <a:r>
-              <a:rPr lang="en-US" smtClean="0"/>
+              <a:rPr lang="en-US"/>
               <a:t>Third level</a:t>
             </a:r>
           </a:p>
           <a:p>
             <a:pPr lvl="3"/>
             <a:r>
-              <a:rPr lang="en-US" smtClean="0"/>
+              <a:rPr lang="en-US"/>
               <a:t>Fourth level</a:t>
             </a:r>
           </a:p>
           <a:p>
             <a:pPr lvl="4"/>
             <a:r>
-              <a:rPr lang="en-US" smtClean="0"/>
+              <a:rPr lang="en-US"/>
               <a:t>Fifth level</a:t>
             </a:r>
-            <a:endParaRPr lang="en-US"/>
           </a:p>
         </p:txBody>
       </p:sp>
@@ -3830,7 +3891,7 @@
             <a:fld id="{1D8BD707-D9CF-40AE-B4C6-C98DA3205C09}" type="datetimeFigureOut">
               <a:rPr lang="en-US" smtClean="0"/>
               <a:pPr/>
-              <a:t>8/1/2011</a:t>
+              <a:t>7/8/2026</a:t>
             </a:fld>
             <a:endParaRPr lang="en-US"/>
           </a:p>
@@ -3924,10 +3985,9 @@
           </a:lstStyle>
           <a:p>
             <a:r>
-              <a:rPr lang="en-US" smtClean="0"/>
+              <a:rPr lang="en-US"/>
               <a:t>Click to edit Master title style</a:t>
             </a:r>
-            <a:endParaRPr lang="en-US"/>
           </a:p>
         </p:txBody>
       </p:sp>
@@ -3990,7 +4050,7 @@
           <a:p>
             <a:pPr lvl="0"/>
             <a:r>
-              <a:rPr lang="en-US" smtClean="0"/>
+              <a:rPr lang="en-US"/>
               <a:t>Click to edit Master text styles</a:t>
             </a:r>
           </a:p>
@@ -4046,38 +4106,37 @@
           <a:p>
             <a:pPr lvl="0"/>
             <a:r>
-              <a:rPr lang="en-US" smtClean="0"/>
+              <a:rPr lang="en-US"/>
               <a:t>Click to edit Master text styles</a:t>
             </a:r>
           </a:p>
           <a:p>
             <a:pPr lvl="1"/>
             <a:r>
-              <a:rPr lang="en-US" smtClean="0"/>
+              <a:rPr lang="en-US"/>
               <a:t>Second level</a:t>
             </a:r>
           </a:p>
           <a:p>
             <a:pPr lvl="2"/>
             <a:r>
-              <a:rPr lang="en-US" smtClean="0"/>
+              <a:rPr lang="en-US"/>
               <a:t>Third level</a:t>
             </a:r>
           </a:p>
           <a:p>
             <a:pPr lvl="3"/>
             <a:r>
-              <a:rPr lang="en-US" smtClean="0"/>
+              <a:rPr lang="en-US"/>
               <a:t>Fourth level</a:t>
             </a:r>
           </a:p>
           <a:p>
             <a:pPr lvl="4"/>
             <a:r>
-              <a:rPr lang="en-US" smtClean="0"/>
+              <a:rPr lang="en-US"/>
               <a:t>Fifth level</a:t>
             </a:r>
-            <a:endParaRPr lang="en-US"/>
           </a:p>
         </p:txBody>
       </p:sp>
@@ -4140,7 +4199,7 @@
           <a:p>
             <a:pPr lvl="0"/>
             <a:r>
-              <a:rPr lang="en-US" smtClean="0"/>
+              <a:rPr lang="en-US"/>
               <a:t>Click to edit Master text styles</a:t>
             </a:r>
           </a:p>
@@ -4196,38 +4255,37 @@
           <a:p>
             <a:pPr lvl="0"/>
             <a:r>
-              <a:rPr lang="en-US" smtClean="0"/>
+              <a:rPr lang="en-US"/>
               <a:t>Click to edit Master text styles</a:t>
             </a:r>
           </a:p>
           <a:p>
             <a:pPr lvl="1"/>
             <a:r>
-              <a:rPr lang="en-US" smtClean="0"/>
+              <a:rPr lang="en-US"/>
               <a:t>Second level</a:t>
             </a:r>
           </a:p>
           <a:p>
             <a:pPr lvl="2"/>
             <a:r>
-              <a:rPr lang="en-US" smtClean="0"/>
+              <a:rPr lang="en-US"/>
               <a:t>Third level</a:t>
             </a:r>
           </a:p>
           <a:p>
             <a:pPr lvl="3"/>
             <a:r>
-              <a:rPr lang="en-US" smtClean="0"/>
+              <a:rPr lang="en-US"/>
               <a:t>Fourth level</a:t>
             </a:r>
           </a:p>
           <a:p>
             <a:pPr lvl="4"/>
             <a:r>
-              <a:rPr lang="en-US" smtClean="0"/>
+              <a:rPr lang="en-US"/>
               <a:t>Fifth level</a:t>
             </a:r>
-            <a:endParaRPr lang="en-US"/>
           </a:p>
         </p:txBody>
       </p:sp>
@@ -4249,7 +4307,7 @@
             <a:fld id="{1D8BD707-D9CF-40AE-B4C6-C98DA3205C09}" type="datetimeFigureOut">
               <a:rPr lang="en-US" smtClean="0"/>
               <a:pPr/>
-              <a:t>8/1/2011</a:t>
+              <a:t>7/8/2026</a:t>
             </a:fld>
             <a:endParaRPr lang="en-US"/>
           </a:p>
@@ -4339,10 +4397,9 @@
           <a:lstStyle/>
           <a:p>
             <a:r>
-              <a:rPr lang="en-US" smtClean="0"/>
+              <a:rPr lang="en-US"/>
               <a:t>Click to edit Master title style</a:t>
             </a:r>
-            <a:endParaRPr lang="en-US"/>
           </a:p>
         </p:txBody>
       </p:sp>
@@ -4364,7 +4421,7 @@
             <a:fld id="{1D8BD707-D9CF-40AE-B4C6-C98DA3205C09}" type="datetimeFigureOut">
               <a:rPr lang="en-US" smtClean="0"/>
               <a:pPr/>
-              <a:t>8/1/2011</a:t>
+              <a:t>7/8/2026</a:t>
             </a:fld>
             <a:endParaRPr lang="en-US"/>
           </a:p>
@@ -4456,7 +4513,7 @@
             <a:fld id="{1D8BD707-D9CF-40AE-B4C6-C98DA3205C09}" type="datetimeFigureOut">
               <a:rPr lang="en-US" smtClean="0"/>
               <a:pPr/>
-              <a:t>8/1/2011</a:t>
+              <a:t>7/8/2026</a:t>
             </a:fld>
             <a:endParaRPr lang="en-US"/>
           </a:p>
@@ -4555,10 +4612,9 @@
           </a:lstStyle>
           <a:p>
             <a:r>
-              <a:rPr lang="en-US" smtClean="0"/>
+              <a:rPr lang="en-US"/>
               <a:t>Click to edit Master title style</a:t>
             </a:r>
-            <a:endParaRPr lang="en-US"/>
           </a:p>
         </p:txBody>
       </p:sp>
@@ -4612,38 +4668,37 @@
           <a:p>
             <a:pPr lvl="0"/>
             <a:r>
-              <a:rPr lang="en-US" smtClean="0"/>
+              <a:rPr lang="en-US"/>
               <a:t>Click to edit Master text styles</a:t>
             </a:r>
           </a:p>
           <a:p>
             <a:pPr lvl="1"/>
             <a:r>
-              <a:rPr lang="en-US" smtClean="0"/>
+              <a:rPr lang="en-US"/>
               <a:t>Second level</a:t>
             </a:r>
           </a:p>
           <a:p>
             <a:pPr lvl="2"/>
             <a:r>
-              <a:rPr lang="en-US" smtClean="0"/>
+              <a:rPr lang="en-US"/>
               <a:t>Third level</a:t>
             </a:r>
           </a:p>
           <a:p>
             <a:pPr lvl="3"/>
             <a:r>
-              <a:rPr lang="en-US" smtClean="0"/>
+              <a:rPr lang="en-US"/>
               <a:t>Fourth level</a:t>
             </a:r>
           </a:p>
           <a:p>
             <a:pPr lvl="4"/>
             <a:r>
-              <a:rPr lang="en-US" smtClean="0"/>
+              <a:rPr lang="en-US"/>
               <a:t>Fifth level</a:t>
             </a:r>
-            <a:endParaRPr lang="en-US"/>
           </a:p>
         </p:txBody>
       </p:sp>
@@ -4706,7 +4761,7 @@
           <a:p>
             <a:pPr lvl="0"/>
             <a:r>
-              <a:rPr lang="en-US" smtClean="0"/>
+              <a:rPr lang="en-US"/>
               <a:t>Click to edit Master text styles</a:t>
             </a:r>
           </a:p>
@@ -4730,7 +4785,7 @@
             <a:fld id="{1D8BD707-D9CF-40AE-B4C6-C98DA3205C09}" type="datetimeFigureOut">
               <a:rPr lang="en-US" smtClean="0"/>
               <a:pPr/>
-              <a:t>8/1/2011</a:t>
+              <a:t>7/8/2026</a:t>
             </a:fld>
             <a:endParaRPr lang="en-US"/>
           </a:p>
@@ -4829,10 +4884,9 @@
           </a:lstStyle>
           <a:p>
             <a:r>
-              <a:rPr lang="en-US" smtClean="0"/>
+              <a:rPr lang="en-US"/>
               <a:t>Click to edit Master title style</a:t>
             </a:r>
-            <a:endParaRPr lang="en-US"/>
           </a:p>
         </p:txBody>
       </p:sp>
@@ -4956,7 +5010,7 @@
           <a:p>
             <a:pPr lvl="0"/>
             <a:r>
-              <a:rPr lang="en-US" smtClean="0"/>
+              <a:rPr lang="en-US"/>
               <a:t>Click to edit Master text styles</a:t>
             </a:r>
           </a:p>
@@ -4980,7 +5034,7 @@
             <a:fld id="{1D8BD707-D9CF-40AE-B4C6-C98DA3205C09}" type="datetimeFigureOut">
               <a:rPr lang="en-US" smtClean="0"/>
               <a:pPr/>
-              <a:t>8/1/2011</a:t>
+              <a:t>7/8/2026</a:t>
             </a:fld>
             <a:endParaRPr lang="en-US"/>
           </a:p>
@@ -5085,10 +5139,9 @@
           <a:lstStyle/>
           <a:p>
             <a:r>
-              <a:rPr lang="en-US" smtClean="0"/>
+              <a:rPr lang="en-US"/>
               <a:t>Click to edit Master title style</a:t>
             </a:r>
-            <a:endParaRPr lang="en-US"/>
           </a:p>
         </p:txBody>
       </p:sp>
@@ -5119,38 +5172,37 @@
           <a:p>
             <a:pPr lvl="0"/>
             <a:r>
-              <a:rPr lang="en-US" smtClean="0"/>
+              <a:rPr lang="en-US"/>
               <a:t>Click to edit Master text styles</a:t>
             </a:r>
           </a:p>
           <a:p>
             <a:pPr lvl="1"/>
             <a:r>
-              <a:rPr lang="en-US" smtClean="0"/>
+              <a:rPr lang="en-US"/>
               <a:t>Second level</a:t>
             </a:r>
           </a:p>
           <a:p>
             <a:pPr lvl="2"/>
             <a:r>
-              <a:rPr lang="en-US" smtClean="0"/>
+              <a:rPr lang="en-US"/>
               <a:t>Third level</a:t>
             </a:r>
           </a:p>
           <a:p>
             <a:pPr lvl="3"/>
             <a:r>
-              <a:rPr lang="en-US" smtClean="0"/>
+              <a:rPr lang="en-US"/>
               <a:t>Fourth level</a:t>
             </a:r>
           </a:p>
           <a:p>
             <a:pPr lvl="4"/>
             <a:r>
-              <a:rPr lang="en-US" smtClean="0"/>
+              <a:rPr lang="en-US"/>
               <a:t>Fifth level</a:t>
             </a:r>
-            <a:endParaRPr lang="en-US"/>
           </a:p>
         </p:txBody>
       </p:sp>
@@ -5190,7 +5242,7 @@
             <a:fld id="{1D8BD707-D9CF-40AE-B4C6-C98DA3205C09}" type="datetimeFigureOut">
               <a:rPr lang="en-US" smtClean="0"/>
               <a:pPr/>
-              <a:t>8/1/2011</a:t>
+              <a:t>7/8/2026</a:t>
             </a:fld>
             <a:endParaRPr lang="en-US"/>
           </a:p>
@@ -5545,7 +5597,7 @@
 </file>
 
 <file path=ppt/slides/slide1.xml><?xml version="1.0" encoding="utf-8"?>
-<p:sld xmlns:p="http://schemas.openxmlformats.org/presentationml/2006/main" xmlns:a="http://schemas.openxmlformats.org/drawingml/2006/main" xmlns:r="http://schemas.openxmlformats.org/officeDocument/2006/relationships">
+<p:sld xmlns:a="http://schemas.openxmlformats.org/drawingml/2006/main" xmlns:r="http://schemas.openxmlformats.org/officeDocument/2006/relationships" xmlns:p="http://schemas.openxmlformats.org/presentationml/2006/main">
   <p:cSld>
     <p:spTree>
       <p:nvGrpSpPr>
@@ -5563,12 +5615,12 @@
       </p:grpSpPr>
       <p:grpSp>
         <p:nvGrpSpPr>
-          <p:cNvPr name="Group 2" id="2"/>
+          <p:cNvPr id="2" name="Group 2"/>
           <p:cNvGrpSpPr/>
           <p:nvPr/>
         </p:nvGrpSpPr>
         <p:grpSpPr>
-          <a:xfrm rot="0">
+          <a:xfrm>
             <a:off x="0" y="0"/>
             <a:ext cx="18288000" cy="10287000"/>
             <a:chOff x="0" y="0"/>
@@ -5577,12 +5629,12 @@
         </p:grpSpPr>
         <p:sp>
           <p:nvSpPr>
-            <p:cNvPr name="Freeform 3" id="3"/>
+            <p:cNvPr id="3" name="Freeform 3"/>
             <p:cNvSpPr/>
             <p:nvPr/>
           </p:nvSpPr>
           <p:spPr>
-            <a:xfrm flipH="false" flipV="false" rot="0">
+            <a:xfrm>
               <a:off x="0" y="0"/>
               <a:ext cx="24384000" cy="13716000"/>
             </a:xfrm>
@@ -5591,9 +5643,9 @@
               <a:gdLst/>
               <a:ahLst/>
               <a:cxnLst/>
-              <a:rect r="r" b="b" t="t" l="l"/>
+              <a:rect l="l" t="t" r="r" b="b"/>
               <a:pathLst>
-                <a:path h="13716000" w="24384000">
+                <a:path w="24384000" h="13716000">
                   <a:moveTo>
                     <a:pt x="0" y="0"/>
                   </a:moveTo>
@@ -5618,12 +5670,12 @@
       </p:grpSp>
       <p:grpSp>
         <p:nvGrpSpPr>
-          <p:cNvPr name="Group 4" id="4"/>
+          <p:cNvPr id="4" name="Group 4"/>
           <p:cNvGrpSpPr/>
           <p:nvPr/>
         </p:nvGrpSpPr>
         <p:grpSpPr>
-          <a:xfrm rot="0">
+          <a:xfrm>
             <a:off x="0" y="0"/>
             <a:ext cx="18288000" cy="10287000"/>
             <a:chOff x="0" y="0"/>
@@ -5632,12 +5684,12 @@
         </p:grpSpPr>
         <p:sp>
           <p:nvSpPr>
-            <p:cNvPr name="Freeform 5" id="5"/>
+            <p:cNvPr id="5" name="Freeform 5"/>
             <p:cNvSpPr/>
             <p:nvPr/>
           </p:nvSpPr>
           <p:spPr>
-            <a:xfrm flipH="false" flipV="false" rot="0">
+            <a:xfrm>
               <a:off x="0" y="0"/>
               <a:ext cx="24384000" cy="13716000"/>
             </a:xfrm>
@@ -5646,9 +5698,9 @@
               <a:gdLst/>
               <a:ahLst/>
               <a:cxnLst/>
-              <a:rect r="r" b="b" t="t" l="l"/>
+              <a:rect l="l" t="t" r="r" b="b"/>
               <a:pathLst>
-                <a:path h="13716000" w="24384000">
+                <a:path w="24384000" h="13716000">
                   <a:moveTo>
                     <a:pt x="0" y="0"/>
                   </a:moveTo>
@@ -5673,12 +5725,12 @@
       </p:grpSp>
       <p:grpSp>
         <p:nvGrpSpPr>
-          <p:cNvPr name="Group 6" id="6"/>
+          <p:cNvPr id="6" name="Group 6"/>
           <p:cNvGrpSpPr/>
           <p:nvPr/>
         </p:nvGrpSpPr>
         <p:grpSpPr>
-          <a:xfrm rot="0">
+          <a:xfrm>
             <a:off x="0" y="0"/>
             <a:ext cx="6858000" cy="10287000"/>
             <a:chOff x="0" y="0"/>
@@ -5687,12 +5739,12 @@
         </p:grpSpPr>
         <p:sp>
           <p:nvSpPr>
-            <p:cNvPr name="Freeform 7" id="7" descr="preencoded.png"/>
+            <p:cNvPr id="7" name="Freeform 7" descr="preencoded.png"/>
             <p:cNvSpPr/>
             <p:nvPr/>
           </p:nvSpPr>
           <p:spPr>
-            <a:xfrm flipH="false" flipV="false" rot="0">
+            <a:xfrm>
               <a:off x="0" y="0"/>
               <a:ext cx="9144000" cy="13716000"/>
             </a:xfrm>
@@ -5701,9 +5753,9 @@
               <a:gdLst/>
               <a:ahLst/>
               <a:cxnLst/>
-              <a:rect r="r" b="b" t="t" l="l"/>
+              <a:rect l="l" t="t" r="r" b="b"/>
               <a:pathLst>
-                <a:path h="13716000" w="9144000">
+                <a:path w="9144000" h="13716000">
                   <a:moveTo>
                     <a:pt x="0" y="0"/>
                   </a:moveTo>
@@ -5726,7 +5778,7 @@
             <a:blipFill>
               <a:blip r:embed="rId3"/>
               <a:stretch>
-                <a:fillRect l="0" t="0" r="0" b="0"/>
+                <a:fillRect/>
               </a:stretch>
             </a:blipFill>
           </p:spPr>
@@ -5734,12 +5786,12 @@
       </p:grpSp>
       <p:sp>
         <p:nvSpPr>
-          <p:cNvPr name="TextBox 8" id="8"/>
-          <p:cNvSpPr txBox="true"/>
-          <p:nvPr/>
-        </p:nvSpPr>
-        <p:spPr>
-          <a:xfrm rot="0">
+          <p:cNvPr id="8" name="TextBox 8"/>
+          <p:cNvSpPr txBox="1"/>
+          <p:nvPr/>
+        </p:nvSpPr>
+        <p:spPr>
+          <a:xfrm>
             <a:off x="7850238" y="2919565"/>
             <a:ext cx="9445523" cy="1790995"/>
           </a:xfrm>
@@ -5748,7 +5800,7 @@
           </a:prstGeom>
         </p:spPr>
         <p:txBody>
-          <a:bodyPr anchor="t" rtlCol="false" tIns="0" lIns="0" bIns="0" rIns="0">
+          <a:bodyPr lIns="0" tIns="0" rIns="0" bIns="0" rtlCol="0" anchor="t">
             <a:spAutoFit/>
           </a:bodyPr>
           <a:lstStyle/>
@@ -5759,7 +5811,7 @@
               </a:lnSpc>
             </a:pPr>
             <a:r>
-              <a:rPr lang="en-US" sz="5500" b="true">
+              <a:rPr lang="en-US" sz="5500" b="1">
                 <a:solidFill>
                   <a:srgbClr val="000000"/>
                 </a:solidFill>
@@ -5775,12 +5827,12 @@
       </p:sp>
       <p:sp>
         <p:nvSpPr>
-          <p:cNvPr name="TextBox 9" id="9"/>
-          <p:cNvSpPr txBox="true"/>
-          <p:nvPr/>
-        </p:nvSpPr>
-        <p:spPr>
-          <a:xfrm rot="0">
+          <p:cNvPr id="9" name="TextBox 9"/>
+          <p:cNvSpPr txBox="1"/>
+          <p:nvPr/>
+        </p:nvSpPr>
+        <p:spPr>
+          <a:xfrm>
             <a:off x="7850238" y="5050031"/>
             <a:ext cx="9445523" cy="1446609"/>
           </a:xfrm>
@@ -5789,7 +5841,7 @@
           </a:prstGeom>
         </p:spPr>
         <p:txBody>
-          <a:bodyPr anchor="t" rtlCol="false" tIns="0" lIns="0" bIns="0" rIns="0">
+          <a:bodyPr lIns="0" tIns="0" rIns="0" bIns="0" rtlCol="0" anchor="t">
             <a:spAutoFit/>
           </a:bodyPr>
           <a:lstStyle/>
@@ -5816,12 +5868,12 @@
       </p:sp>
       <p:sp>
         <p:nvSpPr>
-          <p:cNvPr name="TextBox 10" id="10"/>
-          <p:cNvSpPr txBox="true"/>
-          <p:nvPr/>
-        </p:nvSpPr>
-        <p:spPr>
-          <a:xfrm rot="0">
+          <p:cNvPr id="10" name="TextBox 10"/>
+          <p:cNvSpPr txBox="1"/>
+          <p:nvPr/>
+        </p:nvSpPr>
+        <p:spPr>
+          <a:xfrm>
             <a:off x="8020345" y="6833892"/>
             <a:ext cx="3608337" cy="429520"/>
           </a:xfrm>
@@ -5830,7 +5882,7 @@
           </a:prstGeom>
         </p:spPr>
         <p:txBody>
-          <a:bodyPr anchor="t" rtlCol="false" tIns="0" lIns="0" bIns="0" rIns="0">
+          <a:bodyPr lIns="0" tIns="0" rIns="0" bIns="0" rtlCol="0" anchor="t">
             <a:spAutoFit/>
           </a:bodyPr>
           <a:lstStyle/>
@@ -5857,12 +5909,12 @@
       </p:sp>
       <p:sp>
         <p:nvSpPr>
-          <p:cNvPr name="TextBox 11" id="11"/>
-          <p:cNvSpPr txBox="true"/>
-          <p:nvPr/>
-        </p:nvSpPr>
-        <p:spPr>
-          <a:xfrm rot="0">
+          <p:cNvPr id="11" name="TextBox 11"/>
+          <p:cNvSpPr txBox="1"/>
+          <p:nvPr/>
+        </p:nvSpPr>
+        <p:spPr>
+          <a:xfrm>
             <a:off x="11196190" y="6833892"/>
             <a:ext cx="4917129" cy="429520"/>
           </a:xfrm>
@@ -5871,7 +5923,7 @@
           </a:prstGeom>
         </p:spPr>
         <p:txBody>
-          <a:bodyPr anchor="t" rtlCol="false" tIns="0" lIns="0" bIns="0" rIns="0">
+          <a:bodyPr lIns="0" tIns="0" rIns="0" bIns="0" rtlCol="0" anchor="t">
             <a:spAutoFit/>
           </a:bodyPr>
           <a:lstStyle/>
@@ -5905,7 +5957,7 @@
 </file>
 
 <file path=ppt/slides/slide10.xml><?xml version="1.0" encoding="utf-8"?>
-<p:sld xmlns:p="http://schemas.openxmlformats.org/presentationml/2006/main" xmlns:a="http://schemas.openxmlformats.org/drawingml/2006/main" xmlns:r="http://schemas.openxmlformats.org/officeDocument/2006/relationships">
+<p:sld xmlns:a="http://schemas.openxmlformats.org/drawingml/2006/main" xmlns:r="http://schemas.openxmlformats.org/officeDocument/2006/relationships" xmlns:p="http://schemas.openxmlformats.org/presentationml/2006/main">
   <p:cSld>
     <p:spTree>
       <p:nvGrpSpPr>
@@ -5923,12 +5975,12 @@
       </p:grpSpPr>
       <p:grpSp>
         <p:nvGrpSpPr>
-          <p:cNvPr name="Group 2" id="2"/>
+          <p:cNvPr id="2" name="Group 2"/>
           <p:cNvGrpSpPr/>
           <p:nvPr/>
         </p:nvGrpSpPr>
         <p:grpSpPr>
-          <a:xfrm rot="0">
+          <a:xfrm>
             <a:off x="0" y="0"/>
             <a:ext cx="18288000" cy="10287000"/>
             <a:chOff x="0" y="0"/>
@@ -5937,12 +5989,12 @@
         </p:grpSpPr>
         <p:sp>
           <p:nvSpPr>
-            <p:cNvPr name="Freeform 3" id="3"/>
+            <p:cNvPr id="3" name="Freeform 3"/>
             <p:cNvSpPr/>
             <p:nvPr/>
           </p:nvSpPr>
           <p:spPr>
-            <a:xfrm flipH="false" flipV="false" rot="0">
+            <a:xfrm>
               <a:off x="0" y="0"/>
               <a:ext cx="24384000" cy="13716000"/>
             </a:xfrm>
@@ -5951,9 +6003,9 @@
               <a:gdLst/>
               <a:ahLst/>
               <a:cxnLst/>
-              <a:rect r="r" b="b" t="t" l="l"/>
+              <a:rect l="l" t="t" r="r" b="b"/>
               <a:pathLst>
-                <a:path h="13716000" w="24384000">
+                <a:path w="24384000" h="13716000">
                   <a:moveTo>
                     <a:pt x="0" y="0"/>
                   </a:moveTo>
@@ -5978,12 +6030,12 @@
       </p:grpSp>
       <p:grpSp>
         <p:nvGrpSpPr>
-          <p:cNvPr name="Group 4" id="4"/>
+          <p:cNvPr id="4" name="Group 4"/>
           <p:cNvGrpSpPr/>
           <p:nvPr/>
         </p:nvGrpSpPr>
         <p:grpSpPr>
-          <a:xfrm rot="0">
+          <a:xfrm>
             <a:off x="0" y="0"/>
             <a:ext cx="18288000" cy="10287000"/>
             <a:chOff x="0" y="0"/>
@@ -5992,12 +6044,12 @@
         </p:grpSpPr>
         <p:sp>
           <p:nvSpPr>
-            <p:cNvPr name="Freeform 5" id="5"/>
+            <p:cNvPr id="5" name="Freeform 5"/>
             <p:cNvSpPr/>
             <p:nvPr/>
           </p:nvSpPr>
           <p:spPr>
-            <a:xfrm flipH="false" flipV="false" rot="0">
+            <a:xfrm>
               <a:off x="0" y="0"/>
               <a:ext cx="24384000" cy="13716000"/>
             </a:xfrm>
@@ -6006,9 +6058,9 @@
               <a:gdLst/>
               <a:ahLst/>
               <a:cxnLst/>
-              <a:rect r="r" b="b" t="t" l="l"/>
+              <a:rect l="l" t="t" r="r" b="b"/>
               <a:pathLst>
-                <a:path h="13716000" w="24384000">
+                <a:path w="24384000" h="13716000">
                   <a:moveTo>
                     <a:pt x="0" y="0"/>
                   </a:moveTo>
@@ -6033,12 +6085,12 @@
       </p:grpSp>
       <p:grpSp>
         <p:nvGrpSpPr>
-          <p:cNvPr name="Group 6" id="6"/>
+          <p:cNvPr id="6" name="Group 6"/>
           <p:cNvGrpSpPr/>
           <p:nvPr/>
         </p:nvGrpSpPr>
         <p:grpSpPr>
-          <a:xfrm rot="0">
+          <a:xfrm>
             <a:off x="0" y="0"/>
             <a:ext cx="6858000" cy="10287000"/>
             <a:chOff x="0" y="0"/>
@@ -6047,12 +6099,12 @@
         </p:grpSpPr>
         <p:sp>
           <p:nvSpPr>
-            <p:cNvPr name="Freeform 7" id="7" descr="preencoded.png"/>
+            <p:cNvPr id="7" name="Freeform 7" descr="preencoded.png"/>
             <p:cNvSpPr/>
             <p:nvPr/>
           </p:nvSpPr>
           <p:spPr>
-            <a:xfrm flipH="false" flipV="false" rot="0">
+            <a:xfrm>
               <a:off x="0" y="0"/>
               <a:ext cx="9144000" cy="13716000"/>
             </a:xfrm>
@@ -6061,9 +6113,9 @@
               <a:gdLst/>
               <a:ahLst/>
               <a:cxnLst/>
-              <a:rect r="r" b="b" t="t" l="l"/>
+              <a:rect l="l" t="t" r="r" b="b"/>
               <a:pathLst>
-                <a:path h="13716000" w="9144000">
+                <a:path w="9144000" h="13716000">
                   <a:moveTo>
                     <a:pt x="0" y="0"/>
                   </a:moveTo>
@@ -6086,7 +6138,7 @@
             <a:blipFill>
               <a:blip r:embed="rId3"/>
               <a:stretch>
-                <a:fillRect l="0" t="0" r="0" b="0"/>
+                <a:fillRect/>
               </a:stretch>
             </a:blipFill>
           </p:spPr>
@@ -6094,12 +6146,12 @@
       </p:grpSp>
       <p:grpSp>
         <p:nvGrpSpPr>
-          <p:cNvPr name="Group 8" id="8"/>
+          <p:cNvPr id="8" name="Group 8"/>
           <p:cNvGrpSpPr/>
           <p:nvPr/>
         </p:nvGrpSpPr>
         <p:grpSpPr>
-          <a:xfrm rot="0">
+          <a:xfrm>
             <a:off x="7850238" y="922887"/>
             <a:ext cx="2532307" cy="510483"/>
             <a:chOff x="0" y="0"/>
@@ -6108,12 +6160,12 @@
         </p:grpSpPr>
         <p:sp>
           <p:nvSpPr>
-            <p:cNvPr name="Freeform 9" id="9"/>
+            <p:cNvPr id="9" name="Freeform 9"/>
             <p:cNvSpPr/>
             <p:nvPr/>
           </p:nvSpPr>
           <p:spPr>
-            <a:xfrm flipH="false" flipV="false" rot="0">
+            <a:xfrm>
               <a:off x="0" y="0"/>
               <a:ext cx="3376422" cy="680593"/>
             </a:xfrm>
@@ -6122,9 +6174,9 @@
               <a:gdLst/>
               <a:ahLst/>
               <a:cxnLst/>
-              <a:rect r="r" b="b" t="t" l="l"/>
+              <a:rect l="l" t="t" r="r" b="b"/>
               <a:pathLst>
-                <a:path h="680593" w="3376422">
+                <a:path w="3376422" h="680593">
                   <a:moveTo>
                     <a:pt x="0" y="123063"/>
                   </a:moveTo>
@@ -6169,12 +6221,12 @@
       </p:grpSp>
       <p:sp>
         <p:nvSpPr>
-          <p:cNvPr name="TextBox 10" id="10"/>
-          <p:cNvSpPr txBox="true"/>
-          <p:nvPr/>
-        </p:nvSpPr>
-        <p:spPr>
-          <a:xfrm rot="0">
+          <p:cNvPr id="10" name="TextBox 10"/>
+          <p:cNvSpPr txBox="1"/>
+          <p:nvPr/>
+        </p:nvSpPr>
+        <p:spPr>
+          <a:xfrm>
             <a:off x="8014992" y="948033"/>
             <a:ext cx="3117209" cy="403022"/>
           </a:xfrm>
@@ -6183,7 +6235,7 @@
           </a:prstGeom>
         </p:spPr>
         <p:txBody>
-          <a:bodyPr anchor="t" rtlCol="false" tIns="0" lIns="0" bIns="0" rIns="0">
+          <a:bodyPr lIns="0" tIns="0" rIns="0" bIns="0" rtlCol="0" anchor="t">
             <a:spAutoFit/>
           </a:bodyPr>
           <a:lstStyle/>
@@ -6210,12 +6262,12 @@
       </p:sp>
       <p:sp>
         <p:nvSpPr>
-          <p:cNvPr name="TextBox 11" id="11"/>
-          <p:cNvSpPr txBox="true"/>
-          <p:nvPr/>
-        </p:nvSpPr>
-        <p:spPr>
-          <a:xfrm rot="0">
+          <p:cNvPr id="11" name="TextBox 11"/>
+          <p:cNvSpPr txBox="1"/>
+          <p:nvPr/>
+        </p:nvSpPr>
+        <p:spPr>
+          <a:xfrm>
             <a:off x="7850238" y="1520723"/>
             <a:ext cx="9445523" cy="877338"/>
           </a:xfrm>
@@ -6224,7 +6276,7 @@
           </a:prstGeom>
         </p:spPr>
         <p:txBody>
-          <a:bodyPr anchor="t" rtlCol="false" tIns="0" lIns="0" bIns="0" rIns="0">
+          <a:bodyPr lIns="0" tIns="0" rIns="0" bIns="0" rtlCol="0" anchor="t">
             <a:spAutoFit/>
           </a:bodyPr>
           <a:lstStyle/>
@@ -6235,7 +6287,7 @@
               </a:lnSpc>
             </a:pPr>
             <a:r>
-              <a:rPr lang="en-US" sz="5400" b="true">
+              <a:rPr lang="en-US" sz="5400" b="1">
                 <a:solidFill>
                   <a:srgbClr val="000000"/>
                 </a:solidFill>
@@ -6251,12 +6303,12 @@
       </p:sp>
       <p:grpSp>
         <p:nvGrpSpPr>
-          <p:cNvPr name="Group 12" id="12"/>
+          <p:cNvPr id="12" name="Group 12"/>
           <p:cNvGrpSpPr/>
           <p:nvPr/>
         </p:nvGrpSpPr>
         <p:grpSpPr>
-          <a:xfrm rot="0">
+          <a:xfrm>
             <a:off x="7845476" y="2792311"/>
             <a:ext cx="627459" cy="627459"/>
             <a:chOff x="0" y="0"/>
@@ -6265,12 +6317,12 @@
         </p:grpSpPr>
         <p:sp>
           <p:nvSpPr>
-            <p:cNvPr name="Freeform 13" id="13"/>
+            <p:cNvPr id="13" name="Freeform 13"/>
             <p:cNvSpPr/>
             <p:nvPr/>
           </p:nvSpPr>
           <p:spPr>
-            <a:xfrm flipH="false" flipV="false" rot="0">
+            <a:xfrm>
               <a:off x="0" y="0"/>
               <a:ext cx="836676" cy="836676"/>
             </a:xfrm>
@@ -6279,9 +6331,9 @@
               <a:gdLst/>
               <a:ahLst/>
               <a:cxnLst/>
-              <a:rect r="r" b="b" t="t" l="l"/>
+              <a:rect l="l" t="t" r="r" b="b"/>
               <a:pathLst>
-                <a:path h="836676" w="836676">
+                <a:path w="836676" h="836676">
                   <a:moveTo>
                     <a:pt x="0" y="156210"/>
                   </a:moveTo>
@@ -6333,12 +6385,12 @@
       </p:grpSp>
       <p:grpSp>
         <p:nvGrpSpPr>
-          <p:cNvPr name="Group 14" id="14"/>
+          <p:cNvPr id="14" name="Group 14"/>
           <p:cNvGrpSpPr/>
           <p:nvPr/>
         </p:nvGrpSpPr>
         <p:grpSpPr>
-          <a:xfrm rot="0">
+          <a:xfrm>
             <a:off x="7953223" y="2848566"/>
             <a:ext cx="411956" cy="514950"/>
             <a:chOff x="0" y="0"/>
@@ -6347,12 +6399,12 @@
         </p:grpSpPr>
         <p:sp>
           <p:nvSpPr>
-            <p:cNvPr name="Freeform 15" id="15"/>
+            <p:cNvPr id="15" name="Freeform 15"/>
             <p:cNvSpPr/>
             <p:nvPr/>
           </p:nvSpPr>
           <p:spPr>
-            <a:xfrm flipH="false" flipV="false" rot="0">
+            <a:xfrm>
               <a:off x="0" y="0"/>
               <a:ext cx="549275" cy="686595"/>
             </a:xfrm>
@@ -6361,9 +6413,9 @@
               <a:gdLst/>
               <a:ahLst/>
               <a:cxnLst/>
-              <a:rect r="r" b="b" t="t" l="l"/>
+              <a:rect l="l" t="t" r="r" b="b"/>
               <a:pathLst>
-                <a:path h="686595" w="549275">
+                <a:path w="549275" h="686595">
                   <a:moveTo>
                     <a:pt x="0" y="0"/>
                   </a:moveTo>
@@ -6385,15 +6437,15 @@
                 <a:alphaModFix amt="0"/>
               </a:blip>
               <a:stretch>
-                <a:fillRect l="-110381" t="0" r="-110381" b="0"/>
+                <a:fillRect l="-110381" r="-110381"/>
               </a:stretch>
             </a:blipFill>
           </p:spPr>
         </p:sp>
         <p:sp>
           <p:nvSpPr>
-            <p:cNvPr name="TextBox 16" id="16"/>
-            <p:cNvSpPr txBox="true"/>
+            <p:cNvPr id="16" name="TextBox 16"/>
+            <p:cNvSpPr txBox="1"/>
             <p:nvPr/>
           </p:nvSpPr>
           <p:spPr>
@@ -6406,7 +6458,7 @@
             </a:prstGeom>
           </p:spPr>
           <p:txBody>
-            <a:bodyPr anchor="ctr" rtlCol="false" tIns="0" lIns="0" bIns="0" rIns="0"/>
+            <a:bodyPr lIns="0" tIns="0" rIns="0" bIns="0" rtlCol="0" anchor="ctr"/>
             <a:lstStyle/>
             <a:p>
               <a:pPr algn="ctr">
@@ -6415,7 +6467,7 @@
                 </a:lnSpc>
               </a:pPr>
               <a:r>
-                <a:rPr lang="en-US" sz="3200" b="true">
+                <a:rPr lang="en-US" sz="3200" b="1">
                   <a:solidFill>
                     <a:srgbClr val="272525"/>
                   </a:solidFill>
@@ -6432,12 +6484,12 @@
       </p:grpSp>
       <p:sp>
         <p:nvSpPr>
-          <p:cNvPr name="TextBox 17" id="17"/>
-          <p:cNvSpPr txBox="true"/>
-          <p:nvPr/>
-        </p:nvSpPr>
-        <p:spPr>
-          <a:xfrm rot="0">
+          <p:cNvPr id="17" name="TextBox 17"/>
+          <p:cNvSpPr txBox="1"/>
+          <p:nvPr/>
+        </p:nvSpPr>
+        <p:spPr>
+          <a:xfrm>
             <a:off x="8734130" y="2881903"/>
             <a:ext cx="8561632" cy="438598"/>
           </a:xfrm>
@@ -6446,7 +6498,7 @@
           </a:prstGeom>
         </p:spPr>
         <p:txBody>
-          <a:bodyPr anchor="t" rtlCol="false" tIns="0" lIns="0" bIns="0" rIns="0">
+          <a:bodyPr lIns="0" tIns="0" rIns="0" bIns="0" rtlCol="0" anchor="t">
             <a:spAutoFit/>
           </a:bodyPr>
           <a:lstStyle/>
@@ -6457,7 +6509,7 @@
               </a:lnSpc>
             </a:pPr>
             <a:r>
-              <a:rPr lang="en-US" sz="2700" b="true">
+              <a:rPr lang="en-US" sz="2700" b="1">
                 <a:solidFill>
                   <a:srgbClr val="272525"/>
                 </a:solidFill>
@@ -6473,12 +6525,12 @@
       </p:sp>
       <p:sp>
         <p:nvSpPr>
-          <p:cNvPr name="TextBox 18" id="18"/>
-          <p:cNvSpPr txBox="true"/>
-          <p:nvPr/>
-        </p:nvSpPr>
-        <p:spPr>
-          <a:xfrm rot="0">
+          <p:cNvPr id="18" name="TextBox 18"/>
+          <p:cNvSpPr txBox="1"/>
+          <p:nvPr/>
+        </p:nvSpPr>
+        <p:spPr>
+          <a:xfrm>
             <a:off x="8734130" y="3403844"/>
             <a:ext cx="8561632" cy="941489"/>
           </a:xfrm>
@@ -6487,7 +6539,7 @@
           </a:prstGeom>
         </p:spPr>
         <p:txBody>
-          <a:bodyPr anchor="t" rtlCol="false" tIns="0" lIns="0" bIns="0" rIns="0">
+          <a:bodyPr lIns="0" tIns="0" rIns="0" bIns="0" rtlCol="0" anchor="t">
             <a:spAutoFit/>
           </a:bodyPr>
           <a:lstStyle/>
@@ -6514,12 +6566,12 @@
       </p:sp>
       <p:grpSp>
         <p:nvGrpSpPr>
-          <p:cNvPr name="Group 19" id="19"/>
+          <p:cNvPr id="19" name="Group 19"/>
           <p:cNvGrpSpPr/>
           <p:nvPr/>
         </p:nvGrpSpPr>
         <p:grpSpPr>
-          <a:xfrm rot="0">
+          <a:xfrm>
             <a:off x="7845476" y="4872638"/>
             <a:ext cx="627459" cy="627459"/>
             <a:chOff x="0" y="0"/>
@@ -6528,12 +6580,12 @@
         </p:grpSpPr>
         <p:sp>
           <p:nvSpPr>
-            <p:cNvPr name="Freeform 20" id="20"/>
+            <p:cNvPr id="20" name="Freeform 20"/>
             <p:cNvSpPr/>
             <p:nvPr/>
           </p:nvSpPr>
           <p:spPr>
-            <a:xfrm flipH="false" flipV="false" rot="0">
+            <a:xfrm>
               <a:off x="0" y="0"/>
               <a:ext cx="836676" cy="836676"/>
             </a:xfrm>
@@ -6542,9 +6594,9 @@
               <a:gdLst/>
               <a:ahLst/>
               <a:cxnLst/>
-              <a:rect r="r" b="b" t="t" l="l"/>
+              <a:rect l="l" t="t" r="r" b="b"/>
               <a:pathLst>
-                <a:path h="836676" w="836676">
+                <a:path w="836676" h="836676">
                   <a:moveTo>
                     <a:pt x="0" y="156210"/>
                   </a:moveTo>
@@ -6596,12 +6648,12 @@
       </p:grpSp>
       <p:grpSp>
         <p:nvGrpSpPr>
-          <p:cNvPr name="Group 21" id="21"/>
+          <p:cNvPr id="21" name="Group 21"/>
           <p:cNvGrpSpPr/>
           <p:nvPr/>
         </p:nvGrpSpPr>
         <p:grpSpPr>
-          <a:xfrm rot="0">
+          <a:xfrm>
             <a:off x="7953223" y="4928892"/>
             <a:ext cx="411956" cy="514950"/>
             <a:chOff x="0" y="0"/>
@@ -6610,12 +6662,12 @@
         </p:grpSpPr>
         <p:sp>
           <p:nvSpPr>
-            <p:cNvPr name="Freeform 22" id="22"/>
+            <p:cNvPr id="22" name="Freeform 22"/>
             <p:cNvSpPr/>
             <p:nvPr/>
           </p:nvSpPr>
           <p:spPr>
-            <a:xfrm flipH="false" flipV="false" rot="0">
+            <a:xfrm>
               <a:off x="0" y="0"/>
               <a:ext cx="549275" cy="686595"/>
             </a:xfrm>
@@ -6624,9 +6676,9 @@
               <a:gdLst/>
               <a:ahLst/>
               <a:cxnLst/>
-              <a:rect r="r" b="b" t="t" l="l"/>
+              <a:rect l="l" t="t" r="r" b="b"/>
               <a:pathLst>
-                <a:path h="686595" w="549275">
+                <a:path w="549275" h="686595">
                   <a:moveTo>
                     <a:pt x="0" y="0"/>
                   </a:moveTo>
@@ -6648,15 +6700,15 @@
                 <a:alphaModFix amt="0"/>
               </a:blip>
               <a:stretch>
-                <a:fillRect l="-110381" t="0" r="-110381" b="0"/>
+                <a:fillRect l="-110381" r="-110381"/>
               </a:stretch>
             </a:blipFill>
           </p:spPr>
         </p:sp>
         <p:sp>
           <p:nvSpPr>
-            <p:cNvPr name="TextBox 23" id="23"/>
-            <p:cNvSpPr txBox="true"/>
+            <p:cNvPr id="23" name="TextBox 23"/>
+            <p:cNvSpPr txBox="1"/>
             <p:nvPr/>
           </p:nvSpPr>
           <p:spPr>
@@ -6669,7 +6721,7 @@
             </a:prstGeom>
           </p:spPr>
           <p:txBody>
-            <a:bodyPr anchor="ctr" rtlCol="false" tIns="0" lIns="0" bIns="0" rIns="0"/>
+            <a:bodyPr lIns="0" tIns="0" rIns="0" bIns="0" rtlCol="0" anchor="ctr"/>
             <a:lstStyle/>
             <a:p>
               <a:pPr algn="ctr">
@@ -6678,7 +6730,7 @@
                 </a:lnSpc>
               </a:pPr>
               <a:r>
-                <a:rPr lang="en-US" sz="3200" b="true">
+                <a:rPr lang="en-US" sz="3200" b="1">
                   <a:solidFill>
                     <a:srgbClr val="272525"/>
                   </a:solidFill>
@@ -6695,12 +6747,12 @@
       </p:grpSp>
       <p:sp>
         <p:nvSpPr>
-          <p:cNvPr name="TextBox 24" id="24"/>
-          <p:cNvSpPr txBox="true"/>
-          <p:nvPr/>
-        </p:nvSpPr>
-        <p:spPr>
-          <a:xfrm rot="0">
+          <p:cNvPr id="24" name="TextBox 24"/>
+          <p:cNvSpPr txBox="1"/>
+          <p:nvPr/>
+        </p:nvSpPr>
+        <p:spPr>
+          <a:xfrm>
             <a:off x="8734130" y="4962230"/>
             <a:ext cx="8561632" cy="867670"/>
           </a:xfrm>
@@ -6709,7 +6761,7 @@
           </a:prstGeom>
         </p:spPr>
         <p:txBody>
-          <a:bodyPr anchor="t" rtlCol="false" tIns="0" lIns="0" bIns="0" rIns="0">
+          <a:bodyPr lIns="0" tIns="0" rIns="0" bIns="0" rtlCol="0" anchor="t">
             <a:spAutoFit/>
           </a:bodyPr>
           <a:lstStyle/>
@@ -6720,7 +6772,7 @@
               </a:lnSpc>
             </a:pPr>
             <a:r>
-              <a:rPr lang="en-US" sz="2700" b="true">
+              <a:rPr lang="en-US" sz="2700" b="1">
                 <a:solidFill>
                   <a:srgbClr val="272525"/>
                 </a:solidFill>
@@ -6736,12 +6788,12 @@
       </p:sp>
       <p:sp>
         <p:nvSpPr>
-          <p:cNvPr name="TextBox 25" id="25"/>
-          <p:cNvSpPr txBox="true"/>
-          <p:nvPr/>
-        </p:nvSpPr>
-        <p:spPr>
-          <a:xfrm rot="0">
+          <p:cNvPr id="25" name="TextBox 25"/>
+          <p:cNvSpPr txBox="1"/>
+          <p:nvPr/>
+        </p:nvSpPr>
+        <p:spPr>
+          <a:xfrm>
             <a:off x="8734130" y="5913244"/>
             <a:ext cx="8561632" cy="941489"/>
           </a:xfrm>
@@ -6750,7 +6802,7 @@
           </a:prstGeom>
         </p:spPr>
         <p:txBody>
-          <a:bodyPr anchor="t" rtlCol="false" tIns="0" lIns="0" bIns="0" rIns="0">
+          <a:bodyPr lIns="0" tIns="0" rIns="0" bIns="0" rtlCol="0" anchor="t">
             <a:spAutoFit/>
           </a:bodyPr>
           <a:lstStyle/>
@@ -6777,12 +6829,12 @@
       </p:sp>
       <p:grpSp>
         <p:nvGrpSpPr>
-          <p:cNvPr name="Group 26" id="26"/>
+          <p:cNvPr id="26" name="Group 26"/>
           <p:cNvGrpSpPr/>
           <p:nvPr/>
         </p:nvGrpSpPr>
         <p:grpSpPr>
-          <a:xfrm rot="0">
+          <a:xfrm>
             <a:off x="7845476" y="7382027"/>
             <a:ext cx="627459" cy="627459"/>
             <a:chOff x="0" y="0"/>
@@ -6791,12 +6843,12 @@
         </p:grpSpPr>
         <p:sp>
           <p:nvSpPr>
-            <p:cNvPr name="Freeform 27" id="27"/>
+            <p:cNvPr id="27" name="Freeform 27"/>
             <p:cNvSpPr/>
             <p:nvPr/>
           </p:nvSpPr>
           <p:spPr>
-            <a:xfrm flipH="false" flipV="false" rot="0">
+            <a:xfrm>
               <a:off x="0" y="0"/>
               <a:ext cx="836676" cy="836676"/>
             </a:xfrm>
@@ -6805,9 +6857,9 @@
               <a:gdLst/>
               <a:ahLst/>
               <a:cxnLst/>
-              <a:rect r="r" b="b" t="t" l="l"/>
+              <a:rect l="l" t="t" r="r" b="b"/>
               <a:pathLst>
-                <a:path h="836676" w="836676">
+                <a:path w="836676" h="836676">
                   <a:moveTo>
                     <a:pt x="0" y="156210"/>
                   </a:moveTo>
@@ -6859,12 +6911,12 @@
       </p:grpSp>
       <p:grpSp>
         <p:nvGrpSpPr>
-          <p:cNvPr name="Group 28" id="28"/>
+          <p:cNvPr id="28" name="Group 28"/>
           <p:cNvGrpSpPr/>
           <p:nvPr/>
         </p:nvGrpSpPr>
         <p:grpSpPr>
-          <a:xfrm rot="0">
+          <a:xfrm>
             <a:off x="7953223" y="7438282"/>
             <a:ext cx="411956" cy="514950"/>
             <a:chOff x="0" y="0"/>
@@ -6873,12 +6925,12 @@
         </p:grpSpPr>
         <p:sp>
           <p:nvSpPr>
-            <p:cNvPr name="Freeform 29" id="29"/>
+            <p:cNvPr id="29" name="Freeform 29"/>
             <p:cNvSpPr/>
             <p:nvPr/>
           </p:nvSpPr>
           <p:spPr>
-            <a:xfrm flipH="false" flipV="false" rot="0">
+            <a:xfrm>
               <a:off x="0" y="0"/>
               <a:ext cx="549275" cy="686595"/>
             </a:xfrm>
@@ -6887,9 +6939,9 @@
               <a:gdLst/>
               <a:ahLst/>
               <a:cxnLst/>
-              <a:rect r="r" b="b" t="t" l="l"/>
+              <a:rect l="l" t="t" r="r" b="b"/>
               <a:pathLst>
-                <a:path h="686595" w="549275">
+                <a:path w="549275" h="686595">
                   <a:moveTo>
                     <a:pt x="0" y="0"/>
                   </a:moveTo>
@@ -6911,15 +6963,15 @@
                 <a:alphaModFix amt="0"/>
               </a:blip>
               <a:stretch>
-                <a:fillRect l="-110381" t="0" r="-110381" b="0"/>
+                <a:fillRect l="-110381" r="-110381"/>
               </a:stretch>
             </a:blipFill>
           </p:spPr>
         </p:sp>
         <p:sp>
           <p:nvSpPr>
-            <p:cNvPr name="TextBox 30" id="30"/>
-            <p:cNvSpPr txBox="true"/>
+            <p:cNvPr id="30" name="TextBox 30"/>
+            <p:cNvSpPr txBox="1"/>
             <p:nvPr/>
           </p:nvSpPr>
           <p:spPr>
@@ -6932,7 +6984,7 @@
             </a:prstGeom>
           </p:spPr>
           <p:txBody>
-            <a:bodyPr anchor="ctr" rtlCol="false" tIns="0" lIns="0" bIns="0" rIns="0"/>
+            <a:bodyPr lIns="0" tIns="0" rIns="0" bIns="0" rtlCol="0" anchor="ctr"/>
             <a:lstStyle/>
             <a:p>
               <a:pPr algn="ctr">
@@ -6941,7 +6993,7 @@
                 </a:lnSpc>
               </a:pPr>
               <a:r>
-                <a:rPr lang="en-US" sz="3200" b="true">
+                <a:rPr lang="en-US" sz="3200" b="1">
                   <a:solidFill>
                     <a:srgbClr val="272525"/>
                   </a:solidFill>
@@ -6958,12 +7010,12 @@
       </p:grpSp>
       <p:sp>
         <p:nvSpPr>
-          <p:cNvPr name="TextBox 31" id="31"/>
-          <p:cNvSpPr txBox="true"/>
-          <p:nvPr/>
-        </p:nvSpPr>
-        <p:spPr>
-          <a:xfrm rot="0">
+          <p:cNvPr id="31" name="TextBox 31"/>
+          <p:cNvSpPr txBox="1"/>
+          <p:nvPr/>
+        </p:nvSpPr>
+        <p:spPr>
+          <a:xfrm>
             <a:off x="8734130" y="7471620"/>
             <a:ext cx="8561632" cy="867670"/>
           </a:xfrm>
@@ -6972,7 +7024,7 @@
           </a:prstGeom>
         </p:spPr>
         <p:txBody>
-          <a:bodyPr anchor="t" rtlCol="false" tIns="0" lIns="0" bIns="0" rIns="0">
+          <a:bodyPr lIns="0" tIns="0" rIns="0" bIns="0" rtlCol="0" anchor="t">
             <a:spAutoFit/>
           </a:bodyPr>
           <a:lstStyle/>
@@ -6983,7 +7035,7 @@
               </a:lnSpc>
             </a:pPr>
             <a:r>
-              <a:rPr lang="en-US" sz="2700" b="true">
+              <a:rPr lang="en-US" sz="2700" b="1">
                 <a:solidFill>
                   <a:srgbClr val="272525"/>
                 </a:solidFill>
@@ -6999,12 +7051,12 @@
       </p:sp>
       <p:sp>
         <p:nvSpPr>
-          <p:cNvPr name="TextBox 32" id="32"/>
-          <p:cNvSpPr txBox="true"/>
-          <p:nvPr/>
-        </p:nvSpPr>
-        <p:spPr>
-          <a:xfrm rot="0">
+          <p:cNvPr id="32" name="TextBox 32"/>
+          <p:cNvSpPr txBox="1"/>
+          <p:nvPr/>
+        </p:nvSpPr>
+        <p:spPr>
+          <a:xfrm>
             <a:off x="8734130" y="8422634"/>
             <a:ext cx="8561632" cy="941489"/>
           </a:xfrm>
@@ -7013,7 +7065,7 @@
           </a:prstGeom>
         </p:spPr>
         <p:txBody>
-          <a:bodyPr anchor="t" rtlCol="false" tIns="0" lIns="0" bIns="0" rIns="0">
+          <a:bodyPr lIns="0" tIns="0" rIns="0" bIns="0" rtlCol="0" anchor="t">
             <a:spAutoFit/>
           </a:bodyPr>
           <a:lstStyle/>
@@ -7047,7 +7099,7 @@
 </file>
 
 <file path=ppt/slides/slide2.xml><?xml version="1.0" encoding="utf-8"?>
-<p:sld xmlns:p="http://schemas.openxmlformats.org/presentationml/2006/main" xmlns:a="http://schemas.openxmlformats.org/drawingml/2006/main">
+<p:sld xmlns:a="http://schemas.openxmlformats.org/drawingml/2006/main" xmlns:r="http://schemas.openxmlformats.org/officeDocument/2006/relationships" xmlns:p="http://schemas.openxmlformats.org/presentationml/2006/main">
   <p:cSld>
     <p:spTree>
       <p:nvGrpSpPr>
@@ -7065,12 +7117,12 @@
       </p:grpSpPr>
       <p:grpSp>
         <p:nvGrpSpPr>
-          <p:cNvPr name="Group 2" id="2"/>
+          <p:cNvPr id="2" name="Group 2"/>
           <p:cNvGrpSpPr/>
           <p:nvPr/>
         </p:nvGrpSpPr>
         <p:grpSpPr>
-          <a:xfrm rot="0">
+          <a:xfrm>
             <a:off x="0" y="0"/>
             <a:ext cx="18288000" cy="10287000"/>
             <a:chOff x="0" y="0"/>
@@ -7079,12 +7131,12 @@
         </p:grpSpPr>
         <p:sp>
           <p:nvSpPr>
-            <p:cNvPr name="Freeform 3" id="3"/>
+            <p:cNvPr id="3" name="Freeform 3"/>
             <p:cNvSpPr/>
             <p:nvPr/>
           </p:nvSpPr>
           <p:spPr>
-            <a:xfrm flipH="false" flipV="false" rot="0">
+            <a:xfrm>
               <a:off x="0" y="0"/>
               <a:ext cx="24384000" cy="13716000"/>
             </a:xfrm>
@@ -7093,9 +7145,9 @@
               <a:gdLst/>
               <a:ahLst/>
               <a:cxnLst/>
-              <a:rect r="r" b="b" t="t" l="l"/>
+              <a:rect l="l" t="t" r="r" b="b"/>
               <a:pathLst>
-                <a:path h="13716000" w="24384000">
+                <a:path w="24384000" h="13716000">
                   <a:moveTo>
                     <a:pt x="0" y="0"/>
                   </a:moveTo>
@@ -7120,12 +7172,12 @@
       </p:grpSp>
       <p:grpSp>
         <p:nvGrpSpPr>
-          <p:cNvPr name="Group 4" id="4"/>
+          <p:cNvPr id="4" name="Group 4"/>
           <p:cNvGrpSpPr/>
           <p:nvPr/>
         </p:nvGrpSpPr>
         <p:grpSpPr>
-          <a:xfrm rot="0">
+          <a:xfrm>
             <a:off x="0" y="0"/>
             <a:ext cx="18288000" cy="10287000"/>
             <a:chOff x="0" y="0"/>
@@ -7134,12 +7186,12 @@
         </p:grpSpPr>
         <p:sp>
           <p:nvSpPr>
-            <p:cNvPr name="Freeform 5" id="5"/>
+            <p:cNvPr id="5" name="Freeform 5"/>
             <p:cNvSpPr/>
             <p:nvPr/>
           </p:nvSpPr>
           <p:spPr>
-            <a:xfrm flipH="false" flipV="false" rot="0">
+            <a:xfrm>
               <a:off x="0" y="0"/>
               <a:ext cx="24384000" cy="13716000"/>
             </a:xfrm>
@@ -7148,9 +7200,9 @@
               <a:gdLst/>
               <a:ahLst/>
               <a:cxnLst/>
-              <a:rect r="r" b="b" t="t" l="l"/>
+              <a:rect l="l" t="t" r="r" b="b"/>
               <a:pathLst>
-                <a:path h="13716000" w="24384000">
+                <a:path w="24384000" h="13716000">
                   <a:moveTo>
                     <a:pt x="0" y="0"/>
                   </a:moveTo>
@@ -7175,12 +7227,12 @@
       </p:grpSp>
       <p:grpSp>
         <p:nvGrpSpPr>
-          <p:cNvPr name="Group 6" id="6"/>
+          <p:cNvPr id="6" name="Group 6"/>
           <p:cNvGrpSpPr/>
           <p:nvPr/>
         </p:nvGrpSpPr>
         <p:grpSpPr>
-          <a:xfrm rot="0">
+          <a:xfrm>
             <a:off x="992238" y="821379"/>
             <a:ext cx="2575027" cy="521646"/>
             <a:chOff x="0" y="0"/>
@@ -7189,12 +7241,12 @@
         </p:grpSpPr>
         <p:sp>
           <p:nvSpPr>
-            <p:cNvPr name="Freeform 7" id="7"/>
+            <p:cNvPr id="7" name="Freeform 7"/>
             <p:cNvSpPr/>
             <p:nvPr/>
           </p:nvSpPr>
           <p:spPr>
-            <a:xfrm flipH="false" flipV="false" rot="0">
+            <a:xfrm>
               <a:off x="0" y="0"/>
               <a:ext cx="3433445" cy="695579"/>
             </a:xfrm>
@@ -7203,9 +7255,9 @@
               <a:gdLst/>
               <a:ahLst/>
               <a:cxnLst/>
-              <a:rect r="r" b="b" t="t" l="l"/>
+              <a:rect l="l" t="t" r="r" b="b"/>
               <a:pathLst>
-                <a:path h="695579" w="3433445">
+                <a:path w="3433445" h="695579">
                   <a:moveTo>
                     <a:pt x="0" y="125095"/>
                   </a:moveTo>
@@ -7250,12 +7302,12 @@
       </p:grpSp>
       <p:sp>
         <p:nvSpPr>
-          <p:cNvPr name="TextBox 8" id="8"/>
-          <p:cNvSpPr txBox="true"/>
-          <p:nvPr/>
-        </p:nvSpPr>
-        <p:spPr>
-          <a:xfrm rot="0">
+          <p:cNvPr id="8" name="TextBox 8"/>
+          <p:cNvSpPr txBox="1"/>
+          <p:nvPr/>
+        </p:nvSpPr>
+        <p:spPr>
+          <a:xfrm>
             <a:off x="1159669" y="847877"/>
             <a:ext cx="3154556" cy="411509"/>
           </a:xfrm>
@@ -7264,7 +7316,7 @@
           </a:prstGeom>
         </p:spPr>
         <p:txBody>
-          <a:bodyPr anchor="t" rtlCol="false" tIns="0" lIns="0" bIns="0" rIns="0">
+          <a:bodyPr lIns="0" tIns="0" rIns="0" bIns="0" rtlCol="0" anchor="t">
             <a:spAutoFit/>
           </a:bodyPr>
           <a:lstStyle/>
@@ -7291,12 +7343,12 @@
       </p:sp>
       <p:sp>
         <p:nvSpPr>
-          <p:cNvPr name="TextBox 9" id="9"/>
-          <p:cNvSpPr txBox="true"/>
-          <p:nvPr/>
-        </p:nvSpPr>
-        <p:spPr>
-          <a:xfrm rot="0">
+          <p:cNvPr id="9" name="TextBox 9"/>
+          <p:cNvSpPr txBox="1"/>
+          <p:nvPr/>
+        </p:nvSpPr>
+        <p:spPr>
+          <a:xfrm>
             <a:off x="992238" y="1433808"/>
             <a:ext cx="16303523" cy="891178"/>
           </a:xfrm>
@@ -7305,7 +7357,7 @@
           </a:prstGeom>
         </p:spPr>
         <p:txBody>
-          <a:bodyPr anchor="t" rtlCol="false" tIns="0" lIns="0" bIns="0" rIns="0">
+          <a:bodyPr lIns="0" tIns="0" rIns="0" bIns="0" rtlCol="0" anchor="t">
             <a:spAutoFit/>
           </a:bodyPr>
           <a:lstStyle/>
@@ -7316,7 +7368,7 @@
               </a:lnSpc>
             </a:pPr>
             <a:r>
-              <a:rPr lang="en-US" sz="5400" b="true">
+              <a:rPr lang="en-US" sz="5400" b="1">
                 <a:solidFill>
                   <a:srgbClr val="000000"/>
                 </a:solidFill>
@@ -7332,12 +7384,12 @@
       </p:sp>
       <p:sp>
         <p:nvSpPr>
-          <p:cNvPr name="TextBox 10" id="10"/>
-          <p:cNvSpPr txBox="true"/>
-          <p:nvPr/>
-        </p:nvSpPr>
-        <p:spPr>
-          <a:xfrm rot="0">
+          <p:cNvPr id="10" name="TextBox 10"/>
+          <p:cNvSpPr txBox="1"/>
+          <p:nvPr/>
+        </p:nvSpPr>
+        <p:spPr>
+          <a:xfrm>
             <a:off x="992238" y="2660894"/>
             <a:ext cx="16303523" cy="962025"/>
           </a:xfrm>
@@ -7346,7 +7398,7 @@
           </a:prstGeom>
         </p:spPr>
         <p:txBody>
-          <a:bodyPr anchor="t" rtlCol="false" tIns="0" lIns="0" bIns="0" rIns="0">
+          <a:bodyPr lIns="0" tIns="0" rIns="0" bIns="0" rtlCol="0" anchor="t">
             <a:spAutoFit/>
           </a:bodyPr>
           <a:lstStyle/>
@@ -7373,12 +7425,12 @@
       </p:sp>
       <p:grpSp>
         <p:nvGrpSpPr>
-          <p:cNvPr name="Group 11" id="11"/>
+          <p:cNvPr id="11" name="Group 11"/>
           <p:cNvGrpSpPr/>
           <p:nvPr/>
         </p:nvGrpSpPr>
         <p:grpSpPr>
-          <a:xfrm rot="0">
+          <a:xfrm>
             <a:off x="992238" y="6698752"/>
             <a:ext cx="16303523" cy="38100"/>
             <a:chOff x="0" y="0"/>
@@ -7387,12 +7439,12 @@
         </p:grpSpPr>
         <p:sp>
           <p:nvSpPr>
-            <p:cNvPr name="Freeform 12" id="12"/>
+            <p:cNvPr id="12" name="Freeform 12"/>
             <p:cNvSpPr/>
             <p:nvPr/>
           </p:nvSpPr>
           <p:spPr>
-            <a:xfrm flipH="false" flipV="false" rot="0">
+            <a:xfrm>
               <a:off x="0" y="0"/>
               <a:ext cx="21738082" cy="50800"/>
             </a:xfrm>
@@ -7401,9 +7453,9 @@
               <a:gdLst/>
               <a:ahLst/>
               <a:cxnLst/>
-              <a:rect r="r" b="b" t="t" l="l"/>
+              <a:rect l="l" t="t" r="r" b="b"/>
               <a:pathLst>
-                <a:path h="50800" w="21738082">
+                <a:path w="21738082" h="50800">
                   <a:moveTo>
                     <a:pt x="0" y="25400"/>
                   </a:moveTo>
@@ -7445,12 +7497,12 @@
       </p:grpSp>
       <p:grpSp>
         <p:nvGrpSpPr>
-          <p:cNvPr name="Group 13" id="13"/>
+          <p:cNvPr id="13" name="Group 13"/>
           <p:cNvGrpSpPr/>
           <p:nvPr/>
         </p:nvGrpSpPr>
         <p:grpSpPr>
-          <a:xfrm rot="0">
+          <a:xfrm>
             <a:off x="4130878" y="6140720"/>
             <a:ext cx="38100" cy="558108"/>
             <a:chOff x="0" y="0"/>
@@ -7459,12 +7511,12 @@
         </p:grpSpPr>
         <p:sp>
           <p:nvSpPr>
-            <p:cNvPr name="Freeform 14" id="14"/>
+            <p:cNvPr id="14" name="Freeform 14"/>
             <p:cNvSpPr/>
             <p:nvPr/>
           </p:nvSpPr>
           <p:spPr>
-            <a:xfrm flipH="false" flipV="false" rot="0">
+            <a:xfrm>
               <a:off x="0" y="0"/>
               <a:ext cx="50800" cy="744093"/>
             </a:xfrm>
@@ -7473,9 +7525,9 @@
               <a:gdLst/>
               <a:ahLst/>
               <a:cxnLst/>
-              <a:rect r="r" b="b" t="t" l="l"/>
+              <a:rect l="l" t="t" r="r" b="b"/>
               <a:pathLst>
-                <a:path h="744093" w="50800">
+                <a:path w="50800" h="744093">
                   <a:moveTo>
                     <a:pt x="0" y="25400"/>
                   </a:moveTo>
@@ -7514,12 +7566,12 @@
       </p:grpSp>
       <p:grpSp>
         <p:nvGrpSpPr>
-          <p:cNvPr name="Group 15" id="15"/>
+          <p:cNvPr id="15" name="Group 15"/>
           <p:cNvGrpSpPr/>
           <p:nvPr/>
         </p:nvGrpSpPr>
         <p:grpSpPr>
-          <a:xfrm rot="0">
+          <a:xfrm>
             <a:off x="4045296" y="6594053"/>
             <a:ext cx="209255" cy="209255"/>
             <a:chOff x="0" y="0"/>
@@ -7528,12 +7580,12 @@
         </p:grpSpPr>
         <p:sp>
           <p:nvSpPr>
-            <p:cNvPr name="Freeform 16" id="16"/>
+            <p:cNvPr id="16" name="Freeform 16"/>
             <p:cNvSpPr/>
             <p:nvPr/>
           </p:nvSpPr>
           <p:spPr>
-            <a:xfrm flipH="false" flipV="false" rot="0">
+            <a:xfrm>
               <a:off x="0" y="0"/>
               <a:ext cx="279019" cy="279019"/>
             </a:xfrm>
@@ -7542,9 +7594,9 @@
               <a:gdLst/>
               <a:ahLst/>
               <a:cxnLst/>
-              <a:rect r="r" b="b" t="t" l="l"/>
+              <a:rect l="l" t="t" r="r" b="b"/>
               <a:pathLst>
-                <a:path h="279019" w="279019">
+                <a:path w="279019" h="279019">
                   <a:moveTo>
                     <a:pt x="0" y="139446"/>
                   </a:moveTo>
@@ -7580,12 +7632,12 @@
       </p:grpSp>
       <p:sp>
         <p:nvSpPr>
-          <p:cNvPr name="TextBox 17" id="17"/>
-          <p:cNvSpPr txBox="true"/>
-          <p:nvPr/>
-        </p:nvSpPr>
-        <p:spPr>
-          <a:xfrm rot="0">
+          <p:cNvPr id="17" name="TextBox 17"/>
+          <p:cNvSpPr txBox="1"/>
+          <p:nvPr/>
+        </p:nvSpPr>
+        <p:spPr>
+          <a:xfrm>
             <a:off x="1271292" y="3922366"/>
             <a:ext cx="5757272" cy="445589"/>
           </a:xfrm>
@@ -7594,7 +7646,7 @@
           </a:prstGeom>
         </p:spPr>
         <p:txBody>
-          <a:bodyPr anchor="t" rtlCol="false" tIns="0" lIns="0" bIns="0" rIns="0">
+          <a:bodyPr lIns="0" tIns="0" rIns="0" bIns="0" rtlCol="0" anchor="t">
             <a:spAutoFit/>
           </a:bodyPr>
           <a:lstStyle/>
@@ -7605,7 +7657,7 @@
               </a:lnSpc>
             </a:pPr>
             <a:r>
-              <a:rPr lang="en-US" sz="2700" b="true">
+              <a:rPr lang="en-US" sz="2700" b="1">
                 <a:solidFill>
                   <a:srgbClr val="272525"/>
                 </a:solidFill>
@@ -7621,12 +7673,12 @@
       </p:sp>
       <p:sp>
         <p:nvSpPr>
-          <p:cNvPr name="TextBox 18" id="18"/>
-          <p:cNvSpPr txBox="true"/>
-          <p:nvPr/>
-        </p:nvSpPr>
-        <p:spPr>
-          <a:xfrm rot="0">
+          <p:cNvPr id="18" name="TextBox 18"/>
+          <p:cNvSpPr txBox="1"/>
+          <p:nvPr/>
+        </p:nvSpPr>
+        <p:spPr>
+          <a:xfrm>
             <a:off x="1271292" y="4456509"/>
             <a:ext cx="5757272" cy="1404938"/>
           </a:xfrm>
@@ -7635,7 +7687,7 @@
           </a:prstGeom>
         </p:spPr>
         <p:txBody>
-          <a:bodyPr anchor="t" rtlCol="false" tIns="0" lIns="0" bIns="0" rIns="0">
+          <a:bodyPr lIns="0" tIns="0" rIns="0" bIns="0" rtlCol="0" anchor="t">
             <a:spAutoFit/>
           </a:bodyPr>
           <a:lstStyle/>
@@ -7662,12 +7714,12 @@
       </p:sp>
       <p:grpSp>
         <p:nvGrpSpPr>
-          <p:cNvPr name="Group 19" id="19"/>
+          <p:cNvPr id="19" name="Group 19"/>
           <p:cNvGrpSpPr/>
           <p:nvPr/>
         </p:nvGrpSpPr>
         <p:grpSpPr>
-          <a:xfrm rot="0">
+          <a:xfrm>
             <a:off x="7460161" y="6698675"/>
             <a:ext cx="38100" cy="558108"/>
             <a:chOff x="0" y="0"/>
@@ -7676,12 +7728,12 @@
         </p:grpSpPr>
         <p:sp>
           <p:nvSpPr>
-            <p:cNvPr name="Freeform 20" id="20"/>
+            <p:cNvPr id="20" name="Freeform 20"/>
             <p:cNvSpPr/>
             <p:nvPr/>
           </p:nvSpPr>
           <p:spPr>
-            <a:xfrm flipH="false" flipV="false" rot="0">
+            <a:xfrm>
               <a:off x="0" y="0"/>
               <a:ext cx="50800" cy="744093"/>
             </a:xfrm>
@@ -7690,9 +7742,9 @@
               <a:gdLst/>
               <a:ahLst/>
               <a:cxnLst/>
-              <a:rect r="r" b="b" t="t" l="l"/>
+              <a:rect l="l" t="t" r="r" b="b"/>
               <a:pathLst>
-                <a:path h="744093" w="50800">
+                <a:path w="50800" h="744093">
                   <a:moveTo>
                     <a:pt x="0" y="25400"/>
                   </a:moveTo>
@@ -7731,12 +7783,12 @@
       </p:grpSp>
       <p:grpSp>
         <p:nvGrpSpPr>
-          <p:cNvPr name="Group 21" id="21"/>
+          <p:cNvPr id="21" name="Group 21"/>
           <p:cNvGrpSpPr/>
           <p:nvPr/>
         </p:nvGrpSpPr>
         <p:grpSpPr>
-          <a:xfrm rot="0">
+          <a:xfrm>
             <a:off x="7374579" y="6594053"/>
             <a:ext cx="209255" cy="209255"/>
             <a:chOff x="0" y="0"/>
@@ -7745,12 +7797,12 @@
         </p:grpSpPr>
         <p:sp>
           <p:nvSpPr>
-            <p:cNvPr name="Freeform 22" id="22"/>
+            <p:cNvPr id="22" name="Freeform 22"/>
             <p:cNvSpPr/>
             <p:nvPr/>
           </p:nvSpPr>
           <p:spPr>
-            <a:xfrm flipH="false" flipV="false" rot="0">
+            <a:xfrm>
               <a:off x="0" y="0"/>
               <a:ext cx="279019" cy="279019"/>
             </a:xfrm>
@@ -7759,9 +7811,9 @@
               <a:gdLst/>
               <a:ahLst/>
               <a:cxnLst/>
-              <a:rect r="r" b="b" t="t" l="l"/>
+              <a:rect l="l" t="t" r="r" b="b"/>
               <a:pathLst>
-                <a:path h="279019" w="279019">
+                <a:path w="279019" h="279019">
                   <a:moveTo>
                     <a:pt x="0" y="139446"/>
                   </a:moveTo>
@@ -7797,12 +7849,12 @@
       </p:grpSp>
       <p:sp>
         <p:nvSpPr>
-          <p:cNvPr name="TextBox 23" id="23"/>
-          <p:cNvSpPr txBox="true"/>
-          <p:nvPr/>
-        </p:nvSpPr>
-        <p:spPr>
-          <a:xfrm rot="0">
+          <p:cNvPr id="23" name="TextBox 23"/>
+          <p:cNvSpPr txBox="1"/>
+          <p:nvPr/>
+        </p:nvSpPr>
+        <p:spPr>
+          <a:xfrm>
             <a:off x="4600575" y="7526531"/>
             <a:ext cx="5757272" cy="445589"/>
           </a:xfrm>
@@ -7811,7 +7863,7 @@
           </a:prstGeom>
         </p:spPr>
         <p:txBody>
-          <a:bodyPr anchor="t" rtlCol="false" tIns="0" lIns="0" bIns="0" rIns="0">
+          <a:bodyPr lIns="0" tIns="0" rIns="0" bIns="0" rtlCol="0" anchor="t">
             <a:spAutoFit/>
           </a:bodyPr>
           <a:lstStyle/>
@@ -7822,7 +7874,7 @@
               </a:lnSpc>
             </a:pPr>
             <a:r>
-              <a:rPr lang="en-US" sz="2700" b="true">
+              <a:rPr lang="en-US" sz="2700" b="1">
                 <a:solidFill>
                   <a:srgbClr val="272525"/>
                 </a:solidFill>
@@ -7838,12 +7890,12 @@
       </p:sp>
       <p:sp>
         <p:nvSpPr>
-          <p:cNvPr name="TextBox 24" id="24"/>
-          <p:cNvSpPr txBox="true"/>
-          <p:nvPr/>
-        </p:nvSpPr>
-        <p:spPr>
-          <a:xfrm rot="0">
+          <p:cNvPr id="24" name="TextBox 24"/>
+          <p:cNvSpPr txBox="1"/>
+          <p:nvPr/>
+        </p:nvSpPr>
+        <p:spPr>
+          <a:xfrm>
             <a:off x="4600575" y="8060684"/>
             <a:ext cx="5757272" cy="1404938"/>
           </a:xfrm>
@@ -7852,7 +7904,7 @@
           </a:prstGeom>
         </p:spPr>
         <p:txBody>
-          <a:bodyPr anchor="t" rtlCol="false" tIns="0" lIns="0" bIns="0" rIns="0">
+          <a:bodyPr lIns="0" tIns="0" rIns="0" bIns="0" rtlCol="0" anchor="t">
             <a:spAutoFit/>
           </a:bodyPr>
           <a:lstStyle/>
@@ -7879,12 +7931,12 @@
       </p:sp>
       <p:grpSp>
         <p:nvGrpSpPr>
-          <p:cNvPr name="Group 25" id="25"/>
+          <p:cNvPr id="25" name="Group 25"/>
           <p:cNvGrpSpPr/>
           <p:nvPr/>
         </p:nvGrpSpPr>
         <p:grpSpPr>
-          <a:xfrm rot="0">
+          <a:xfrm>
             <a:off x="10789596" y="6140720"/>
             <a:ext cx="38100" cy="558108"/>
             <a:chOff x="0" y="0"/>
@@ -7893,12 +7945,12 @@
         </p:grpSpPr>
         <p:sp>
           <p:nvSpPr>
-            <p:cNvPr name="Freeform 26" id="26"/>
+            <p:cNvPr id="26" name="Freeform 26"/>
             <p:cNvSpPr/>
             <p:nvPr/>
           </p:nvSpPr>
           <p:spPr>
-            <a:xfrm flipH="false" flipV="false" rot="0">
+            <a:xfrm>
               <a:off x="0" y="0"/>
               <a:ext cx="50800" cy="744093"/>
             </a:xfrm>
@@ -7907,9 +7959,9 @@
               <a:gdLst/>
               <a:ahLst/>
               <a:cxnLst/>
-              <a:rect r="r" b="b" t="t" l="l"/>
+              <a:rect l="l" t="t" r="r" b="b"/>
               <a:pathLst>
-                <a:path h="744093" w="50800">
+                <a:path w="50800" h="744093">
                   <a:moveTo>
                     <a:pt x="0" y="25400"/>
                   </a:moveTo>
@@ -7948,12 +8000,12 @@
       </p:grpSp>
       <p:grpSp>
         <p:nvGrpSpPr>
-          <p:cNvPr name="Group 27" id="27"/>
+          <p:cNvPr id="27" name="Group 27"/>
           <p:cNvGrpSpPr/>
           <p:nvPr/>
         </p:nvGrpSpPr>
         <p:grpSpPr>
-          <a:xfrm rot="0">
+          <a:xfrm>
             <a:off x="10704014" y="6594053"/>
             <a:ext cx="209255" cy="209255"/>
             <a:chOff x="0" y="0"/>
@@ -7962,12 +8014,12 @@
         </p:grpSpPr>
         <p:sp>
           <p:nvSpPr>
-            <p:cNvPr name="Freeform 28" id="28"/>
+            <p:cNvPr id="28" name="Freeform 28"/>
             <p:cNvSpPr/>
             <p:nvPr/>
           </p:nvSpPr>
           <p:spPr>
-            <a:xfrm flipH="false" flipV="false" rot="0">
+            <a:xfrm>
               <a:off x="0" y="0"/>
               <a:ext cx="279019" cy="279019"/>
             </a:xfrm>
@@ -7976,9 +8028,9 @@
               <a:gdLst/>
               <a:ahLst/>
               <a:cxnLst/>
-              <a:rect r="r" b="b" t="t" l="l"/>
+              <a:rect l="l" t="t" r="r" b="b"/>
               <a:pathLst>
-                <a:path h="279019" w="279019">
+                <a:path w="279019" h="279019">
                   <a:moveTo>
                     <a:pt x="0" y="139446"/>
                   </a:moveTo>
@@ -8014,12 +8066,12 @@
       </p:grpSp>
       <p:sp>
         <p:nvSpPr>
-          <p:cNvPr name="TextBox 29" id="29"/>
-          <p:cNvSpPr txBox="true"/>
-          <p:nvPr/>
-        </p:nvSpPr>
-        <p:spPr>
-          <a:xfrm rot="0">
+          <p:cNvPr id="29" name="TextBox 29"/>
+          <p:cNvSpPr txBox="1"/>
+          <p:nvPr/>
+        </p:nvSpPr>
+        <p:spPr>
+          <a:xfrm>
             <a:off x="7930010" y="3922366"/>
             <a:ext cx="5757272" cy="445589"/>
           </a:xfrm>
@@ -8028,7 +8080,7 @@
           </a:prstGeom>
         </p:spPr>
         <p:txBody>
-          <a:bodyPr anchor="t" rtlCol="false" tIns="0" lIns="0" bIns="0" rIns="0">
+          <a:bodyPr lIns="0" tIns="0" rIns="0" bIns="0" rtlCol="0" anchor="t">
             <a:spAutoFit/>
           </a:bodyPr>
           <a:lstStyle/>
@@ -8039,7 +8091,7 @@
               </a:lnSpc>
             </a:pPr>
             <a:r>
-              <a:rPr lang="en-US" sz="2700" b="true">
+              <a:rPr lang="en-US" sz="2700" b="1">
                 <a:solidFill>
                   <a:srgbClr val="272525"/>
                 </a:solidFill>
@@ -8055,12 +8107,12 @@
       </p:sp>
       <p:sp>
         <p:nvSpPr>
-          <p:cNvPr name="TextBox 30" id="30"/>
-          <p:cNvSpPr txBox="true"/>
-          <p:nvPr/>
-        </p:nvSpPr>
-        <p:spPr>
-          <a:xfrm rot="0">
+          <p:cNvPr id="30" name="TextBox 30"/>
+          <p:cNvSpPr txBox="1"/>
+          <p:nvPr/>
+        </p:nvSpPr>
+        <p:spPr>
+          <a:xfrm>
             <a:off x="7930010" y="4456509"/>
             <a:ext cx="5757272" cy="1404938"/>
           </a:xfrm>
@@ -8069,7 +8121,7 @@
           </a:prstGeom>
         </p:spPr>
         <p:txBody>
-          <a:bodyPr anchor="t" rtlCol="false" tIns="0" lIns="0" bIns="0" rIns="0">
+          <a:bodyPr lIns="0" tIns="0" rIns="0" bIns="0" rtlCol="0" anchor="t">
             <a:spAutoFit/>
           </a:bodyPr>
           <a:lstStyle/>
@@ -8096,12 +8148,12 @@
       </p:sp>
       <p:grpSp>
         <p:nvGrpSpPr>
-          <p:cNvPr name="Group 31" id="31"/>
+          <p:cNvPr id="31" name="Group 31"/>
           <p:cNvGrpSpPr/>
           <p:nvPr/>
         </p:nvGrpSpPr>
         <p:grpSpPr>
-          <a:xfrm rot="0">
+          <a:xfrm>
             <a:off x="14118879" y="6698675"/>
             <a:ext cx="38100" cy="558108"/>
             <a:chOff x="0" y="0"/>
@@ -8110,12 +8162,12 @@
         </p:grpSpPr>
         <p:sp>
           <p:nvSpPr>
-            <p:cNvPr name="Freeform 32" id="32"/>
+            <p:cNvPr id="32" name="Freeform 32"/>
             <p:cNvSpPr/>
             <p:nvPr/>
           </p:nvSpPr>
           <p:spPr>
-            <a:xfrm flipH="false" flipV="false" rot="0">
+            <a:xfrm>
               <a:off x="0" y="0"/>
               <a:ext cx="50800" cy="744093"/>
             </a:xfrm>
@@ -8124,9 +8176,9 @@
               <a:gdLst/>
               <a:ahLst/>
               <a:cxnLst/>
-              <a:rect r="r" b="b" t="t" l="l"/>
+              <a:rect l="l" t="t" r="r" b="b"/>
               <a:pathLst>
-                <a:path h="744093" w="50800">
+                <a:path w="50800" h="744093">
                   <a:moveTo>
                     <a:pt x="0" y="25400"/>
                   </a:moveTo>
@@ -8165,12 +8217,12 @@
       </p:grpSp>
       <p:grpSp>
         <p:nvGrpSpPr>
-          <p:cNvPr name="Group 33" id="33"/>
+          <p:cNvPr id="33" name="Group 33"/>
           <p:cNvGrpSpPr/>
           <p:nvPr/>
         </p:nvGrpSpPr>
         <p:grpSpPr>
-          <a:xfrm rot="0">
+          <a:xfrm>
             <a:off x="14033306" y="6594053"/>
             <a:ext cx="209255" cy="209255"/>
             <a:chOff x="0" y="0"/>
@@ -8179,12 +8231,12 @@
         </p:grpSpPr>
         <p:sp>
           <p:nvSpPr>
-            <p:cNvPr name="Freeform 34" id="34"/>
+            <p:cNvPr id="34" name="Freeform 34"/>
             <p:cNvSpPr/>
             <p:nvPr/>
           </p:nvSpPr>
           <p:spPr>
-            <a:xfrm flipH="false" flipV="false" rot="0">
+            <a:xfrm>
               <a:off x="0" y="0"/>
               <a:ext cx="279019" cy="279019"/>
             </a:xfrm>
@@ -8193,9 +8245,9 @@
               <a:gdLst/>
               <a:ahLst/>
               <a:cxnLst/>
-              <a:rect r="r" b="b" t="t" l="l"/>
+              <a:rect l="l" t="t" r="r" b="b"/>
               <a:pathLst>
-                <a:path h="279019" w="279019">
+                <a:path w="279019" h="279019">
                   <a:moveTo>
                     <a:pt x="0" y="139446"/>
                   </a:moveTo>
@@ -8231,12 +8283,12 @@
       </p:grpSp>
       <p:sp>
         <p:nvSpPr>
-          <p:cNvPr name="TextBox 35" id="35"/>
-          <p:cNvSpPr txBox="true"/>
-          <p:nvPr/>
-        </p:nvSpPr>
-        <p:spPr>
-          <a:xfrm rot="0">
+          <p:cNvPr id="35" name="TextBox 35"/>
+          <p:cNvSpPr txBox="1"/>
+          <p:nvPr/>
+        </p:nvSpPr>
+        <p:spPr>
+          <a:xfrm>
             <a:off x="11259293" y="7526531"/>
             <a:ext cx="5757272" cy="445589"/>
           </a:xfrm>
@@ -8245,7 +8297,7 @@
           </a:prstGeom>
         </p:spPr>
         <p:txBody>
-          <a:bodyPr anchor="t" rtlCol="false" tIns="0" lIns="0" bIns="0" rIns="0">
+          <a:bodyPr lIns="0" tIns="0" rIns="0" bIns="0" rtlCol="0" anchor="t">
             <a:spAutoFit/>
           </a:bodyPr>
           <a:lstStyle/>
@@ -8256,7 +8308,7 @@
               </a:lnSpc>
             </a:pPr>
             <a:r>
-              <a:rPr lang="en-US" sz="2700" b="true">
+              <a:rPr lang="en-US" sz="2700" b="1">
                 <a:solidFill>
                   <a:srgbClr val="272525"/>
                 </a:solidFill>
@@ -8272,12 +8324,12 @@
       </p:sp>
       <p:sp>
         <p:nvSpPr>
-          <p:cNvPr name="TextBox 36" id="36"/>
-          <p:cNvSpPr txBox="true"/>
-          <p:nvPr/>
-        </p:nvSpPr>
-        <p:spPr>
-          <a:xfrm rot="0">
+          <p:cNvPr id="36" name="TextBox 36"/>
+          <p:cNvSpPr txBox="1"/>
+          <p:nvPr/>
+        </p:nvSpPr>
+        <p:spPr>
+          <a:xfrm>
             <a:off x="11259293" y="8060684"/>
             <a:ext cx="5757272" cy="962025"/>
           </a:xfrm>
@@ -8286,7 +8338,7 @@
           </a:prstGeom>
         </p:spPr>
         <p:txBody>
-          <a:bodyPr anchor="t" rtlCol="false" tIns="0" lIns="0" bIns="0" rIns="0">
+          <a:bodyPr lIns="0" tIns="0" rIns="0" bIns="0" rtlCol="0" anchor="t">
             <a:spAutoFit/>
           </a:bodyPr>
           <a:lstStyle/>
@@ -8320,7 +8372,7 @@
 </file>
 
 <file path=ppt/slides/slide3.xml><?xml version="1.0" encoding="utf-8"?>
-<p:sld xmlns:p="http://schemas.openxmlformats.org/presentationml/2006/main" xmlns:a="http://schemas.openxmlformats.org/drawingml/2006/main" xmlns:r="http://schemas.openxmlformats.org/officeDocument/2006/relationships">
+<p:sld xmlns:a="http://schemas.openxmlformats.org/drawingml/2006/main" xmlns:r="http://schemas.openxmlformats.org/officeDocument/2006/relationships" xmlns:p="http://schemas.openxmlformats.org/presentationml/2006/main">
   <p:cSld>
     <p:spTree>
       <p:nvGrpSpPr>
@@ -8338,12 +8390,12 @@
       </p:grpSpPr>
       <p:grpSp>
         <p:nvGrpSpPr>
-          <p:cNvPr name="Group 2" id="2"/>
+          <p:cNvPr id="2" name="Group 2"/>
           <p:cNvGrpSpPr/>
           <p:nvPr/>
         </p:nvGrpSpPr>
         <p:grpSpPr>
-          <a:xfrm rot="0">
+          <a:xfrm>
             <a:off x="0" y="0"/>
             <a:ext cx="18288000" cy="10287000"/>
             <a:chOff x="0" y="0"/>
@@ -8352,12 +8404,12 @@
         </p:grpSpPr>
         <p:sp>
           <p:nvSpPr>
-            <p:cNvPr name="Freeform 3" id="3"/>
+            <p:cNvPr id="3" name="Freeform 3"/>
             <p:cNvSpPr/>
             <p:nvPr/>
           </p:nvSpPr>
           <p:spPr>
-            <a:xfrm flipH="false" flipV="false" rot="0">
+            <a:xfrm>
               <a:off x="0" y="0"/>
               <a:ext cx="24384000" cy="13716000"/>
             </a:xfrm>
@@ -8366,9 +8418,9 @@
               <a:gdLst/>
               <a:ahLst/>
               <a:cxnLst/>
-              <a:rect r="r" b="b" t="t" l="l"/>
+              <a:rect l="l" t="t" r="r" b="b"/>
               <a:pathLst>
-                <a:path h="13716000" w="24384000">
+                <a:path w="24384000" h="13716000">
                   <a:moveTo>
                     <a:pt x="0" y="0"/>
                   </a:moveTo>
@@ -8393,12 +8445,12 @@
       </p:grpSp>
       <p:grpSp>
         <p:nvGrpSpPr>
-          <p:cNvPr name="Group 4" id="4"/>
+          <p:cNvPr id="4" name="Group 4"/>
           <p:cNvGrpSpPr/>
           <p:nvPr/>
         </p:nvGrpSpPr>
         <p:grpSpPr>
-          <a:xfrm rot="0">
+          <a:xfrm>
             <a:off x="0" y="0"/>
             <a:ext cx="18288000" cy="10287000"/>
             <a:chOff x="0" y="0"/>
@@ -8407,12 +8459,12 @@
         </p:grpSpPr>
         <p:sp>
           <p:nvSpPr>
-            <p:cNvPr name="Freeform 5" id="5"/>
+            <p:cNvPr id="5" name="Freeform 5"/>
             <p:cNvSpPr/>
             <p:nvPr/>
           </p:nvSpPr>
           <p:spPr>
-            <a:xfrm flipH="false" flipV="false" rot="0">
+            <a:xfrm>
               <a:off x="0" y="0"/>
               <a:ext cx="24384000" cy="13716000"/>
             </a:xfrm>
@@ -8421,9 +8473,9 @@
               <a:gdLst/>
               <a:ahLst/>
               <a:cxnLst/>
-              <a:rect r="r" b="b" t="t" l="l"/>
+              <a:rect l="l" t="t" r="r" b="b"/>
               <a:pathLst>
-                <a:path h="13716000" w="24384000">
+                <a:path w="24384000" h="13716000">
                   <a:moveTo>
                     <a:pt x="0" y="0"/>
                   </a:moveTo>
@@ -8448,12 +8500,12 @@
       </p:grpSp>
       <p:grpSp>
         <p:nvGrpSpPr>
-          <p:cNvPr name="Group 6" id="6"/>
+          <p:cNvPr id="6" name="Group 6"/>
           <p:cNvGrpSpPr/>
           <p:nvPr/>
         </p:nvGrpSpPr>
         <p:grpSpPr>
-          <a:xfrm rot="0">
+          <a:xfrm>
             <a:off x="992238" y="1647082"/>
             <a:ext cx="2614612" cy="532800"/>
             <a:chOff x="0" y="0"/>
@@ -8462,12 +8514,12 @@
         </p:grpSpPr>
         <p:sp>
           <p:nvSpPr>
-            <p:cNvPr name="Freeform 7" id="7"/>
+            <p:cNvPr id="7" name="Freeform 7"/>
             <p:cNvSpPr/>
             <p:nvPr/>
           </p:nvSpPr>
           <p:spPr>
-            <a:xfrm flipH="false" flipV="false" rot="0">
+            <a:xfrm>
               <a:off x="0" y="0"/>
               <a:ext cx="3486150" cy="710438"/>
             </a:xfrm>
@@ -8476,9 +8528,9 @@
               <a:gdLst/>
               <a:ahLst/>
               <a:cxnLst/>
-              <a:rect r="r" b="b" t="t" l="l"/>
+              <a:rect l="l" t="t" r="r" b="b"/>
               <a:pathLst>
-                <a:path h="710438" w="3486150">
+                <a:path w="3486150" h="710438">
                   <a:moveTo>
                     <a:pt x="0" y="127000"/>
                   </a:moveTo>
@@ -8523,12 +8575,12 @@
       </p:grpSp>
       <p:sp>
         <p:nvSpPr>
-          <p:cNvPr name="TextBox 8" id="8"/>
-          <p:cNvSpPr txBox="true"/>
-          <p:nvPr/>
-        </p:nvSpPr>
-        <p:spPr>
-          <a:xfrm rot="0">
+          <p:cNvPr id="8" name="TextBox 8"/>
+          <p:cNvSpPr txBox="1"/>
+          <p:nvPr/>
+        </p:nvSpPr>
+        <p:spPr>
+          <a:xfrm>
             <a:off x="1162345" y="1665389"/>
             <a:ext cx="3188789" cy="429520"/>
           </a:xfrm>
@@ -8537,7 +8589,7 @@
           </a:prstGeom>
         </p:spPr>
         <p:txBody>
-          <a:bodyPr anchor="t" rtlCol="false" tIns="0" lIns="0" bIns="0" rIns="0">
+          <a:bodyPr lIns="0" tIns="0" rIns="0" bIns="0" rtlCol="0" anchor="t">
             <a:spAutoFit/>
           </a:bodyPr>
           <a:lstStyle/>
@@ -8564,12 +8616,12 @@
       </p:sp>
       <p:sp>
         <p:nvSpPr>
-          <p:cNvPr name="TextBox 9" id="9"/>
-          <p:cNvSpPr txBox="true"/>
-          <p:nvPr/>
-        </p:nvSpPr>
-        <p:spPr>
-          <a:xfrm rot="0">
+          <p:cNvPr id="9" name="TextBox 9"/>
+          <p:cNvSpPr txBox="1"/>
+          <p:nvPr/>
+        </p:nvSpPr>
+        <p:spPr>
+          <a:xfrm>
             <a:off x="992238" y="2274246"/>
             <a:ext cx="16303523" cy="905027"/>
           </a:xfrm>
@@ -8578,7 +8630,7 @@
           </a:prstGeom>
         </p:spPr>
         <p:txBody>
-          <a:bodyPr anchor="t" rtlCol="false" tIns="0" lIns="0" bIns="0" rIns="0">
+          <a:bodyPr lIns="0" tIns="0" rIns="0" bIns="0" rtlCol="0" anchor="t">
             <a:spAutoFit/>
           </a:bodyPr>
           <a:lstStyle/>
@@ -8589,7 +8641,7 @@
               </a:lnSpc>
             </a:pPr>
             <a:r>
-              <a:rPr lang="en-US" sz="5500" b="true">
+              <a:rPr lang="en-US" sz="5500" b="1">
                 <a:solidFill>
                   <a:srgbClr val="000000"/>
                 </a:solidFill>
@@ -8603,75 +8655,14 @@
           </a:p>
         </p:txBody>
       </p:sp>
-      <p:grpSp>
-        <p:nvGrpSpPr>
-          <p:cNvPr name="Group 10" id="10"/>
-          <p:cNvGrpSpPr/>
-          <p:nvPr/>
-        </p:nvGrpSpPr>
-        <p:grpSpPr>
-          <a:xfrm rot="0">
-            <a:off x="992238" y="4704455"/>
-            <a:ext cx="5103609" cy="2835326"/>
-            <a:chOff x="0" y="0"/>
-            <a:chExt cx="6804812" cy="3780434"/>
-          </a:xfrm>
-        </p:grpSpPr>
-        <p:sp>
-          <p:nvSpPr>
-            <p:cNvPr name="Freeform 11" id="11" descr="preencoded.png"/>
-            <p:cNvSpPr/>
-            <p:nvPr/>
-          </p:nvSpPr>
-          <p:spPr>
-            <a:xfrm flipH="false" flipV="false" rot="0">
-              <a:off x="0" y="0"/>
-              <a:ext cx="6804787" cy="3780409"/>
-            </a:xfrm>
-            <a:custGeom>
-              <a:avLst/>
-              <a:gdLst/>
-              <a:ahLst/>
-              <a:cxnLst/>
-              <a:rect r="r" b="b" t="t" l="l"/>
-              <a:pathLst>
-                <a:path h="3780409" w="6804787">
-                  <a:moveTo>
-                    <a:pt x="0" y="0"/>
-                  </a:moveTo>
-                  <a:lnTo>
-                    <a:pt x="6804787" y="0"/>
-                  </a:lnTo>
-                  <a:lnTo>
-                    <a:pt x="6804787" y="3780409"/>
-                  </a:lnTo>
-                  <a:lnTo>
-                    <a:pt x="0" y="3780409"/>
-                  </a:lnTo>
-                  <a:lnTo>
-                    <a:pt x="0" y="0"/>
-                  </a:lnTo>
-                  <a:close/>
-                </a:path>
-              </a:pathLst>
-            </a:custGeom>
-            <a:blipFill>
-              <a:blip r:embed="rId3"/>
-              <a:stretch>
-                <a:fillRect l="0" t="-37" r="0" b="-38"/>
-              </a:stretch>
-            </a:blipFill>
-          </p:spPr>
-        </p:sp>
-      </p:grpSp>
-      <p:sp>
-        <p:nvSpPr>
-          <p:cNvPr name="TextBox 12" id="12"/>
-          <p:cNvSpPr txBox="true"/>
-          <p:nvPr/>
-        </p:nvSpPr>
-        <p:spPr>
-          <a:xfrm rot="0">
+      <p:sp>
+        <p:nvSpPr>
+          <p:cNvPr id="12" name="TextBox 12"/>
+          <p:cNvSpPr txBox="1"/>
+          <p:nvPr/>
+        </p:nvSpPr>
+        <p:spPr>
+          <a:xfrm>
             <a:off x="9499406" y="3878466"/>
             <a:ext cx="7805890" cy="452437"/>
           </a:xfrm>
@@ -8680,7 +8671,7 @@
           </a:prstGeom>
         </p:spPr>
         <p:txBody>
-          <a:bodyPr anchor="t" rtlCol="false" tIns="0" lIns="0" bIns="0" rIns="0">
+          <a:bodyPr lIns="0" tIns="0" rIns="0" bIns="0" rtlCol="0" anchor="t">
             <a:spAutoFit/>
           </a:bodyPr>
           <a:lstStyle/>
@@ -8691,7 +8682,7 @@
               </a:lnSpc>
             </a:pPr>
             <a:r>
-              <a:rPr lang="en-US" sz="2700" b="true">
+              <a:rPr lang="en-US" sz="2700" b="1">
                 <a:solidFill>
                   <a:srgbClr val="000000"/>
                 </a:solidFill>
@@ -8707,12 +8698,12 @@
       </p:sp>
       <p:sp>
         <p:nvSpPr>
-          <p:cNvPr name="TextBox 13" id="13"/>
-          <p:cNvSpPr txBox="true"/>
-          <p:nvPr/>
-        </p:nvSpPr>
-        <p:spPr>
-          <a:xfrm rot="0">
+          <p:cNvPr id="13" name="TextBox 13"/>
+          <p:cNvSpPr txBox="1"/>
+          <p:nvPr/>
+        </p:nvSpPr>
+        <p:spPr>
+          <a:xfrm>
             <a:off x="9499406" y="4528690"/>
             <a:ext cx="7805890" cy="4012111"/>
           </a:xfrm>
@@ -8721,12 +8712,12 @@
           </a:prstGeom>
         </p:spPr>
         <p:txBody>
-          <a:bodyPr anchor="t" rtlCol="false" tIns="0" lIns="0" bIns="0" rIns="0">
+          <a:bodyPr lIns="0" tIns="0" rIns="0" bIns="0" rtlCol="0" anchor="t">
             <a:spAutoFit/>
           </a:bodyPr>
           <a:lstStyle/>
           <a:p>
-            <a:pPr algn="l" marL="530860" indent="-265430" lvl="1">
+            <a:pPr marL="530860" lvl="1" indent="-265430" algn="l">
               <a:lnSpc>
                 <a:spcPts val="3511"/>
               </a:lnSpc>
@@ -8734,7 +8725,7 @@
               <a:buChar char="•"/>
             </a:pPr>
             <a:r>
-              <a:rPr lang="en-US" b="true" sz="2200">
+              <a:rPr lang="en-US" sz="2200" b="1">
                 <a:solidFill>
                   <a:srgbClr val="272525"/>
                 </a:solidFill>
@@ -8759,7 +8750,7 @@
             </a:r>
           </a:p>
           <a:p>
-            <a:pPr algn="l" marL="530860" indent="-265430" lvl="1">
+            <a:pPr marL="530860" lvl="1" indent="-265430" algn="l">
               <a:lnSpc>
                 <a:spcPts val="3511"/>
               </a:lnSpc>
@@ -8767,7 +8758,7 @@
               <a:buChar char="•"/>
             </a:pPr>
             <a:r>
-              <a:rPr lang="en-US" b="true" sz="2200">
+              <a:rPr lang="en-US" sz="2200" b="1">
                 <a:solidFill>
                   <a:srgbClr val="272525"/>
                 </a:solidFill>
@@ -8792,7 +8783,7 @@
             </a:r>
           </a:p>
           <a:p>
-            <a:pPr algn="l" marL="530860" indent="-265430" lvl="1">
+            <a:pPr marL="530860" lvl="1" indent="-265430" algn="l">
               <a:lnSpc>
                 <a:spcPts val="3511"/>
               </a:lnSpc>
@@ -8800,7 +8791,7 @@
               <a:buChar char="•"/>
             </a:pPr>
             <a:r>
-              <a:rPr lang="en-US" b="true" sz="2200">
+              <a:rPr lang="en-US" sz="2200" b="1">
                 <a:solidFill>
                   <a:srgbClr val="272525"/>
                 </a:solidFill>
@@ -8825,7 +8816,7 @@
             </a:r>
           </a:p>
           <a:p>
-            <a:pPr algn="l" marL="530860" indent="-265430" lvl="1">
+            <a:pPr marL="530860" lvl="1" indent="-265430" algn="l">
               <a:lnSpc>
                 <a:spcPts val="3511"/>
               </a:lnSpc>
@@ -8833,7 +8824,7 @@
               <a:buChar char="•"/>
             </a:pPr>
             <a:r>
-              <a:rPr lang="en-US" b="true" sz="2200">
+              <a:rPr lang="en-US" sz="2200" b="1">
                 <a:solidFill>
                   <a:srgbClr val="272525"/>
                 </a:solidFill>
@@ -8868,7 +8859,7 @@
 </file>
 
 <file path=ppt/slides/slide4.xml><?xml version="1.0" encoding="utf-8"?>
-<p:sld xmlns:p="http://schemas.openxmlformats.org/presentationml/2006/main" xmlns:a="http://schemas.openxmlformats.org/drawingml/2006/main" xmlns:r="http://schemas.openxmlformats.org/officeDocument/2006/relationships">
+<p:sld xmlns:a="http://schemas.openxmlformats.org/drawingml/2006/main" xmlns:r="http://schemas.openxmlformats.org/officeDocument/2006/relationships" xmlns:p="http://schemas.openxmlformats.org/presentationml/2006/main">
   <p:cSld>
     <p:spTree>
       <p:nvGrpSpPr>
@@ -8886,12 +8877,12 @@
       </p:grpSpPr>
       <p:grpSp>
         <p:nvGrpSpPr>
-          <p:cNvPr name="Group 2" id="2"/>
+          <p:cNvPr id="2" name="Group 2"/>
           <p:cNvGrpSpPr/>
           <p:nvPr/>
         </p:nvGrpSpPr>
         <p:grpSpPr>
-          <a:xfrm rot="0">
+          <a:xfrm>
             <a:off x="0" y="0"/>
             <a:ext cx="18288000" cy="10287000"/>
             <a:chOff x="0" y="0"/>
@@ -8900,12 +8891,12 @@
         </p:grpSpPr>
         <p:sp>
           <p:nvSpPr>
-            <p:cNvPr name="Freeform 3" id="3"/>
+            <p:cNvPr id="3" name="Freeform 3"/>
             <p:cNvSpPr/>
             <p:nvPr/>
           </p:nvSpPr>
           <p:spPr>
-            <a:xfrm flipH="false" flipV="false" rot="0">
+            <a:xfrm>
               <a:off x="0" y="0"/>
               <a:ext cx="24384000" cy="13716000"/>
             </a:xfrm>
@@ -8914,9 +8905,9 @@
               <a:gdLst/>
               <a:ahLst/>
               <a:cxnLst/>
-              <a:rect r="r" b="b" t="t" l="l"/>
+              <a:rect l="l" t="t" r="r" b="b"/>
               <a:pathLst>
-                <a:path h="13716000" w="24384000">
+                <a:path w="24384000" h="13716000">
                   <a:moveTo>
                     <a:pt x="0" y="0"/>
                   </a:moveTo>
@@ -8941,12 +8932,12 @@
       </p:grpSp>
       <p:grpSp>
         <p:nvGrpSpPr>
-          <p:cNvPr name="Group 4" id="4"/>
+          <p:cNvPr id="4" name="Group 4"/>
           <p:cNvGrpSpPr/>
           <p:nvPr/>
         </p:nvGrpSpPr>
         <p:grpSpPr>
-          <a:xfrm rot="0">
+          <a:xfrm>
             <a:off x="0" y="0"/>
             <a:ext cx="18288000" cy="10287000"/>
             <a:chOff x="0" y="0"/>
@@ -8955,12 +8946,12 @@
         </p:grpSpPr>
         <p:sp>
           <p:nvSpPr>
-            <p:cNvPr name="Freeform 5" id="5"/>
+            <p:cNvPr id="5" name="Freeform 5"/>
             <p:cNvSpPr/>
             <p:nvPr/>
           </p:nvSpPr>
           <p:spPr>
-            <a:xfrm flipH="false" flipV="false" rot="0">
+            <a:xfrm>
               <a:off x="0" y="0"/>
               <a:ext cx="24384000" cy="13716000"/>
             </a:xfrm>
@@ -8969,9 +8960,9 @@
               <a:gdLst/>
               <a:ahLst/>
               <a:cxnLst/>
-              <a:rect r="r" b="b" t="t" l="l"/>
+              <a:rect l="l" t="t" r="r" b="b"/>
               <a:pathLst>
-                <a:path h="13716000" w="24384000">
+                <a:path w="24384000" h="13716000">
                   <a:moveTo>
                     <a:pt x="0" y="0"/>
                   </a:moveTo>
@@ -8996,12 +8987,12 @@
       </p:grpSp>
       <p:grpSp>
         <p:nvGrpSpPr>
-          <p:cNvPr name="Group 6" id="6"/>
+          <p:cNvPr id="6" name="Group 6"/>
           <p:cNvGrpSpPr/>
           <p:nvPr/>
         </p:nvGrpSpPr>
         <p:grpSpPr>
-          <a:xfrm rot="0">
+          <a:xfrm>
             <a:off x="992238" y="1954263"/>
             <a:ext cx="2614612" cy="532800"/>
             <a:chOff x="0" y="0"/>
@@ -9010,12 +9001,12 @@
         </p:grpSpPr>
         <p:sp>
           <p:nvSpPr>
-            <p:cNvPr name="Freeform 7" id="7"/>
+            <p:cNvPr id="7" name="Freeform 7"/>
             <p:cNvSpPr/>
             <p:nvPr/>
           </p:nvSpPr>
           <p:spPr>
-            <a:xfrm flipH="false" flipV="false" rot="0">
+            <a:xfrm>
               <a:off x="0" y="0"/>
               <a:ext cx="3486150" cy="710438"/>
             </a:xfrm>
@@ -9024,9 +9015,9 @@
               <a:gdLst/>
               <a:ahLst/>
               <a:cxnLst/>
-              <a:rect r="r" b="b" t="t" l="l"/>
+              <a:rect l="l" t="t" r="r" b="b"/>
               <a:pathLst>
-                <a:path h="710438" w="3486150">
+                <a:path w="3486150" h="710438">
                   <a:moveTo>
                     <a:pt x="0" y="127000"/>
                   </a:moveTo>
@@ -9071,12 +9062,12 @@
       </p:grpSp>
       <p:sp>
         <p:nvSpPr>
-          <p:cNvPr name="TextBox 8" id="8"/>
-          <p:cNvSpPr txBox="true"/>
-          <p:nvPr/>
-        </p:nvSpPr>
-        <p:spPr>
-          <a:xfrm rot="0">
+          <p:cNvPr id="8" name="TextBox 8"/>
+          <p:cNvSpPr txBox="1"/>
+          <p:nvPr/>
+        </p:nvSpPr>
+        <p:spPr>
+          <a:xfrm>
             <a:off x="1162345" y="1972570"/>
             <a:ext cx="3188789" cy="429520"/>
           </a:xfrm>
@@ -9085,7 +9076,7 @@
           </a:prstGeom>
         </p:spPr>
         <p:txBody>
-          <a:bodyPr anchor="t" rtlCol="false" tIns="0" lIns="0" bIns="0" rIns="0">
+          <a:bodyPr lIns="0" tIns="0" rIns="0" bIns="0" rtlCol="0" anchor="t">
             <a:spAutoFit/>
           </a:bodyPr>
           <a:lstStyle/>
@@ -9112,12 +9103,12 @@
       </p:sp>
       <p:sp>
         <p:nvSpPr>
-          <p:cNvPr name="TextBox 9" id="9"/>
-          <p:cNvSpPr txBox="true"/>
-          <p:nvPr/>
-        </p:nvSpPr>
-        <p:spPr>
-          <a:xfrm rot="0">
+          <p:cNvPr id="9" name="TextBox 9"/>
+          <p:cNvSpPr txBox="1"/>
+          <p:nvPr/>
+        </p:nvSpPr>
+        <p:spPr>
+          <a:xfrm>
             <a:off x="992238" y="2581427"/>
             <a:ext cx="16303523" cy="905027"/>
           </a:xfrm>
@@ -9126,7 +9117,7 @@
           </a:prstGeom>
         </p:spPr>
         <p:txBody>
-          <a:bodyPr anchor="t" rtlCol="false" tIns="0" lIns="0" bIns="0" rIns="0">
+          <a:bodyPr lIns="0" tIns="0" rIns="0" bIns="0" rtlCol="0" anchor="t">
             <a:spAutoFit/>
           </a:bodyPr>
           <a:lstStyle/>
@@ -9137,7 +9128,7 @@
               </a:lnSpc>
             </a:pPr>
             <a:r>
-              <a:rPr lang="en-US" sz="5500" b="true">
+              <a:rPr lang="en-US" sz="5500" b="1">
                 <a:solidFill>
                   <a:srgbClr val="000000"/>
                 </a:solidFill>
@@ -9153,12 +9144,12 @@
       </p:sp>
       <p:sp>
         <p:nvSpPr>
-          <p:cNvPr name="Freeform 10" id="10" descr="preencoded.png"/>
+          <p:cNvPr id="10" name="Freeform 10" descr="preencoded.png"/>
           <p:cNvSpPr/>
           <p:nvPr/>
         </p:nvSpPr>
         <p:spPr>
-          <a:xfrm flipH="false" flipV="false" rot="0">
+          <a:xfrm>
             <a:off x="992238" y="3911651"/>
             <a:ext cx="5245446" cy="4420943"/>
           </a:xfrm>
@@ -9167,9 +9158,9 @@
             <a:gdLst/>
             <a:ahLst/>
             <a:cxnLst/>
-            <a:rect r="r" b="b" t="t" l="l"/>
+            <a:rect l="l" t="t" r="r" b="b"/>
             <a:pathLst>
-              <a:path h="4420943" w="5245446">
+              <a:path w="5245446" h="4420943">
                 <a:moveTo>
                   <a:pt x="0" y="0"/>
                 </a:moveTo>
@@ -9198,19 +9189,19 @@
               </a:extLst>
             </a:blip>
             <a:stretch>
-              <a:fillRect l="0" t="-65" r="0" b="-65"/>
+              <a:fillRect t="-65" b="-65"/>
             </a:stretch>
           </a:blipFill>
         </p:spPr>
       </p:sp>
       <p:sp>
         <p:nvSpPr>
-          <p:cNvPr name="TextBox 11" id="11"/>
-          <p:cNvSpPr txBox="true"/>
-          <p:nvPr/>
-        </p:nvSpPr>
-        <p:spPr>
-          <a:xfrm rot="0">
+          <p:cNvPr id="11" name="TextBox 11"/>
+          <p:cNvSpPr txBox="1"/>
+          <p:nvPr/>
+        </p:nvSpPr>
+        <p:spPr>
+          <a:xfrm>
             <a:off x="1466250" y="4223747"/>
             <a:ext cx="4449813" cy="895350"/>
           </a:xfrm>
@@ -9219,7 +9210,7 @@
           </a:prstGeom>
         </p:spPr>
         <p:txBody>
-          <a:bodyPr anchor="t" rtlCol="false" tIns="0" lIns="0" bIns="0" rIns="0">
+          <a:bodyPr lIns="0" tIns="0" rIns="0" bIns="0" rtlCol="0" anchor="t">
             <a:spAutoFit/>
           </a:bodyPr>
           <a:lstStyle/>
@@ -9230,7 +9221,7 @@
               </a:lnSpc>
             </a:pPr>
             <a:r>
-              <a:rPr lang="en-US" sz="2700" b="true">
+              <a:rPr lang="en-US" sz="2700" b="1">
                 <a:solidFill>
                   <a:srgbClr val="272525"/>
                 </a:solidFill>
@@ -9246,12 +9237,12 @@
       </p:sp>
       <p:sp>
         <p:nvSpPr>
-          <p:cNvPr name="TextBox 12" id="12"/>
-          <p:cNvSpPr txBox="true"/>
-          <p:nvPr/>
-        </p:nvSpPr>
-        <p:spPr>
-          <a:xfrm rot="0">
+          <p:cNvPr id="12" name="TextBox 12"/>
+          <p:cNvSpPr txBox="1"/>
+          <p:nvPr/>
+        </p:nvSpPr>
+        <p:spPr>
+          <a:xfrm>
             <a:off x="1466250" y="5203479"/>
             <a:ext cx="4449813" cy="2807494"/>
           </a:xfrm>
@@ -9260,7 +9251,7 @@
           </a:prstGeom>
         </p:spPr>
         <p:txBody>
-          <a:bodyPr anchor="t" rtlCol="false" tIns="0" lIns="0" bIns="0" rIns="0">
+          <a:bodyPr lIns="0" tIns="0" rIns="0" bIns="0" rtlCol="0" anchor="t">
             <a:spAutoFit/>
           </a:bodyPr>
           <a:lstStyle/>
@@ -9287,12 +9278,12 @@
       </p:sp>
       <p:sp>
         <p:nvSpPr>
-          <p:cNvPr name="Freeform 13" id="13" descr="preencoded.png"/>
+          <p:cNvPr id="13" name="Freeform 13" descr="preencoded.png"/>
           <p:cNvSpPr/>
           <p:nvPr/>
         </p:nvSpPr>
         <p:spPr>
-          <a:xfrm flipH="false" flipV="false" rot="0">
+          <a:xfrm>
             <a:off x="6521206" y="3911651"/>
             <a:ext cx="5245446" cy="4420943"/>
           </a:xfrm>
@@ -9301,9 +9292,9 @@
             <a:gdLst/>
             <a:ahLst/>
             <a:cxnLst/>
-            <a:rect r="r" b="b" t="t" l="l"/>
+            <a:rect l="l" t="t" r="r" b="b"/>
             <a:pathLst>
-              <a:path h="4420943" w="5245446">
+              <a:path w="5245446" h="4420943">
                 <a:moveTo>
                   <a:pt x="0" y="0"/>
                 </a:moveTo>
@@ -9332,19 +9323,19 @@
               </a:extLst>
             </a:blip>
             <a:stretch>
-              <a:fillRect l="0" t="-65" r="0" b="-65"/>
+              <a:fillRect t="-65" b="-65"/>
             </a:stretch>
           </a:blipFill>
         </p:spPr>
       </p:sp>
       <p:sp>
         <p:nvSpPr>
-          <p:cNvPr name="TextBox 14" id="14"/>
-          <p:cNvSpPr txBox="true"/>
-          <p:nvPr/>
-        </p:nvSpPr>
-        <p:spPr>
-          <a:xfrm rot="0">
+          <p:cNvPr id="14" name="TextBox 14"/>
+          <p:cNvSpPr txBox="1"/>
+          <p:nvPr/>
+        </p:nvSpPr>
+        <p:spPr>
+          <a:xfrm>
             <a:off x="6995217" y="4223747"/>
             <a:ext cx="4449813" cy="895350"/>
           </a:xfrm>
@@ -9353,7 +9344,7 @@
           </a:prstGeom>
         </p:spPr>
         <p:txBody>
-          <a:bodyPr anchor="t" rtlCol="false" tIns="0" lIns="0" bIns="0" rIns="0">
+          <a:bodyPr lIns="0" tIns="0" rIns="0" bIns="0" rtlCol="0" anchor="t">
             <a:spAutoFit/>
           </a:bodyPr>
           <a:lstStyle/>
@@ -9364,7 +9355,7 @@
               </a:lnSpc>
             </a:pPr>
             <a:r>
-              <a:rPr lang="en-US" sz="2700" b="true">
+              <a:rPr lang="en-US" sz="2700" b="1">
                 <a:solidFill>
                   <a:srgbClr val="272525"/>
                 </a:solidFill>
@@ -9380,12 +9371,12 @@
       </p:sp>
       <p:sp>
         <p:nvSpPr>
-          <p:cNvPr name="TextBox 15" id="15"/>
-          <p:cNvSpPr txBox="true"/>
-          <p:nvPr/>
-        </p:nvSpPr>
-        <p:spPr>
-          <a:xfrm rot="0">
+          <p:cNvPr id="15" name="TextBox 15"/>
+          <p:cNvSpPr txBox="1"/>
+          <p:nvPr/>
+        </p:nvSpPr>
+        <p:spPr>
+          <a:xfrm>
             <a:off x="6995217" y="5203479"/>
             <a:ext cx="4449813" cy="2353866"/>
           </a:xfrm>
@@ -9394,7 +9385,7 @@
           </a:prstGeom>
         </p:spPr>
         <p:txBody>
-          <a:bodyPr anchor="t" rtlCol="false" tIns="0" lIns="0" bIns="0" rIns="0">
+          <a:bodyPr lIns="0" tIns="0" rIns="0" bIns="0" rtlCol="0" anchor="t">
             <a:spAutoFit/>
           </a:bodyPr>
           <a:lstStyle/>
@@ -9421,12 +9412,12 @@
       </p:sp>
       <p:sp>
         <p:nvSpPr>
-          <p:cNvPr name="Freeform 16" id="16" descr="preencoded.png"/>
+          <p:cNvPr id="16" name="Freeform 16" descr="preencoded.png"/>
           <p:cNvSpPr/>
           <p:nvPr/>
         </p:nvSpPr>
         <p:spPr>
-          <a:xfrm flipH="false" flipV="false" rot="0">
+          <a:xfrm>
             <a:off x="12050163" y="3911651"/>
             <a:ext cx="5245446" cy="4420943"/>
           </a:xfrm>
@@ -9435,9 +9426,9 @@
             <a:gdLst/>
             <a:ahLst/>
             <a:cxnLst/>
-            <a:rect r="r" b="b" t="t" l="l"/>
+            <a:rect l="l" t="t" r="r" b="b"/>
             <a:pathLst>
-              <a:path h="4420943" w="5245446">
+              <a:path w="5245446" h="4420943">
                 <a:moveTo>
                   <a:pt x="0" y="0"/>
                 </a:moveTo>
@@ -9466,19 +9457,19 @@
               </a:extLst>
             </a:blip>
             <a:stretch>
-              <a:fillRect l="0" t="-65" r="0" b="-65"/>
+              <a:fillRect t="-65" b="-65"/>
             </a:stretch>
           </a:blipFill>
         </p:spPr>
       </p:sp>
       <p:sp>
         <p:nvSpPr>
-          <p:cNvPr name="TextBox 17" id="17"/>
-          <p:cNvSpPr txBox="true"/>
-          <p:nvPr/>
-        </p:nvSpPr>
-        <p:spPr>
-          <a:xfrm rot="0">
+          <p:cNvPr id="17" name="TextBox 17"/>
+          <p:cNvSpPr txBox="1"/>
+          <p:nvPr/>
+        </p:nvSpPr>
+        <p:spPr>
+          <a:xfrm>
             <a:off x="12524184" y="4223747"/>
             <a:ext cx="4449813" cy="895350"/>
           </a:xfrm>
@@ -9487,7 +9478,7 @@
           </a:prstGeom>
         </p:spPr>
         <p:txBody>
-          <a:bodyPr anchor="t" rtlCol="false" tIns="0" lIns="0" bIns="0" rIns="0">
+          <a:bodyPr lIns="0" tIns="0" rIns="0" bIns="0" rtlCol="0" anchor="t">
             <a:spAutoFit/>
           </a:bodyPr>
           <a:lstStyle/>
@@ -9498,7 +9489,7 @@
               </a:lnSpc>
             </a:pPr>
             <a:r>
-              <a:rPr lang="en-US" sz="2700" b="true">
+              <a:rPr lang="en-US" sz="2700" b="1">
                 <a:solidFill>
                   <a:srgbClr val="272525"/>
                 </a:solidFill>
@@ -9514,12 +9505,12 @@
       </p:sp>
       <p:sp>
         <p:nvSpPr>
-          <p:cNvPr name="TextBox 18" id="18"/>
-          <p:cNvSpPr txBox="true"/>
-          <p:nvPr/>
-        </p:nvSpPr>
-        <p:spPr>
-          <a:xfrm rot="0">
+          <p:cNvPr id="18" name="TextBox 18"/>
+          <p:cNvSpPr txBox="1"/>
+          <p:nvPr/>
+        </p:nvSpPr>
+        <p:spPr>
+          <a:xfrm>
             <a:off x="12524184" y="5203479"/>
             <a:ext cx="4449813" cy="1900237"/>
           </a:xfrm>
@@ -9528,7 +9519,7 @@
           </a:prstGeom>
         </p:spPr>
         <p:txBody>
-          <a:bodyPr anchor="t" rtlCol="false" tIns="0" lIns="0" bIns="0" rIns="0">
+          <a:bodyPr lIns="0" tIns="0" rIns="0" bIns="0" rtlCol="0" anchor="t">
             <a:spAutoFit/>
           </a:bodyPr>
           <a:lstStyle/>
@@ -9562,7 +9553,7 @@
 </file>
 
 <file path=ppt/slides/slide5.xml><?xml version="1.0" encoding="utf-8"?>
-<p:sld xmlns:p="http://schemas.openxmlformats.org/presentationml/2006/main" xmlns:a="http://schemas.openxmlformats.org/drawingml/2006/main" xmlns:r="http://schemas.openxmlformats.org/officeDocument/2006/relationships">
+<p:sld xmlns:a="http://schemas.openxmlformats.org/drawingml/2006/main" xmlns:r="http://schemas.openxmlformats.org/officeDocument/2006/relationships" xmlns:p="http://schemas.openxmlformats.org/presentationml/2006/main">
   <p:cSld>
     <p:spTree>
       <p:nvGrpSpPr>
@@ -9580,12 +9571,12 @@
       </p:grpSpPr>
       <p:grpSp>
         <p:nvGrpSpPr>
-          <p:cNvPr name="Group 2" id="2"/>
+          <p:cNvPr id="2" name="Group 2"/>
           <p:cNvGrpSpPr/>
           <p:nvPr/>
         </p:nvGrpSpPr>
         <p:grpSpPr>
-          <a:xfrm rot="0">
+          <a:xfrm>
             <a:off x="0" y="0"/>
             <a:ext cx="18288000" cy="10287000"/>
             <a:chOff x="0" y="0"/>
@@ -9594,12 +9585,12 @@
         </p:grpSpPr>
         <p:sp>
           <p:nvSpPr>
-            <p:cNvPr name="Freeform 3" id="3"/>
+            <p:cNvPr id="3" name="Freeform 3"/>
             <p:cNvSpPr/>
             <p:nvPr/>
           </p:nvSpPr>
           <p:spPr>
-            <a:xfrm flipH="false" flipV="false" rot="0">
+            <a:xfrm>
               <a:off x="0" y="0"/>
               <a:ext cx="24384000" cy="13716000"/>
             </a:xfrm>
@@ -9608,9 +9599,9 @@
               <a:gdLst/>
               <a:ahLst/>
               <a:cxnLst/>
-              <a:rect r="r" b="b" t="t" l="l"/>
+              <a:rect l="l" t="t" r="r" b="b"/>
               <a:pathLst>
-                <a:path h="13716000" w="24384000">
+                <a:path w="24384000" h="13716000">
                   <a:moveTo>
                     <a:pt x="0" y="0"/>
                   </a:moveTo>
@@ -9635,12 +9626,12 @@
       </p:grpSp>
       <p:grpSp>
         <p:nvGrpSpPr>
-          <p:cNvPr name="Group 4" id="4"/>
+          <p:cNvPr id="4" name="Group 4"/>
           <p:cNvGrpSpPr/>
           <p:nvPr/>
         </p:nvGrpSpPr>
         <p:grpSpPr>
-          <a:xfrm rot="0">
+          <a:xfrm>
             <a:off x="0" y="0"/>
             <a:ext cx="18288000" cy="10287000"/>
             <a:chOff x="0" y="0"/>
@@ -9649,12 +9640,12 @@
         </p:grpSpPr>
         <p:sp>
           <p:nvSpPr>
-            <p:cNvPr name="Freeform 5" id="5"/>
+            <p:cNvPr id="5" name="Freeform 5"/>
             <p:cNvSpPr/>
             <p:nvPr/>
           </p:nvSpPr>
           <p:spPr>
-            <a:xfrm flipH="false" flipV="false" rot="0">
+            <a:xfrm>
               <a:off x="0" y="0"/>
               <a:ext cx="24384000" cy="13716000"/>
             </a:xfrm>
@@ -9663,9 +9654,9 @@
               <a:gdLst/>
               <a:ahLst/>
               <a:cxnLst/>
-              <a:rect r="r" b="b" t="t" l="l"/>
+              <a:rect l="l" t="t" r="r" b="b"/>
               <a:pathLst>
-                <a:path h="13716000" w="24384000">
+                <a:path w="24384000" h="13716000">
                   <a:moveTo>
                     <a:pt x="0" y="0"/>
                   </a:moveTo>
@@ -9690,12 +9681,12 @@
       </p:grpSp>
       <p:grpSp>
         <p:nvGrpSpPr>
-          <p:cNvPr name="Group 6" id="6"/>
+          <p:cNvPr id="6" name="Group 6"/>
           <p:cNvGrpSpPr/>
           <p:nvPr/>
         </p:nvGrpSpPr>
         <p:grpSpPr>
-          <a:xfrm rot="0">
+          <a:xfrm>
             <a:off x="992238" y="1036444"/>
             <a:ext cx="2614612" cy="532800"/>
             <a:chOff x="0" y="0"/>
@@ -9704,12 +9695,12 @@
         </p:grpSpPr>
         <p:sp>
           <p:nvSpPr>
-            <p:cNvPr name="Freeform 7" id="7"/>
+            <p:cNvPr id="7" name="Freeform 7"/>
             <p:cNvSpPr/>
             <p:nvPr/>
           </p:nvSpPr>
           <p:spPr>
-            <a:xfrm flipH="false" flipV="false" rot="0">
+            <a:xfrm>
               <a:off x="0" y="0"/>
               <a:ext cx="3486150" cy="710438"/>
             </a:xfrm>
@@ -9718,9 +9709,9 @@
               <a:gdLst/>
               <a:ahLst/>
               <a:cxnLst/>
-              <a:rect r="r" b="b" t="t" l="l"/>
+              <a:rect l="l" t="t" r="r" b="b"/>
               <a:pathLst>
-                <a:path h="710438" w="3486150">
+                <a:path w="3486150" h="710438">
                   <a:moveTo>
                     <a:pt x="0" y="127000"/>
                   </a:moveTo>
@@ -9765,12 +9756,12 @@
       </p:grpSp>
       <p:sp>
         <p:nvSpPr>
-          <p:cNvPr name="TextBox 8" id="8"/>
-          <p:cNvSpPr txBox="true"/>
-          <p:nvPr/>
-        </p:nvSpPr>
-        <p:spPr>
-          <a:xfrm rot="0">
+          <p:cNvPr id="8" name="TextBox 8"/>
+          <p:cNvSpPr txBox="1"/>
+          <p:nvPr/>
+        </p:nvSpPr>
+        <p:spPr>
+          <a:xfrm>
             <a:off x="1162345" y="1054741"/>
             <a:ext cx="3188789" cy="429520"/>
           </a:xfrm>
@@ -9779,7 +9770,7 @@
           </a:prstGeom>
         </p:spPr>
         <p:txBody>
-          <a:bodyPr anchor="t" rtlCol="false" tIns="0" lIns="0" bIns="0" rIns="0">
+          <a:bodyPr lIns="0" tIns="0" rIns="0" bIns="0" rtlCol="0" anchor="t">
             <a:spAutoFit/>
           </a:bodyPr>
           <a:lstStyle/>
@@ -9806,12 +9797,12 @@
       </p:sp>
       <p:sp>
         <p:nvSpPr>
-          <p:cNvPr name="TextBox 9" id="9"/>
-          <p:cNvSpPr txBox="true"/>
-          <p:nvPr/>
-        </p:nvSpPr>
-        <p:spPr>
-          <a:xfrm rot="0">
+          <p:cNvPr id="9" name="TextBox 9"/>
+          <p:cNvSpPr txBox="1"/>
+          <p:nvPr/>
+        </p:nvSpPr>
+        <p:spPr>
+          <a:xfrm>
             <a:off x="992238" y="1663598"/>
             <a:ext cx="16303523" cy="905027"/>
           </a:xfrm>
@@ -9820,7 +9811,7 @@
           </a:prstGeom>
         </p:spPr>
         <p:txBody>
-          <a:bodyPr anchor="t" rtlCol="false" tIns="0" lIns="0" bIns="0" rIns="0">
+          <a:bodyPr lIns="0" tIns="0" rIns="0" bIns="0" rtlCol="0" anchor="t">
             <a:spAutoFit/>
           </a:bodyPr>
           <a:lstStyle/>
@@ -9831,7 +9822,7 @@
               </a:lnSpc>
             </a:pPr>
             <a:r>
-              <a:rPr lang="en-US" sz="5500" b="true">
+              <a:rPr lang="en-US" sz="5500" b="1">
                 <a:solidFill>
                   <a:srgbClr val="000000"/>
                 </a:solidFill>
@@ -9847,12 +9838,12 @@
       </p:sp>
       <p:sp>
         <p:nvSpPr>
-          <p:cNvPr name="TextBox 10" id="10"/>
-          <p:cNvSpPr txBox="true"/>
-          <p:nvPr/>
-        </p:nvSpPr>
-        <p:spPr>
-          <a:xfrm rot="0">
+          <p:cNvPr id="10" name="TextBox 10"/>
+          <p:cNvSpPr txBox="1"/>
+          <p:nvPr/>
+        </p:nvSpPr>
+        <p:spPr>
+          <a:xfrm>
             <a:off x="992238" y="3267818"/>
             <a:ext cx="7805890" cy="452437"/>
           </a:xfrm>
@@ -9861,7 +9852,7 @@
           </a:prstGeom>
         </p:spPr>
         <p:txBody>
-          <a:bodyPr anchor="t" rtlCol="false" tIns="0" lIns="0" bIns="0" rIns="0">
+          <a:bodyPr lIns="0" tIns="0" rIns="0" bIns="0" rtlCol="0" anchor="t">
             <a:spAutoFit/>
           </a:bodyPr>
           <a:lstStyle/>
@@ -9872,7 +9863,7 @@
               </a:lnSpc>
             </a:pPr>
             <a:r>
-              <a:rPr lang="en-US" sz="2700" b="true">
+              <a:rPr lang="en-US" sz="2700" b="1">
                 <a:solidFill>
                   <a:srgbClr val="000000"/>
                 </a:solidFill>
@@ -9888,12 +9879,12 @@
       </p:sp>
       <p:sp>
         <p:nvSpPr>
-          <p:cNvPr name="TextBox 11" id="11"/>
-          <p:cNvSpPr txBox="true"/>
-          <p:nvPr/>
-        </p:nvSpPr>
-        <p:spPr>
-          <a:xfrm rot="0">
+          <p:cNvPr id="11" name="TextBox 11"/>
+          <p:cNvSpPr txBox="1"/>
+          <p:nvPr/>
+        </p:nvSpPr>
+        <p:spPr>
+          <a:xfrm>
             <a:off x="992238" y="3918052"/>
             <a:ext cx="7805890" cy="1900237"/>
           </a:xfrm>
@@ -9902,7 +9893,7 @@
           </a:prstGeom>
         </p:spPr>
         <p:txBody>
-          <a:bodyPr anchor="t" rtlCol="false" tIns="0" lIns="0" bIns="0" rIns="0">
+          <a:bodyPr lIns="0" tIns="0" rIns="0" bIns="0" rtlCol="0" anchor="t">
             <a:spAutoFit/>
           </a:bodyPr>
           <a:lstStyle/>
@@ -9929,12 +9920,12 @@
       </p:sp>
       <p:sp>
         <p:nvSpPr>
-          <p:cNvPr name="TextBox 12" id="12"/>
-          <p:cNvSpPr txBox="true"/>
-          <p:nvPr/>
-        </p:nvSpPr>
-        <p:spPr>
-          <a:xfrm rot="0">
+          <p:cNvPr id="12" name="TextBox 12"/>
+          <p:cNvSpPr txBox="1"/>
+          <p:nvPr/>
+        </p:nvSpPr>
+        <p:spPr>
+          <a:xfrm>
             <a:off x="992238" y="5987653"/>
             <a:ext cx="7805890" cy="1644853"/>
           </a:xfrm>
@@ -9943,12 +9934,12 @@
           </a:prstGeom>
         </p:spPr>
         <p:txBody>
-          <a:bodyPr anchor="t" rtlCol="false" tIns="0" lIns="0" bIns="0" rIns="0">
+          <a:bodyPr lIns="0" tIns="0" rIns="0" bIns="0" rtlCol="0" anchor="t">
             <a:spAutoFit/>
           </a:bodyPr>
           <a:lstStyle/>
           <a:p>
-            <a:pPr algn="l" marL="530860" indent="-265430" lvl="1">
+            <a:pPr marL="530860" lvl="1" indent="-265430" algn="l">
               <a:lnSpc>
                 <a:spcPts val="3511"/>
               </a:lnSpc>
@@ -9956,7 +9947,7 @@
               <a:buChar char="•"/>
             </a:pPr>
             <a:r>
-              <a:rPr lang="en-US" b="true" sz="2200">
+              <a:rPr lang="en-US" sz="2200" b="1">
                 <a:solidFill>
                   <a:srgbClr val="272525"/>
                 </a:solidFill>
@@ -9981,7 +9972,7 @@
             </a:r>
           </a:p>
           <a:p>
-            <a:pPr algn="l" marL="530860" indent="-265430" lvl="1">
+            <a:pPr marL="530860" lvl="1" indent="-265430" algn="l">
               <a:lnSpc>
                 <a:spcPts val="3511"/>
               </a:lnSpc>
@@ -9989,7 +9980,7 @@
               <a:buChar char="•"/>
             </a:pPr>
             <a:r>
-              <a:rPr lang="en-US" b="true" sz="2200">
+              <a:rPr lang="en-US" sz="2200" b="1">
                 <a:solidFill>
                   <a:srgbClr val="272525"/>
                 </a:solidFill>
@@ -10014,7 +10005,7 @@
             </a:r>
           </a:p>
           <a:p>
-            <a:pPr algn="l" marL="530860" indent="-265430" lvl="1">
+            <a:pPr marL="530860" lvl="1" indent="-265430" algn="l">
               <a:lnSpc>
                 <a:spcPts val="3511"/>
               </a:lnSpc>
@@ -10022,7 +10013,7 @@
               <a:buChar char="•"/>
             </a:pPr>
             <a:r>
-              <a:rPr lang="en-US" b="true" sz="2200">
+              <a:rPr lang="en-US" sz="2200" b="1">
                 <a:solidFill>
                   <a:srgbClr val="272525"/>
                 </a:solidFill>
@@ -10050,12 +10041,12 @@
       </p:sp>
       <p:sp>
         <p:nvSpPr>
-          <p:cNvPr name="TextBox 13" id="13"/>
-          <p:cNvSpPr txBox="true"/>
-          <p:nvPr/>
-        </p:nvSpPr>
-        <p:spPr>
-          <a:xfrm rot="0">
+          <p:cNvPr id="13" name="TextBox 13"/>
+          <p:cNvSpPr txBox="1"/>
+          <p:nvPr/>
+        </p:nvSpPr>
+        <p:spPr>
+          <a:xfrm>
             <a:off x="992238" y="7801870"/>
             <a:ext cx="7805890" cy="992981"/>
           </a:xfrm>
@@ -10064,7 +10055,7 @@
           </a:prstGeom>
         </p:spPr>
         <p:txBody>
-          <a:bodyPr anchor="t" rtlCol="false" tIns="0" lIns="0" bIns="0" rIns="0">
+          <a:bodyPr lIns="0" tIns="0" rIns="0" bIns="0" rtlCol="0" anchor="t">
             <a:spAutoFit/>
           </a:bodyPr>
           <a:lstStyle/>
@@ -10091,12 +10082,12 @@
       </p:sp>
       <p:grpSp>
         <p:nvGrpSpPr>
-          <p:cNvPr name="Group 14" id="14"/>
+          <p:cNvPr id="14" name="Group 14"/>
           <p:cNvGrpSpPr/>
           <p:nvPr/>
         </p:nvGrpSpPr>
         <p:grpSpPr>
-          <a:xfrm rot="0">
+          <a:xfrm>
             <a:off x="9499406" y="3312766"/>
             <a:ext cx="7805890" cy="5618712"/>
             <a:chOff x="0" y="0"/>
@@ -10105,12 +10096,12 @@
         </p:grpSpPr>
         <p:sp>
           <p:nvSpPr>
-            <p:cNvPr name="Freeform 15" id="15" descr="preencoded.png"/>
+            <p:cNvPr id="15" name="Freeform 15" descr="preencoded.png"/>
             <p:cNvSpPr/>
             <p:nvPr/>
           </p:nvSpPr>
           <p:spPr>
-            <a:xfrm flipH="false" flipV="false" rot="0">
+            <a:xfrm>
               <a:off x="0" y="0"/>
               <a:ext cx="10407904" cy="7491603"/>
             </a:xfrm>
@@ -10119,9 +10110,9 @@
               <a:gdLst/>
               <a:ahLst/>
               <a:cxnLst/>
-              <a:rect r="r" b="b" t="t" l="l"/>
+              <a:rect l="l" t="t" r="r" b="b"/>
               <a:pathLst>
-                <a:path h="7491603" w="10407904">
+                <a:path w="10407904" h="7491603">
                   <a:moveTo>
                     <a:pt x="0" y="0"/>
                   </a:moveTo>
@@ -10144,7 +10135,7 @@
             <a:blipFill>
               <a:blip r:embed="rId3"/>
               <a:stretch>
-                <a:fillRect l="-20" t="0" r="-19" b="0"/>
+                <a:fillRect l="-20" r="-19"/>
               </a:stretch>
             </a:blipFill>
           </p:spPr>
@@ -10159,7 +10150,7 @@
 </file>
 
 <file path=ppt/slides/slide6.xml><?xml version="1.0" encoding="utf-8"?>
-<p:sld xmlns:p="http://schemas.openxmlformats.org/presentationml/2006/main" xmlns:a="http://schemas.openxmlformats.org/drawingml/2006/main" xmlns:r="http://schemas.openxmlformats.org/officeDocument/2006/relationships">
+<p:sld xmlns:a="http://schemas.openxmlformats.org/drawingml/2006/main" xmlns:r="http://schemas.openxmlformats.org/officeDocument/2006/relationships" xmlns:p="http://schemas.openxmlformats.org/presentationml/2006/main">
   <p:cSld>
     <p:spTree>
       <p:nvGrpSpPr>
@@ -10177,12 +10168,12 @@
       </p:grpSpPr>
       <p:grpSp>
         <p:nvGrpSpPr>
-          <p:cNvPr name="Group 2" id="2"/>
+          <p:cNvPr id="2" name="Group 2"/>
           <p:cNvGrpSpPr/>
           <p:nvPr/>
         </p:nvGrpSpPr>
         <p:grpSpPr>
-          <a:xfrm rot="0">
+          <a:xfrm>
             <a:off x="0" y="0"/>
             <a:ext cx="18288000" cy="10287000"/>
             <a:chOff x="0" y="0"/>
@@ -10191,12 +10182,12 @@
         </p:grpSpPr>
         <p:sp>
           <p:nvSpPr>
-            <p:cNvPr name="Freeform 3" id="3"/>
+            <p:cNvPr id="3" name="Freeform 3"/>
             <p:cNvSpPr/>
             <p:nvPr/>
           </p:nvSpPr>
           <p:spPr>
-            <a:xfrm flipH="false" flipV="false" rot="0">
+            <a:xfrm>
               <a:off x="0" y="0"/>
               <a:ext cx="24384000" cy="13716000"/>
             </a:xfrm>
@@ -10205,9 +10196,9 @@
               <a:gdLst/>
               <a:ahLst/>
               <a:cxnLst/>
-              <a:rect r="r" b="b" t="t" l="l"/>
+              <a:rect l="l" t="t" r="r" b="b"/>
               <a:pathLst>
-                <a:path h="13716000" w="24384000">
+                <a:path w="24384000" h="13716000">
                   <a:moveTo>
                     <a:pt x="0" y="0"/>
                   </a:moveTo>
@@ -10232,12 +10223,12 @@
       </p:grpSp>
       <p:grpSp>
         <p:nvGrpSpPr>
-          <p:cNvPr name="Group 4" id="4"/>
+          <p:cNvPr id="4" name="Group 4"/>
           <p:cNvGrpSpPr/>
           <p:nvPr/>
         </p:nvGrpSpPr>
         <p:grpSpPr>
-          <a:xfrm rot="0">
+          <a:xfrm>
             <a:off x="0" y="0"/>
             <a:ext cx="18288000" cy="10287000"/>
             <a:chOff x="0" y="0"/>
@@ -10246,12 +10237,12 @@
         </p:grpSpPr>
         <p:sp>
           <p:nvSpPr>
-            <p:cNvPr name="Freeform 5" id="5"/>
+            <p:cNvPr id="5" name="Freeform 5"/>
             <p:cNvSpPr/>
             <p:nvPr/>
           </p:nvSpPr>
           <p:spPr>
-            <a:xfrm flipH="false" flipV="false" rot="0">
+            <a:xfrm>
               <a:off x="0" y="0"/>
               <a:ext cx="24384000" cy="13716000"/>
             </a:xfrm>
@@ -10260,9 +10251,9 @@
               <a:gdLst/>
               <a:ahLst/>
               <a:cxnLst/>
-              <a:rect r="r" b="b" t="t" l="l"/>
+              <a:rect l="l" t="t" r="r" b="b"/>
               <a:pathLst>
-                <a:path h="13716000" w="24384000">
+                <a:path w="24384000" h="13716000">
                   <a:moveTo>
                     <a:pt x="0" y="0"/>
                   </a:moveTo>
@@ -10287,12 +10278,12 @@
       </p:grpSp>
       <p:grpSp>
         <p:nvGrpSpPr>
-          <p:cNvPr name="Group 6" id="6"/>
+          <p:cNvPr id="6" name="Group 6"/>
           <p:cNvGrpSpPr/>
           <p:nvPr/>
         </p:nvGrpSpPr>
         <p:grpSpPr>
-          <a:xfrm rot="0">
+          <a:xfrm>
             <a:off x="16058359" y="9688982"/>
             <a:ext cx="2143687" cy="512064"/>
             <a:chOff x="0" y="0"/>
@@ -10301,14 +10292,14 @@
         </p:grpSpPr>
         <p:sp>
           <p:nvSpPr>
-            <p:cNvPr name="Freeform 7" id="7" descr="preencoded.png">
+            <p:cNvPr id="7" name="Freeform 7" descr="preencoded.png">
               <a:hlinkClick r:id="rId3" tooltip="https://gamma.app/?utm_source=made-with-gamma"/>
             </p:cNvPr>
             <p:cNvSpPr/>
             <p:nvPr/>
           </p:nvSpPr>
           <p:spPr>
-            <a:xfrm flipH="false" flipV="false" rot="0">
+            <a:xfrm>
               <a:off x="0" y="0"/>
               <a:ext cx="2858262" cy="682752"/>
             </a:xfrm>
@@ -10317,9 +10308,9 @@
               <a:gdLst/>
               <a:ahLst/>
               <a:cxnLst/>
-              <a:rect r="r" b="b" t="t" l="l"/>
+              <a:rect l="l" t="t" r="r" b="b"/>
               <a:pathLst>
-                <a:path h="682752" w="2858262">
+                <a:path w="2858262" h="682752">
                   <a:moveTo>
                     <a:pt x="0" y="0"/>
                   </a:moveTo>
@@ -10342,7 +10333,7 @@
             <a:blipFill>
               <a:blip r:embed="rId4"/>
               <a:stretch>
-                <a:fillRect l="0" t="0" r="0" b="0"/>
+                <a:fillRect/>
               </a:stretch>
             </a:blipFill>
           </p:spPr>
@@ -10350,12 +10341,12 @@
       </p:grpSp>
       <p:grpSp>
         <p:nvGrpSpPr>
-          <p:cNvPr name="Group 8" id="8"/>
+          <p:cNvPr id="8" name="Group 8"/>
           <p:cNvGrpSpPr/>
           <p:nvPr/>
         </p:nvGrpSpPr>
         <p:grpSpPr>
-          <a:xfrm rot="0">
+          <a:xfrm>
             <a:off x="11430000" y="0"/>
             <a:ext cx="6858000" cy="10287000"/>
             <a:chOff x="0" y="0"/>
@@ -10364,12 +10355,12 @@
         </p:grpSpPr>
         <p:sp>
           <p:nvSpPr>
-            <p:cNvPr name="Freeform 9" id="9" descr="preencoded.png"/>
+            <p:cNvPr id="9" name="Freeform 9" descr="preencoded.png"/>
             <p:cNvSpPr/>
             <p:nvPr/>
           </p:nvSpPr>
           <p:spPr>
-            <a:xfrm flipH="false" flipV="false" rot="0">
+            <a:xfrm>
               <a:off x="0" y="0"/>
               <a:ext cx="9144000" cy="13716000"/>
             </a:xfrm>
@@ -10378,9 +10369,9 @@
               <a:gdLst/>
               <a:ahLst/>
               <a:cxnLst/>
-              <a:rect r="r" b="b" t="t" l="l"/>
+              <a:rect l="l" t="t" r="r" b="b"/>
               <a:pathLst>
-                <a:path h="13716000" w="9144000">
+                <a:path w="9144000" h="13716000">
                   <a:moveTo>
                     <a:pt x="0" y="0"/>
                   </a:moveTo>
@@ -10403,7 +10394,7 @@
             <a:blipFill>
               <a:blip r:embed="rId5"/>
               <a:stretch>
-                <a:fillRect l="0" t="0" r="0" b="0"/>
+                <a:fillRect/>
               </a:stretch>
             </a:blipFill>
           </p:spPr>
@@ -10411,12 +10402,12 @@
       </p:grpSp>
       <p:grpSp>
         <p:nvGrpSpPr>
-          <p:cNvPr name="Group 10" id="10"/>
+          <p:cNvPr id="10" name="Group 10"/>
           <p:cNvGrpSpPr/>
           <p:nvPr/>
         </p:nvGrpSpPr>
         <p:grpSpPr>
-          <a:xfrm rot="0">
+          <a:xfrm>
             <a:off x="992238" y="1061742"/>
             <a:ext cx="2492578" cy="499767"/>
             <a:chOff x="0" y="0"/>
@@ -10425,12 +10416,12 @@
         </p:grpSpPr>
         <p:sp>
           <p:nvSpPr>
-            <p:cNvPr name="Freeform 11" id="11"/>
+            <p:cNvPr id="11" name="Freeform 11"/>
             <p:cNvSpPr/>
             <p:nvPr/>
           </p:nvSpPr>
           <p:spPr>
-            <a:xfrm flipH="false" flipV="false" rot="0">
+            <a:xfrm>
               <a:off x="0" y="0"/>
               <a:ext cx="3323336" cy="666242"/>
             </a:xfrm>
@@ -10439,9 +10430,9 @@
               <a:gdLst/>
               <a:ahLst/>
               <a:cxnLst/>
-              <a:rect r="r" b="b" t="t" l="l"/>
+              <a:rect l="l" t="t" r="r" b="b"/>
               <a:pathLst>
-                <a:path h="666242" w="3323336">
+                <a:path w="3323336" h="666242">
                   <a:moveTo>
                     <a:pt x="0" y="121031"/>
                   </a:moveTo>
@@ -10486,12 +10477,12 @@
       </p:grpSp>
       <p:sp>
         <p:nvSpPr>
-          <p:cNvPr name="TextBox 12" id="12"/>
-          <p:cNvSpPr txBox="true"/>
-          <p:nvPr/>
-        </p:nvSpPr>
-        <p:spPr>
-          <a:xfrm rot="0">
+          <p:cNvPr id="12" name="TextBox 12"/>
+          <p:cNvSpPr txBox="1"/>
+          <p:nvPr/>
+        </p:nvSpPr>
+        <p:spPr>
+          <a:xfrm>
             <a:off x="1154306" y="1085555"/>
             <a:ext cx="3082823" cy="394992"/>
           </a:xfrm>
@@ -10500,7 +10491,7 @@
           </a:prstGeom>
         </p:spPr>
         <p:txBody>
-          <a:bodyPr anchor="t" rtlCol="false" tIns="0" lIns="0" bIns="0" rIns="0">
+          <a:bodyPr lIns="0" tIns="0" rIns="0" bIns="0" rtlCol="0" anchor="t">
             <a:spAutoFit/>
           </a:bodyPr>
           <a:lstStyle/>
@@ -10527,12 +10518,12 @@
       </p:sp>
       <p:sp>
         <p:nvSpPr>
-          <p:cNvPr name="TextBox 13" id="13"/>
-          <p:cNvSpPr txBox="true"/>
-          <p:nvPr/>
-        </p:nvSpPr>
-        <p:spPr>
-          <a:xfrm rot="0">
+          <p:cNvPr id="13" name="TextBox 13"/>
+          <p:cNvSpPr txBox="1"/>
+          <p:nvPr/>
+        </p:nvSpPr>
+        <p:spPr>
+          <a:xfrm>
             <a:off x="992238" y="1635919"/>
             <a:ext cx="9445523" cy="1717777"/>
           </a:xfrm>
@@ -10541,7 +10532,7 @@
           </a:prstGeom>
         </p:spPr>
         <p:txBody>
-          <a:bodyPr anchor="t" rtlCol="false" tIns="0" lIns="0" bIns="0" rIns="0">
+          <a:bodyPr lIns="0" tIns="0" rIns="0" bIns="0" rtlCol="0" anchor="t">
             <a:spAutoFit/>
           </a:bodyPr>
           <a:lstStyle/>
@@ -10552,7 +10543,7 @@
               </a:lnSpc>
             </a:pPr>
             <a:r>
-              <a:rPr lang="en-US" sz="5299" b="true">
+              <a:rPr lang="en-US" sz="5299" b="1">
                 <a:solidFill>
                   <a:srgbClr val="000000"/>
                 </a:solidFill>
@@ -10568,12 +10559,12 @@
       </p:sp>
       <p:grpSp>
         <p:nvGrpSpPr>
-          <p:cNvPr name="Group 14" id="14"/>
+          <p:cNvPr id="14" name="Group 14"/>
           <p:cNvGrpSpPr/>
           <p:nvPr/>
         </p:nvGrpSpPr>
         <p:grpSpPr>
-          <a:xfrm rot="0">
+          <a:xfrm>
             <a:off x="987476" y="3735286"/>
             <a:ext cx="4603556" cy="3256655"/>
             <a:chOff x="0" y="0"/>
@@ -10582,12 +10573,12 @@
         </p:grpSpPr>
         <p:sp>
           <p:nvSpPr>
-            <p:cNvPr name="Freeform 15" id="15"/>
+            <p:cNvPr id="15" name="Freeform 15"/>
             <p:cNvSpPr/>
             <p:nvPr/>
           </p:nvSpPr>
           <p:spPr>
-            <a:xfrm flipH="false" flipV="false" rot="0">
+            <a:xfrm>
               <a:off x="0" y="0"/>
               <a:ext cx="6138037" cy="4342257"/>
             </a:xfrm>
@@ -10596,9 +10587,9 @@
               <a:gdLst/>
               <a:ahLst/>
               <a:cxnLst/>
-              <a:rect r="r" b="b" t="t" l="l"/>
+              <a:rect l="l" t="t" r="r" b="b"/>
               <a:pathLst>
-                <a:path h="4342257" w="6138037">
+                <a:path w="6138037" h="4342257">
                   <a:moveTo>
                     <a:pt x="0" y="151765"/>
                   </a:moveTo>
@@ -10650,12 +10641,12 @@
       </p:grpSp>
       <p:sp>
         <p:nvSpPr>
-          <p:cNvPr name="TextBox 16" id="16"/>
-          <p:cNvSpPr txBox="true"/>
-          <p:nvPr/>
-        </p:nvSpPr>
-        <p:spPr>
-          <a:xfrm rot="0">
+          <p:cNvPr id="16" name="TextBox 16"/>
+          <p:cNvSpPr txBox="1"/>
+          <p:nvPr/>
+        </p:nvSpPr>
+        <p:spPr>
+          <a:xfrm>
             <a:off x="1271883" y="4010177"/>
             <a:ext cx="4034733" cy="431749"/>
           </a:xfrm>
@@ -10664,7 +10655,7 @@
           </a:prstGeom>
         </p:spPr>
         <p:txBody>
-          <a:bodyPr anchor="t" rtlCol="false" tIns="0" lIns="0" bIns="0" rIns="0">
+          <a:bodyPr lIns="0" tIns="0" rIns="0" bIns="0" rtlCol="0" anchor="t">
             <a:spAutoFit/>
           </a:bodyPr>
           <a:lstStyle/>
@@ -10675,7 +10666,7 @@
               </a:lnSpc>
             </a:pPr>
             <a:r>
-              <a:rPr lang="en-US" sz="2600" b="true">
+              <a:rPr lang="en-US" sz="2600" b="1">
                 <a:solidFill>
                   <a:srgbClr val="272525"/>
                 </a:solidFill>
@@ -10691,12 +10682,12 @@
       </p:sp>
       <p:sp>
         <p:nvSpPr>
-          <p:cNvPr name="TextBox 17" id="17"/>
-          <p:cNvSpPr txBox="true"/>
-          <p:nvPr/>
-        </p:nvSpPr>
-        <p:spPr>
-          <a:xfrm rot="0">
+          <p:cNvPr id="17" name="TextBox 17"/>
+          <p:cNvSpPr txBox="1"/>
+          <p:nvPr/>
+        </p:nvSpPr>
+        <p:spPr>
+          <a:xfrm>
             <a:off x="1271883" y="4529738"/>
             <a:ext cx="4034733" cy="2177806"/>
           </a:xfrm>
@@ -10705,7 +10696,7 @@
           </a:prstGeom>
         </p:spPr>
         <p:txBody>
-          <a:bodyPr anchor="t" rtlCol="false" tIns="0" lIns="0" bIns="0" rIns="0">
+          <a:bodyPr lIns="0" tIns="0" rIns="0" bIns="0" rtlCol="0" anchor="t">
             <a:spAutoFit/>
           </a:bodyPr>
           <a:lstStyle/>
@@ -10732,12 +10723,12 @@
       </p:sp>
       <p:grpSp>
         <p:nvGrpSpPr>
-          <p:cNvPr name="Group 18" id="18"/>
+          <p:cNvPr id="18" name="Group 18"/>
           <p:cNvGrpSpPr/>
           <p:nvPr/>
         </p:nvGrpSpPr>
         <p:grpSpPr>
-          <a:xfrm rot="0">
+          <a:xfrm>
             <a:off x="5838977" y="3735286"/>
             <a:ext cx="4603556" cy="3256655"/>
             <a:chOff x="0" y="0"/>
@@ -10746,12 +10737,12 @@
         </p:grpSpPr>
         <p:sp>
           <p:nvSpPr>
-            <p:cNvPr name="Freeform 19" id="19"/>
+            <p:cNvPr id="19" name="Freeform 19"/>
             <p:cNvSpPr/>
             <p:nvPr/>
           </p:nvSpPr>
           <p:spPr>
-            <a:xfrm flipH="false" flipV="false" rot="0">
+            <a:xfrm>
               <a:off x="0" y="0"/>
               <a:ext cx="6138037" cy="4342257"/>
             </a:xfrm>
@@ -10760,9 +10751,9 @@
               <a:gdLst/>
               <a:ahLst/>
               <a:cxnLst/>
-              <a:rect r="r" b="b" t="t" l="l"/>
+              <a:rect l="l" t="t" r="r" b="b"/>
               <a:pathLst>
-                <a:path h="4342257" w="6138037">
+                <a:path w="6138037" h="4342257">
                   <a:moveTo>
                     <a:pt x="0" y="151765"/>
                   </a:moveTo>
@@ -10814,12 +10805,12 @@
       </p:grpSp>
       <p:sp>
         <p:nvSpPr>
-          <p:cNvPr name="TextBox 20" id="20"/>
-          <p:cNvSpPr txBox="true"/>
-          <p:nvPr/>
-        </p:nvSpPr>
-        <p:spPr>
-          <a:xfrm rot="0">
+          <p:cNvPr id="20" name="TextBox 20"/>
+          <p:cNvSpPr txBox="1"/>
+          <p:nvPr/>
+        </p:nvSpPr>
+        <p:spPr>
+          <a:xfrm>
             <a:off x="6123384" y="4010177"/>
             <a:ext cx="4034733" cy="431749"/>
           </a:xfrm>
@@ -10828,7 +10819,7 @@
           </a:prstGeom>
         </p:spPr>
         <p:txBody>
-          <a:bodyPr anchor="t" rtlCol="false" tIns="0" lIns="0" bIns="0" rIns="0">
+          <a:bodyPr lIns="0" tIns="0" rIns="0" bIns="0" rtlCol="0" anchor="t">
             <a:spAutoFit/>
           </a:bodyPr>
           <a:lstStyle/>
@@ -10839,7 +10830,7 @@
               </a:lnSpc>
             </a:pPr>
             <a:r>
-              <a:rPr lang="en-US" sz="2600" b="true">
+              <a:rPr lang="en-US" sz="2600" b="1">
                 <a:solidFill>
                   <a:srgbClr val="272525"/>
                 </a:solidFill>
@@ -10855,12 +10846,12 @@
       </p:sp>
       <p:sp>
         <p:nvSpPr>
-          <p:cNvPr name="TextBox 21" id="21"/>
-          <p:cNvSpPr txBox="true"/>
-          <p:nvPr/>
-        </p:nvSpPr>
-        <p:spPr>
-          <a:xfrm rot="0">
+          <p:cNvPr id="21" name="TextBox 21"/>
+          <p:cNvSpPr txBox="1"/>
+          <p:nvPr/>
+        </p:nvSpPr>
+        <p:spPr>
+          <a:xfrm>
             <a:off x="6123384" y="4529738"/>
             <a:ext cx="4034733" cy="1755581"/>
           </a:xfrm>
@@ -10869,7 +10860,7 @@
           </a:prstGeom>
         </p:spPr>
         <p:txBody>
-          <a:bodyPr anchor="t" rtlCol="false" tIns="0" lIns="0" bIns="0" rIns="0">
+          <a:bodyPr lIns="0" tIns="0" rIns="0" bIns="0" rtlCol="0" anchor="t">
             <a:spAutoFit/>
           </a:bodyPr>
           <a:lstStyle/>
@@ -10896,12 +10887,12 @@
       </p:sp>
       <p:grpSp>
         <p:nvGrpSpPr>
-          <p:cNvPr name="Group 22" id="22"/>
+          <p:cNvPr id="22" name="Group 22"/>
           <p:cNvGrpSpPr/>
           <p:nvPr/>
         </p:nvGrpSpPr>
         <p:grpSpPr>
-          <a:xfrm rot="0">
+          <a:xfrm>
             <a:off x="987476" y="7239895"/>
             <a:ext cx="9455048" cy="1989982"/>
             <a:chOff x="0" y="0"/>
@@ -10910,12 +10901,12 @@
         </p:grpSpPr>
         <p:sp>
           <p:nvSpPr>
-            <p:cNvPr name="Freeform 23" id="23"/>
+            <p:cNvPr id="23" name="Freeform 23"/>
             <p:cNvSpPr/>
             <p:nvPr/>
           </p:nvSpPr>
           <p:spPr>
-            <a:xfrm flipH="false" flipV="false" rot="0">
+            <a:xfrm>
               <a:off x="0" y="0"/>
               <a:ext cx="12606655" cy="2653284"/>
             </a:xfrm>
@@ -10924,9 +10915,9 @@
               <a:gdLst/>
               <a:ahLst/>
               <a:cxnLst/>
-              <a:rect r="r" b="b" t="t" l="l"/>
+              <a:rect l="l" t="t" r="r" b="b"/>
               <a:pathLst>
-                <a:path h="2653284" w="12606655">
+                <a:path w="12606655" h="2653284">
                   <a:moveTo>
                     <a:pt x="0" y="152019"/>
                   </a:moveTo>
@@ -10978,12 +10969,12 @@
       </p:grpSp>
       <p:sp>
         <p:nvSpPr>
-          <p:cNvPr name="TextBox 24" id="24"/>
-          <p:cNvSpPr txBox="true"/>
-          <p:nvPr/>
-        </p:nvSpPr>
-        <p:spPr>
-          <a:xfrm rot="0">
+          <p:cNvPr id="24" name="TextBox 24"/>
+          <p:cNvSpPr txBox="1"/>
+          <p:nvPr/>
+        </p:nvSpPr>
+        <p:spPr>
+          <a:xfrm>
             <a:off x="1271883" y="7514777"/>
             <a:ext cx="8886234" cy="431749"/>
           </a:xfrm>
@@ -10992,7 +10983,7 @@
           </a:prstGeom>
         </p:spPr>
         <p:txBody>
-          <a:bodyPr anchor="t" rtlCol="false" tIns="0" lIns="0" bIns="0" rIns="0">
+          <a:bodyPr lIns="0" tIns="0" rIns="0" bIns="0" rtlCol="0" anchor="t">
             <a:spAutoFit/>
           </a:bodyPr>
           <a:lstStyle/>
@@ -11003,7 +10994,7 @@
               </a:lnSpc>
             </a:pPr>
             <a:r>
-              <a:rPr lang="en-US" sz="2600" b="true">
+              <a:rPr lang="en-US" sz="2600" b="1">
                 <a:solidFill>
                   <a:srgbClr val="272525"/>
                 </a:solidFill>
@@ -11019,12 +11010,12 @@
       </p:sp>
       <p:sp>
         <p:nvSpPr>
-          <p:cNvPr name="TextBox 25" id="25"/>
-          <p:cNvSpPr txBox="true"/>
-          <p:nvPr/>
-        </p:nvSpPr>
-        <p:spPr>
-          <a:xfrm rot="0">
+          <p:cNvPr id="25" name="TextBox 25"/>
+          <p:cNvSpPr txBox="1"/>
+          <p:nvPr/>
+        </p:nvSpPr>
+        <p:spPr>
+          <a:xfrm>
             <a:off x="1271883" y="8034337"/>
             <a:ext cx="8886234" cy="911123"/>
           </a:xfrm>
@@ -11033,7 +11024,7 @@
           </a:prstGeom>
         </p:spPr>
         <p:txBody>
-          <a:bodyPr anchor="t" rtlCol="false" tIns="0" lIns="0" bIns="0" rIns="0">
+          <a:bodyPr lIns="0" tIns="0" rIns="0" bIns="0" rtlCol="0" anchor="t">
             <a:spAutoFit/>
           </a:bodyPr>
           <a:lstStyle/>
@@ -11067,7 +11058,7 @@
 </file>
 
 <file path=ppt/slides/slide7.xml><?xml version="1.0" encoding="utf-8"?>
-<p:sld xmlns:p="http://schemas.openxmlformats.org/presentationml/2006/main" xmlns:a="http://schemas.openxmlformats.org/drawingml/2006/main" xmlns:r="http://schemas.openxmlformats.org/officeDocument/2006/relationships">
+<p:sld xmlns:a="http://schemas.openxmlformats.org/drawingml/2006/main" xmlns:r="http://schemas.openxmlformats.org/officeDocument/2006/relationships" xmlns:p="http://schemas.openxmlformats.org/presentationml/2006/main">
   <p:cSld>
     <p:spTree>
       <p:nvGrpSpPr>
@@ -11085,12 +11076,12 @@
       </p:grpSpPr>
       <p:grpSp>
         <p:nvGrpSpPr>
-          <p:cNvPr name="Group 2" id="2"/>
+          <p:cNvPr id="2" name="Group 2"/>
           <p:cNvGrpSpPr/>
           <p:nvPr/>
         </p:nvGrpSpPr>
         <p:grpSpPr>
-          <a:xfrm rot="0">
+          <a:xfrm>
             <a:off x="0" y="0"/>
             <a:ext cx="18288000" cy="10287000"/>
             <a:chOff x="0" y="0"/>
@@ -11099,12 +11090,12 @@
         </p:grpSpPr>
         <p:sp>
           <p:nvSpPr>
-            <p:cNvPr name="Freeform 3" id="3"/>
+            <p:cNvPr id="3" name="Freeform 3"/>
             <p:cNvSpPr/>
             <p:nvPr/>
           </p:nvSpPr>
           <p:spPr>
-            <a:xfrm flipH="false" flipV="false" rot="0">
+            <a:xfrm>
               <a:off x="0" y="0"/>
               <a:ext cx="24384000" cy="13716000"/>
             </a:xfrm>
@@ -11113,9 +11104,9 @@
               <a:gdLst/>
               <a:ahLst/>
               <a:cxnLst/>
-              <a:rect r="r" b="b" t="t" l="l"/>
+              <a:rect l="l" t="t" r="r" b="b"/>
               <a:pathLst>
-                <a:path h="13716000" w="24384000">
+                <a:path w="24384000" h="13716000">
                   <a:moveTo>
                     <a:pt x="0" y="0"/>
                   </a:moveTo>
@@ -11140,12 +11131,12 @@
       </p:grpSp>
       <p:grpSp>
         <p:nvGrpSpPr>
-          <p:cNvPr name="Group 4" id="4"/>
+          <p:cNvPr id="4" name="Group 4"/>
           <p:cNvGrpSpPr/>
           <p:nvPr/>
         </p:nvGrpSpPr>
         <p:grpSpPr>
-          <a:xfrm rot="0">
+          <a:xfrm>
             <a:off x="0" y="0"/>
             <a:ext cx="18288000" cy="10287000"/>
             <a:chOff x="0" y="0"/>
@@ -11154,12 +11145,12 @@
         </p:grpSpPr>
         <p:sp>
           <p:nvSpPr>
-            <p:cNvPr name="Freeform 5" id="5"/>
+            <p:cNvPr id="5" name="Freeform 5"/>
             <p:cNvSpPr/>
             <p:nvPr/>
           </p:nvSpPr>
           <p:spPr>
-            <a:xfrm flipH="false" flipV="false" rot="0">
+            <a:xfrm>
               <a:off x="0" y="0"/>
               <a:ext cx="24384000" cy="13716000"/>
             </a:xfrm>
@@ -11168,9 +11159,9 @@
               <a:gdLst/>
               <a:ahLst/>
               <a:cxnLst/>
-              <a:rect r="r" b="b" t="t" l="l"/>
+              <a:rect l="l" t="t" r="r" b="b"/>
               <a:pathLst>
-                <a:path h="13716000" w="24384000">
+                <a:path w="24384000" h="13716000">
                   <a:moveTo>
                     <a:pt x="0" y="0"/>
                   </a:moveTo>
@@ -11195,12 +11186,12 @@
       </p:grpSp>
       <p:grpSp>
         <p:nvGrpSpPr>
-          <p:cNvPr name="Group 6" id="6"/>
+          <p:cNvPr id="6" name="Group 6"/>
           <p:cNvGrpSpPr/>
           <p:nvPr/>
         </p:nvGrpSpPr>
         <p:grpSpPr>
-          <a:xfrm rot="0">
+          <a:xfrm>
             <a:off x="992238" y="817512"/>
             <a:ext cx="2614612" cy="532800"/>
             <a:chOff x="0" y="0"/>
@@ -11209,12 +11200,12 @@
         </p:grpSpPr>
         <p:sp>
           <p:nvSpPr>
-            <p:cNvPr name="Freeform 7" id="7"/>
+            <p:cNvPr id="7" name="Freeform 7"/>
             <p:cNvSpPr/>
             <p:nvPr/>
           </p:nvSpPr>
           <p:spPr>
-            <a:xfrm flipH="false" flipV="false" rot="0">
+            <a:xfrm>
               <a:off x="0" y="0"/>
               <a:ext cx="3486150" cy="710438"/>
             </a:xfrm>
@@ -11223,9 +11214,9 @@
               <a:gdLst/>
               <a:ahLst/>
               <a:cxnLst/>
-              <a:rect r="r" b="b" t="t" l="l"/>
+              <a:rect l="l" t="t" r="r" b="b"/>
               <a:pathLst>
-                <a:path h="710438" w="3486150">
+                <a:path w="3486150" h="710438">
                   <a:moveTo>
                     <a:pt x="0" y="127000"/>
                   </a:moveTo>
@@ -11270,12 +11261,12 @@
       </p:grpSp>
       <p:sp>
         <p:nvSpPr>
-          <p:cNvPr name="TextBox 8" id="8"/>
-          <p:cNvSpPr txBox="true"/>
-          <p:nvPr/>
-        </p:nvSpPr>
-        <p:spPr>
-          <a:xfrm rot="0">
+          <p:cNvPr id="8" name="TextBox 8"/>
+          <p:cNvSpPr txBox="1"/>
+          <p:nvPr/>
+        </p:nvSpPr>
+        <p:spPr>
+          <a:xfrm>
             <a:off x="1162345" y="835819"/>
             <a:ext cx="3188789" cy="429520"/>
           </a:xfrm>
@@ -11284,7 +11275,7 @@
           </a:prstGeom>
         </p:spPr>
         <p:txBody>
-          <a:bodyPr anchor="t" rtlCol="false" tIns="0" lIns="0" bIns="0" rIns="0">
+          <a:bodyPr lIns="0" tIns="0" rIns="0" bIns="0" rtlCol="0" anchor="t">
             <a:spAutoFit/>
           </a:bodyPr>
           <a:lstStyle/>
@@ -11311,12 +11302,12 @@
       </p:sp>
       <p:sp>
         <p:nvSpPr>
-          <p:cNvPr name="TextBox 9" id="9"/>
-          <p:cNvSpPr txBox="true"/>
-          <p:nvPr/>
-        </p:nvSpPr>
-        <p:spPr>
-          <a:xfrm rot="0">
+          <p:cNvPr id="9" name="TextBox 9"/>
+          <p:cNvSpPr txBox="1"/>
+          <p:nvPr/>
+        </p:nvSpPr>
+        <p:spPr>
+          <a:xfrm>
             <a:off x="992238" y="1444676"/>
             <a:ext cx="16303523" cy="905027"/>
           </a:xfrm>
@@ -11325,7 +11316,7 @@
           </a:prstGeom>
         </p:spPr>
         <p:txBody>
-          <a:bodyPr anchor="t" rtlCol="false" tIns="0" lIns="0" bIns="0" rIns="0">
+          <a:bodyPr lIns="0" tIns="0" rIns="0" bIns="0" rtlCol="0" anchor="t">
             <a:spAutoFit/>
           </a:bodyPr>
           <a:lstStyle/>
@@ -11336,7 +11327,7 @@
               </a:lnSpc>
             </a:pPr>
             <a:r>
-              <a:rPr lang="en-US" sz="5500" b="true">
+              <a:rPr lang="en-US" sz="5500" b="1">
                 <a:solidFill>
                   <a:srgbClr val="000000"/>
                 </a:solidFill>
@@ -11352,12 +11343,12 @@
       </p:sp>
       <p:sp>
         <p:nvSpPr>
-          <p:cNvPr name="TextBox 10" id="10"/>
-          <p:cNvSpPr txBox="true"/>
-          <p:nvPr/>
-        </p:nvSpPr>
-        <p:spPr>
-          <a:xfrm rot="0">
+          <p:cNvPr id="10" name="TextBox 10"/>
+          <p:cNvSpPr txBox="1"/>
+          <p:nvPr/>
+        </p:nvSpPr>
+        <p:spPr>
+          <a:xfrm>
             <a:off x="992238" y="3048895"/>
             <a:ext cx="7805890" cy="452437"/>
           </a:xfrm>
@@ -11366,7 +11357,7 @@
           </a:prstGeom>
         </p:spPr>
         <p:txBody>
-          <a:bodyPr anchor="t" rtlCol="false" tIns="0" lIns="0" bIns="0" rIns="0">
+          <a:bodyPr lIns="0" tIns="0" rIns="0" bIns="0" rtlCol="0" anchor="t">
             <a:spAutoFit/>
           </a:bodyPr>
           <a:lstStyle/>
@@ -11377,7 +11368,7 @@
               </a:lnSpc>
             </a:pPr>
             <a:r>
-              <a:rPr lang="en-US" sz="2700" b="true">
+              <a:rPr lang="en-US" sz="2700" b="1">
                 <a:solidFill>
                   <a:srgbClr val="000000"/>
                 </a:solidFill>
@@ -11393,12 +11384,12 @@
       </p:sp>
       <p:sp>
         <p:nvSpPr>
-          <p:cNvPr name="Freeform 11" id="11" descr="preencoded.png"/>
+          <p:cNvPr id="11" name="Freeform 11" descr="preencoded.png"/>
           <p:cNvSpPr/>
           <p:nvPr/>
         </p:nvSpPr>
         <p:spPr>
-          <a:xfrm flipH="false" flipV="false" rot="0">
+          <a:xfrm>
             <a:off x="1098499" y="3834413"/>
             <a:ext cx="425206" cy="425206"/>
           </a:xfrm>
@@ -11407,9 +11398,9 @@
             <a:gdLst/>
             <a:ahLst/>
             <a:cxnLst/>
-            <a:rect r="r" b="b" t="t" l="l"/>
+            <a:rect l="l" t="t" r="r" b="b"/>
             <a:pathLst>
-              <a:path h="425206" w="425206">
+              <a:path w="425206" h="425206">
                 <a:moveTo>
                   <a:pt x="0" y="0"/>
                 </a:moveTo>
@@ -11438,19 +11429,19 @@
               </a:extLst>
             </a:blip>
             <a:stretch>
-              <a:fillRect l="-8888" t="0" r="-8888" b="0"/>
+              <a:fillRect l="-8888" r="-8888"/>
             </a:stretch>
           </a:blipFill>
         </p:spPr>
       </p:sp>
       <p:sp>
         <p:nvSpPr>
-          <p:cNvPr name="TextBox 12" id="12"/>
-          <p:cNvSpPr txBox="true"/>
-          <p:nvPr/>
-        </p:nvSpPr>
-        <p:spPr>
-          <a:xfrm rot="0">
+          <p:cNvPr id="12" name="TextBox 12"/>
+          <p:cNvSpPr txBox="1"/>
+          <p:nvPr/>
+        </p:nvSpPr>
+        <p:spPr>
+          <a:xfrm>
             <a:off x="1913630" y="3734543"/>
             <a:ext cx="6884489" cy="992981"/>
           </a:xfrm>
@@ -11459,7 +11450,7 @@
           </a:prstGeom>
         </p:spPr>
         <p:txBody>
-          <a:bodyPr anchor="t" rtlCol="false" tIns="0" lIns="0" bIns="0" rIns="0">
+          <a:bodyPr lIns="0" tIns="0" rIns="0" bIns="0" rtlCol="0" anchor="t">
             <a:spAutoFit/>
           </a:bodyPr>
           <a:lstStyle/>
@@ -11470,7 +11461,7 @@
               </a:lnSpc>
             </a:pPr>
             <a:r>
-              <a:rPr lang="en-US" sz="2200" b="true">
+              <a:rPr lang="en-US" sz="2200" b="1">
                 <a:solidFill>
                   <a:srgbClr val="272525"/>
                 </a:solidFill>
@@ -11498,12 +11489,12 @@
       </p:sp>
       <p:sp>
         <p:nvSpPr>
-          <p:cNvPr name="Freeform 13" id="13" descr="preencoded.png"/>
+          <p:cNvPr id="13" name="Freeform 13" descr="preencoded.png"/>
           <p:cNvSpPr/>
           <p:nvPr/>
         </p:nvSpPr>
         <p:spPr>
-          <a:xfrm flipH="false" flipV="false" rot="0">
+          <a:xfrm>
             <a:off x="1098499" y="5308702"/>
             <a:ext cx="425206" cy="425206"/>
           </a:xfrm>
@@ -11512,9 +11503,9 @@
             <a:gdLst/>
             <a:ahLst/>
             <a:cxnLst/>
-            <a:rect r="r" b="b" t="t" l="l"/>
+            <a:rect l="l" t="t" r="r" b="b"/>
             <a:pathLst>
-              <a:path h="425206" w="425206">
+              <a:path w="425206" h="425206">
                 <a:moveTo>
                   <a:pt x="0" y="0"/>
                 </a:moveTo>
@@ -11543,19 +11534,19 @@
               </a:extLst>
             </a:blip>
             <a:stretch>
-              <a:fillRect l="-8888" t="0" r="-8888" b="0"/>
+              <a:fillRect l="-8888" r="-8888"/>
             </a:stretch>
           </a:blipFill>
         </p:spPr>
       </p:sp>
       <p:sp>
         <p:nvSpPr>
-          <p:cNvPr name="TextBox 14" id="14"/>
-          <p:cNvSpPr txBox="true"/>
-          <p:nvPr/>
-        </p:nvSpPr>
-        <p:spPr>
-          <a:xfrm rot="0">
+          <p:cNvPr id="14" name="TextBox 14"/>
+          <p:cNvSpPr txBox="1"/>
+          <p:nvPr/>
+        </p:nvSpPr>
+        <p:spPr>
+          <a:xfrm>
             <a:off x="1913630" y="5208832"/>
             <a:ext cx="6884489" cy="992981"/>
           </a:xfrm>
@@ -11564,7 +11555,7 @@
           </a:prstGeom>
         </p:spPr>
         <p:txBody>
-          <a:bodyPr anchor="t" rtlCol="false" tIns="0" lIns="0" bIns="0" rIns="0">
+          <a:bodyPr lIns="0" tIns="0" rIns="0" bIns="0" rtlCol="0" anchor="t">
             <a:spAutoFit/>
           </a:bodyPr>
           <a:lstStyle/>
@@ -11575,7 +11566,7 @@
               </a:lnSpc>
             </a:pPr>
             <a:r>
-              <a:rPr lang="en-US" sz="2200" b="true">
+              <a:rPr lang="en-US" sz="2200" b="1">
                 <a:solidFill>
                   <a:srgbClr val="272525"/>
                 </a:solidFill>
@@ -11603,12 +11594,12 @@
       </p:sp>
       <p:sp>
         <p:nvSpPr>
-          <p:cNvPr name="Freeform 15" id="15" descr="preencoded.png"/>
+          <p:cNvPr id="15" name="Freeform 15" descr="preencoded.png"/>
           <p:cNvSpPr/>
           <p:nvPr/>
         </p:nvSpPr>
         <p:spPr>
-          <a:xfrm flipH="false" flipV="false" rot="0">
+          <a:xfrm>
             <a:off x="1098499" y="6782991"/>
             <a:ext cx="425206" cy="425206"/>
           </a:xfrm>
@@ -11617,9 +11608,9 @@
             <a:gdLst/>
             <a:ahLst/>
             <a:cxnLst/>
-            <a:rect r="r" b="b" t="t" l="l"/>
+            <a:rect l="l" t="t" r="r" b="b"/>
             <a:pathLst>
-              <a:path h="425206" w="425206">
+              <a:path w="425206" h="425206">
                 <a:moveTo>
                   <a:pt x="0" y="0"/>
                 </a:moveTo>
@@ -11648,19 +11639,19 @@
               </a:extLst>
             </a:blip>
             <a:stretch>
-              <a:fillRect l="-8888" t="0" r="-8888" b="0"/>
+              <a:fillRect l="-8888" r="-8888"/>
             </a:stretch>
           </a:blipFill>
         </p:spPr>
       </p:sp>
       <p:sp>
         <p:nvSpPr>
-          <p:cNvPr name="TextBox 16" id="16"/>
-          <p:cNvSpPr txBox="true"/>
-          <p:nvPr/>
-        </p:nvSpPr>
-        <p:spPr>
-          <a:xfrm rot="0">
+          <p:cNvPr id="16" name="TextBox 16"/>
+          <p:cNvSpPr txBox="1"/>
+          <p:nvPr/>
+        </p:nvSpPr>
+        <p:spPr>
+          <a:xfrm>
             <a:off x="1913630" y="6683131"/>
             <a:ext cx="6884489" cy="992981"/>
           </a:xfrm>
@@ -11669,7 +11660,7 @@
           </a:prstGeom>
         </p:spPr>
         <p:txBody>
-          <a:bodyPr anchor="t" rtlCol="false" tIns="0" lIns="0" bIns="0" rIns="0">
+          <a:bodyPr lIns="0" tIns="0" rIns="0" bIns="0" rtlCol="0" anchor="t">
             <a:spAutoFit/>
           </a:bodyPr>
           <a:lstStyle/>
@@ -11680,7 +11671,7 @@
               </a:lnSpc>
             </a:pPr>
             <a:r>
-              <a:rPr lang="en-US" sz="2200" b="true">
+              <a:rPr lang="en-US" sz="2200" b="1">
                 <a:solidFill>
                   <a:srgbClr val="272525"/>
                 </a:solidFill>
@@ -11708,12 +11699,12 @@
       </p:sp>
       <p:sp>
         <p:nvSpPr>
-          <p:cNvPr name="Freeform 17" id="17" descr="preencoded.png"/>
+          <p:cNvPr id="17" name="Freeform 17" descr="preencoded.png"/>
           <p:cNvSpPr/>
           <p:nvPr/>
         </p:nvSpPr>
         <p:spPr>
-          <a:xfrm flipH="false" flipV="false" rot="0">
+          <a:xfrm>
             <a:off x="1098499" y="8257280"/>
             <a:ext cx="425206" cy="425206"/>
           </a:xfrm>
@@ -11722,9 +11713,9 @@
             <a:gdLst/>
             <a:ahLst/>
             <a:cxnLst/>
-            <a:rect r="r" b="b" t="t" l="l"/>
+            <a:rect l="l" t="t" r="r" b="b"/>
             <a:pathLst>
-              <a:path h="425206" w="425206">
+              <a:path w="425206" h="425206">
                 <a:moveTo>
                   <a:pt x="0" y="0"/>
                 </a:moveTo>
@@ -11753,19 +11744,19 @@
               </a:extLst>
             </a:blip>
             <a:stretch>
-              <a:fillRect l="-8888" t="0" r="-8888" b="0"/>
+              <a:fillRect l="-8888" r="-8888"/>
             </a:stretch>
           </a:blipFill>
         </p:spPr>
       </p:sp>
       <p:sp>
         <p:nvSpPr>
-          <p:cNvPr name="TextBox 18" id="18"/>
-          <p:cNvSpPr txBox="true"/>
-          <p:nvPr/>
-        </p:nvSpPr>
-        <p:spPr>
-          <a:xfrm rot="0">
+          <p:cNvPr id="18" name="TextBox 18"/>
+          <p:cNvSpPr txBox="1"/>
+          <p:nvPr/>
+        </p:nvSpPr>
+        <p:spPr>
+          <a:xfrm>
             <a:off x="1913630" y="8157420"/>
             <a:ext cx="6884489" cy="992981"/>
           </a:xfrm>
@@ -11774,7 +11765,7 @@
           </a:prstGeom>
         </p:spPr>
         <p:txBody>
-          <a:bodyPr anchor="t" rtlCol="false" tIns="0" lIns="0" bIns="0" rIns="0">
+          <a:bodyPr lIns="0" tIns="0" rIns="0" bIns="0" rtlCol="0" anchor="t">
             <a:spAutoFit/>
           </a:bodyPr>
           <a:lstStyle/>
@@ -11785,7 +11776,7 @@
               </a:lnSpc>
             </a:pPr>
             <a:r>
-              <a:rPr lang="en-US" sz="2200" b="true">
+              <a:rPr lang="en-US" sz="2200" b="1">
                 <a:solidFill>
                   <a:srgbClr val="272525"/>
                 </a:solidFill>
@@ -11813,12 +11804,12 @@
       </p:sp>
       <p:sp>
         <p:nvSpPr>
-          <p:cNvPr name="TextBox 19" id="19"/>
-          <p:cNvSpPr txBox="true"/>
-          <p:nvPr/>
-        </p:nvSpPr>
-        <p:spPr>
-          <a:xfrm rot="0">
+          <p:cNvPr id="19" name="TextBox 19"/>
+          <p:cNvSpPr txBox="1"/>
+          <p:nvPr/>
+        </p:nvSpPr>
+        <p:spPr>
+          <a:xfrm>
             <a:off x="9499406" y="3048895"/>
             <a:ext cx="7805890" cy="452437"/>
           </a:xfrm>
@@ -11827,7 +11818,7 @@
           </a:prstGeom>
         </p:spPr>
         <p:txBody>
-          <a:bodyPr anchor="t" rtlCol="false" tIns="0" lIns="0" bIns="0" rIns="0">
+          <a:bodyPr lIns="0" tIns="0" rIns="0" bIns="0" rtlCol="0" anchor="t">
             <a:spAutoFit/>
           </a:bodyPr>
           <a:lstStyle/>
@@ -11838,7 +11829,7 @@
               </a:lnSpc>
             </a:pPr>
             <a:r>
-              <a:rPr lang="en-US" sz="2700" b="true">
+              <a:rPr lang="en-US" sz="2700" b="1">
                 <a:solidFill>
                   <a:srgbClr val="000000"/>
                 </a:solidFill>
@@ -11854,12 +11845,12 @@
       </p:sp>
       <p:sp>
         <p:nvSpPr>
-          <p:cNvPr name="TextBox 20" id="20"/>
-          <p:cNvSpPr txBox="true"/>
-          <p:nvPr/>
-        </p:nvSpPr>
-        <p:spPr>
-          <a:xfrm rot="0">
+          <p:cNvPr id="20" name="TextBox 20"/>
+          <p:cNvSpPr txBox="1"/>
+          <p:nvPr/>
+        </p:nvSpPr>
+        <p:spPr>
+          <a:xfrm>
             <a:off x="9499406" y="3699119"/>
             <a:ext cx="7805890" cy="2353866"/>
           </a:xfrm>
@@ -11868,7 +11859,7 @@
           </a:prstGeom>
         </p:spPr>
         <p:txBody>
-          <a:bodyPr anchor="t" rtlCol="false" tIns="0" lIns="0" bIns="0" rIns="0">
+          <a:bodyPr lIns="0" tIns="0" rIns="0" bIns="0" rtlCol="0" anchor="t">
             <a:spAutoFit/>
           </a:bodyPr>
           <a:lstStyle/>
@@ -11891,7 +11882,7 @@
               <a:t>Proposes a </a:t>
             </a:r>
             <a:r>
-              <a:rPr lang="en-US" sz="2200" b="true">
+              <a:rPr lang="en-US" sz="2200" b="1">
                 <a:solidFill>
                   <a:srgbClr val="272525"/>
                 </a:solidFill>
@@ -11919,12 +11910,12 @@
       </p:sp>
       <p:grpSp>
         <p:nvGrpSpPr>
-          <p:cNvPr name="Group 21" id="21"/>
+          <p:cNvPr id="21" name="Group 21"/>
           <p:cNvGrpSpPr/>
           <p:nvPr/>
         </p:nvGrpSpPr>
         <p:grpSpPr>
-          <a:xfrm rot="0">
+          <a:xfrm>
             <a:off x="9499406" y="6371930"/>
             <a:ext cx="7805890" cy="2012756"/>
             <a:chOff x="0" y="0"/>
@@ -11933,12 +11924,12 @@
         </p:grpSpPr>
         <p:sp>
           <p:nvSpPr>
-            <p:cNvPr name="Freeform 22" id="22"/>
+            <p:cNvPr id="22" name="Freeform 22"/>
             <p:cNvSpPr/>
             <p:nvPr/>
           </p:nvSpPr>
           <p:spPr>
-            <a:xfrm flipH="false" flipV="false" rot="0">
+            <a:xfrm>
               <a:off x="0" y="0"/>
               <a:ext cx="10407777" cy="2683637"/>
             </a:xfrm>
@@ -11947,9 +11938,9 @@
               <a:gdLst/>
               <a:ahLst/>
               <a:cxnLst/>
-              <a:rect r="r" b="b" t="t" l="l"/>
+              <a:rect l="l" t="t" r="r" b="b"/>
               <a:pathLst>
-                <a:path h="2683637" w="10407777">
+                <a:path w="10407777" h="2683637">
                   <a:moveTo>
                     <a:pt x="0" y="158750"/>
                   </a:moveTo>
@@ -11994,12 +11985,12 @@
       </p:grpSp>
       <p:grpSp>
         <p:nvGrpSpPr>
-          <p:cNvPr name="Group 23" id="23"/>
+          <p:cNvPr id="23" name="Group 23"/>
           <p:cNvGrpSpPr/>
           <p:nvPr/>
         </p:nvGrpSpPr>
         <p:grpSpPr>
-          <a:xfrm rot="0">
+          <a:xfrm>
             <a:off x="9782918" y="6802041"/>
             <a:ext cx="354359" cy="283521"/>
             <a:chOff x="0" y="0"/>
@@ -12008,12 +11999,12 @@
         </p:grpSpPr>
         <p:sp>
           <p:nvSpPr>
-            <p:cNvPr name="Freeform 24" id="24" descr="preencoded.png"/>
+            <p:cNvPr id="24" name="Freeform 24" descr="preencoded.png"/>
             <p:cNvSpPr/>
             <p:nvPr/>
           </p:nvSpPr>
           <p:spPr>
-            <a:xfrm flipH="false" flipV="false" rot="0">
+            <a:xfrm>
               <a:off x="0" y="0"/>
               <a:ext cx="472440" cy="378079"/>
             </a:xfrm>
@@ -12022,9 +12013,9 @@
               <a:gdLst/>
               <a:ahLst/>
               <a:cxnLst/>
-              <a:rect r="r" b="b" t="t" l="l"/>
+              <a:rect l="l" t="t" r="r" b="b"/>
               <a:pathLst>
-                <a:path h="378079" w="472440">
+                <a:path w="472440" h="378079">
                   <a:moveTo>
                     <a:pt x="0" y="0"/>
                   </a:moveTo>
@@ -12047,7 +12038,7 @@
             <a:blipFill>
               <a:blip r:embed="rId5"/>
               <a:stretch>
-                <a:fillRect l="-672" t="0" r="-680" b="13"/>
+                <a:fillRect l="-672" r="-680" b="13"/>
               </a:stretch>
             </a:blipFill>
           </p:spPr>
@@ -12055,12 +12046,12 @@
       </p:grpSp>
       <p:sp>
         <p:nvSpPr>
-          <p:cNvPr name="TextBox 25" id="25"/>
-          <p:cNvSpPr txBox="true"/>
-          <p:nvPr/>
-        </p:nvSpPr>
-        <p:spPr>
-          <a:xfrm rot="0">
+          <p:cNvPr id="25" name="TextBox 25"/>
+          <p:cNvSpPr txBox="1"/>
+          <p:nvPr/>
+        </p:nvSpPr>
+        <p:spPr>
+          <a:xfrm>
             <a:off x="10420798" y="6612131"/>
             <a:ext cx="6600977" cy="1446609"/>
           </a:xfrm>
@@ -12069,7 +12060,7 @@
           </a:prstGeom>
         </p:spPr>
         <p:txBody>
-          <a:bodyPr anchor="t" rtlCol="false" tIns="0" lIns="0" bIns="0" rIns="0">
+          <a:bodyPr lIns="0" tIns="0" rIns="0" bIns="0" rtlCol="0" anchor="t">
             <a:spAutoFit/>
           </a:bodyPr>
           <a:lstStyle/>
@@ -12103,7 +12094,7 @@
 </file>
 
 <file path=ppt/slides/slide8.xml><?xml version="1.0" encoding="utf-8"?>
-<p:sld xmlns:p="http://schemas.openxmlformats.org/presentationml/2006/main" xmlns:a="http://schemas.openxmlformats.org/drawingml/2006/main" xmlns:r="http://schemas.openxmlformats.org/officeDocument/2006/relationships">
+<p:sld xmlns:a="http://schemas.openxmlformats.org/drawingml/2006/main" xmlns:r="http://schemas.openxmlformats.org/officeDocument/2006/relationships" xmlns:p="http://schemas.openxmlformats.org/presentationml/2006/main">
   <p:cSld>
     <p:spTree>
       <p:nvGrpSpPr>
@@ -12121,12 +12112,12 @@
       </p:grpSpPr>
       <p:grpSp>
         <p:nvGrpSpPr>
-          <p:cNvPr name="Group 2" id="2"/>
+          <p:cNvPr id="2" name="Group 2"/>
           <p:cNvGrpSpPr/>
           <p:nvPr/>
         </p:nvGrpSpPr>
         <p:grpSpPr>
-          <a:xfrm rot="0">
+          <a:xfrm>
             <a:off x="0" y="0"/>
             <a:ext cx="18288000" cy="10287000"/>
             <a:chOff x="0" y="0"/>
@@ -12135,12 +12126,12 @@
         </p:grpSpPr>
         <p:sp>
           <p:nvSpPr>
-            <p:cNvPr name="Freeform 3" id="3"/>
+            <p:cNvPr id="3" name="Freeform 3"/>
             <p:cNvSpPr/>
             <p:nvPr/>
           </p:nvSpPr>
           <p:spPr>
-            <a:xfrm flipH="false" flipV="false" rot="0">
+            <a:xfrm>
               <a:off x="0" y="0"/>
               <a:ext cx="24384000" cy="13716000"/>
             </a:xfrm>
@@ -12149,9 +12140,9 @@
               <a:gdLst/>
               <a:ahLst/>
               <a:cxnLst/>
-              <a:rect r="r" b="b" t="t" l="l"/>
+              <a:rect l="l" t="t" r="r" b="b"/>
               <a:pathLst>
-                <a:path h="13716000" w="24384000">
+                <a:path w="24384000" h="13716000">
                   <a:moveTo>
                     <a:pt x="0" y="0"/>
                   </a:moveTo>
@@ -12176,12 +12167,12 @@
       </p:grpSp>
       <p:grpSp>
         <p:nvGrpSpPr>
-          <p:cNvPr name="Group 4" id="4"/>
+          <p:cNvPr id="4" name="Group 4"/>
           <p:cNvGrpSpPr/>
           <p:nvPr/>
         </p:nvGrpSpPr>
         <p:grpSpPr>
-          <a:xfrm rot="0">
+          <a:xfrm>
             <a:off x="0" y="0"/>
             <a:ext cx="18288000" cy="10287000"/>
             <a:chOff x="0" y="0"/>
@@ -12190,12 +12181,12 @@
         </p:grpSpPr>
         <p:sp>
           <p:nvSpPr>
-            <p:cNvPr name="Freeform 5" id="5"/>
+            <p:cNvPr id="5" name="Freeform 5"/>
             <p:cNvSpPr/>
             <p:nvPr/>
           </p:nvSpPr>
           <p:spPr>
-            <a:xfrm flipH="false" flipV="false" rot="0">
+            <a:xfrm>
               <a:off x="0" y="0"/>
               <a:ext cx="24384000" cy="13716000"/>
             </a:xfrm>
@@ -12204,9 +12195,9 @@
               <a:gdLst/>
               <a:ahLst/>
               <a:cxnLst/>
-              <a:rect r="r" b="b" t="t" l="l"/>
+              <a:rect l="l" t="t" r="r" b="b"/>
               <a:pathLst>
-                <a:path h="13716000" w="24384000">
+                <a:path w="24384000" h="13716000">
                   <a:moveTo>
                     <a:pt x="0" y="0"/>
                   </a:moveTo>
@@ -12231,12 +12222,12 @@
       </p:grpSp>
       <p:grpSp>
         <p:nvGrpSpPr>
-          <p:cNvPr name="Group 6" id="6"/>
+          <p:cNvPr id="6" name="Group 6"/>
           <p:cNvGrpSpPr/>
           <p:nvPr/>
         </p:nvGrpSpPr>
         <p:grpSpPr>
-          <a:xfrm rot="0">
+          <a:xfrm>
             <a:off x="992238" y="1254176"/>
             <a:ext cx="2532307" cy="510483"/>
             <a:chOff x="0" y="0"/>
@@ -12245,12 +12236,12 @@
         </p:grpSpPr>
         <p:sp>
           <p:nvSpPr>
-            <p:cNvPr name="Freeform 7" id="7"/>
+            <p:cNvPr id="7" name="Freeform 7"/>
             <p:cNvSpPr/>
             <p:nvPr/>
           </p:nvSpPr>
           <p:spPr>
-            <a:xfrm flipH="false" flipV="false" rot="0">
+            <a:xfrm>
               <a:off x="0" y="0"/>
               <a:ext cx="3376422" cy="680593"/>
             </a:xfrm>
@@ -12259,9 +12250,9 @@
               <a:gdLst/>
               <a:ahLst/>
               <a:cxnLst/>
-              <a:rect r="r" b="b" t="t" l="l"/>
+              <a:rect l="l" t="t" r="r" b="b"/>
               <a:pathLst>
-                <a:path h="680593" w="3376422">
+                <a:path w="3376422" h="680593">
                   <a:moveTo>
                     <a:pt x="0" y="123063"/>
                   </a:moveTo>
@@ -12306,12 +12297,12 @@
       </p:grpSp>
       <p:sp>
         <p:nvSpPr>
-          <p:cNvPr name="TextBox 8" id="8"/>
-          <p:cNvSpPr txBox="true"/>
-          <p:nvPr/>
-        </p:nvSpPr>
-        <p:spPr>
-          <a:xfrm rot="0">
+          <p:cNvPr id="8" name="TextBox 8"/>
+          <p:cNvSpPr txBox="1"/>
+          <p:nvPr/>
+        </p:nvSpPr>
+        <p:spPr>
+          <a:xfrm>
             <a:off x="1156992" y="1279322"/>
             <a:ext cx="3117209" cy="403022"/>
           </a:xfrm>
@@ -12320,7 +12311,7 @@
           </a:prstGeom>
         </p:spPr>
         <p:txBody>
-          <a:bodyPr anchor="t" rtlCol="false" tIns="0" lIns="0" bIns="0" rIns="0">
+          <a:bodyPr lIns="0" tIns="0" rIns="0" bIns="0" rtlCol="0" anchor="t">
             <a:spAutoFit/>
           </a:bodyPr>
           <a:lstStyle/>
@@ -12347,12 +12338,12 @@
       </p:sp>
       <p:sp>
         <p:nvSpPr>
-          <p:cNvPr name="TextBox 9" id="9"/>
-          <p:cNvSpPr txBox="true"/>
-          <p:nvPr/>
-        </p:nvSpPr>
-        <p:spPr>
-          <a:xfrm rot="0">
+          <p:cNvPr id="9" name="TextBox 9"/>
+          <p:cNvSpPr txBox="1"/>
+          <p:nvPr/>
+        </p:nvSpPr>
+        <p:spPr>
+          <a:xfrm>
             <a:off x="992238" y="1852022"/>
             <a:ext cx="16303523" cy="877338"/>
           </a:xfrm>
@@ -12361,7 +12352,7 @@
           </a:prstGeom>
         </p:spPr>
         <p:txBody>
-          <a:bodyPr anchor="t" rtlCol="false" tIns="0" lIns="0" bIns="0" rIns="0">
+          <a:bodyPr lIns="0" tIns="0" rIns="0" bIns="0" rtlCol="0" anchor="t">
             <a:spAutoFit/>
           </a:bodyPr>
           <a:lstStyle/>
@@ -12372,7 +12363,7 @@
               </a:lnSpc>
             </a:pPr>
             <a:r>
-              <a:rPr lang="en-US" sz="5400" b="true">
+              <a:rPr lang="en-US" sz="5400" b="1">
                 <a:solidFill>
                   <a:srgbClr val="000000"/>
                 </a:solidFill>
@@ -12388,12 +12379,12 @@
       </p:sp>
       <p:grpSp>
         <p:nvGrpSpPr>
-          <p:cNvPr name="Group 10" id="10"/>
+          <p:cNvPr id="10" name="Group 10"/>
           <p:cNvGrpSpPr/>
           <p:nvPr/>
         </p:nvGrpSpPr>
         <p:grpSpPr>
-          <a:xfrm rot="0">
+          <a:xfrm>
             <a:off x="987476" y="3123609"/>
             <a:ext cx="16313048" cy="5913834"/>
             <a:chOff x="0" y="0"/>
@@ -12402,12 +12393,12 @@
         </p:grpSpPr>
         <p:sp>
           <p:nvSpPr>
-            <p:cNvPr name="Freeform 11" id="11"/>
+            <p:cNvPr id="11" name="Freeform 11"/>
             <p:cNvSpPr/>
             <p:nvPr/>
           </p:nvSpPr>
           <p:spPr>
-            <a:xfrm flipH="false" flipV="false" rot="0">
+            <a:xfrm>
               <a:off x="0" y="0"/>
               <a:ext cx="21750655" cy="7885049"/>
             </a:xfrm>
@@ -12416,9 +12407,9 @@
               <a:gdLst/>
               <a:ahLst/>
               <a:cxnLst/>
-              <a:rect r="r" b="b" t="t" l="l"/>
+              <a:rect l="l" t="t" r="r" b="b"/>
               <a:pathLst>
-                <a:path h="7885049" w="21750655">
+                <a:path w="21750655" h="7885049">
                   <a:moveTo>
                     <a:pt x="0" y="154051"/>
                   </a:moveTo>
@@ -12460,7 +12451,7 @@
                 <a:alphaModFix amt="0"/>
               </a:blip>
               <a:stretch>
-                <a:fillRect l="0" t="-3748" r="0" b="-3749"/>
+                <a:fillRect t="-3748" b="-3749"/>
               </a:stretch>
             </a:blipFill>
             <a:ln w="9526" cap="sq">
@@ -12475,12 +12466,12 @@
       </p:grpSp>
       <p:grpSp>
         <p:nvGrpSpPr>
-          <p:cNvPr name="Group 12" id="12"/>
+          <p:cNvPr id="12" name="Group 12"/>
           <p:cNvGrpSpPr/>
           <p:nvPr/>
         </p:nvGrpSpPr>
         <p:grpSpPr>
-          <a:xfrm rot="0">
+          <a:xfrm>
             <a:off x="992238" y="3913432"/>
             <a:ext cx="16303523" cy="17164"/>
             <a:chOff x="0" y="0"/>
@@ -12489,12 +12480,12 @@
         </p:grpSpPr>
         <p:sp>
           <p:nvSpPr>
-            <p:cNvPr name="Freeform 13" id="13"/>
+            <p:cNvPr id="13" name="Freeform 13"/>
             <p:cNvSpPr/>
             <p:nvPr/>
           </p:nvSpPr>
           <p:spPr>
-            <a:xfrm flipH="false" flipV="false" rot="0">
+            <a:xfrm>
               <a:off x="0" y="0"/>
               <a:ext cx="21738082" cy="22860"/>
             </a:xfrm>
@@ -12503,9 +12494,9 @@
               <a:gdLst/>
               <a:ahLst/>
               <a:cxnLst/>
-              <a:rect r="r" b="b" t="t" l="l"/>
+              <a:rect l="l" t="t" r="r" b="b"/>
               <a:pathLst>
-                <a:path h="22860" w="21738082">
+                <a:path w="21738082" h="22860">
                   <a:moveTo>
                     <a:pt x="0" y="0"/>
                   </a:moveTo>
@@ -12532,12 +12523,12 @@
       </p:grpSp>
       <p:grpSp>
         <p:nvGrpSpPr>
-          <p:cNvPr name="Group 14" id="14"/>
+          <p:cNvPr id="14" name="Group 14"/>
           <p:cNvGrpSpPr/>
           <p:nvPr/>
         </p:nvGrpSpPr>
         <p:grpSpPr>
-          <a:xfrm rot="0">
+          <a:xfrm>
             <a:off x="992238" y="4693739"/>
             <a:ext cx="16303523" cy="17164"/>
             <a:chOff x="0" y="0"/>
@@ -12546,12 +12537,12 @@
         </p:grpSpPr>
         <p:sp>
           <p:nvSpPr>
-            <p:cNvPr name="Freeform 15" id="15"/>
+            <p:cNvPr id="15" name="Freeform 15"/>
             <p:cNvSpPr/>
             <p:nvPr/>
           </p:nvSpPr>
           <p:spPr>
-            <a:xfrm flipH="false" flipV="false" rot="0">
+            <a:xfrm>
               <a:off x="0" y="0"/>
               <a:ext cx="21738082" cy="22860"/>
             </a:xfrm>
@@ -12560,9 +12551,9 @@
               <a:gdLst/>
               <a:ahLst/>
               <a:cxnLst/>
-              <a:rect r="r" b="b" t="t" l="l"/>
+              <a:rect l="l" t="t" r="r" b="b"/>
               <a:pathLst>
-                <a:path h="22860" w="21738082">
+                <a:path w="21738082" h="22860">
                   <a:moveTo>
                     <a:pt x="0" y="0"/>
                   </a:moveTo>
@@ -12589,12 +12580,12 @@
       </p:grpSp>
       <p:grpSp>
         <p:nvGrpSpPr>
-          <p:cNvPr name="Group 16" id="16"/>
+          <p:cNvPr id="16" name="Group 16"/>
           <p:cNvGrpSpPr/>
           <p:nvPr/>
         </p:nvGrpSpPr>
         <p:grpSpPr>
-          <a:xfrm rot="0">
+          <a:xfrm>
             <a:off x="992238" y="5474046"/>
             <a:ext cx="16303523" cy="17164"/>
             <a:chOff x="0" y="0"/>
@@ -12603,12 +12594,12 @@
         </p:grpSpPr>
         <p:sp>
           <p:nvSpPr>
-            <p:cNvPr name="Freeform 17" id="17"/>
+            <p:cNvPr id="17" name="Freeform 17"/>
             <p:cNvSpPr/>
             <p:nvPr/>
           </p:nvSpPr>
           <p:spPr>
-            <a:xfrm flipH="false" flipV="false" rot="0">
+            <a:xfrm>
               <a:off x="0" y="0"/>
               <a:ext cx="21738082" cy="22860"/>
             </a:xfrm>
@@ -12617,9 +12608,9 @@
               <a:gdLst/>
               <a:ahLst/>
               <a:cxnLst/>
-              <a:rect r="r" b="b" t="t" l="l"/>
+              <a:rect l="l" t="t" r="r" b="b"/>
               <a:pathLst>
-                <a:path h="22860" w="21738082">
+                <a:path w="21738082" h="22860">
                   <a:moveTo>
                     <a:pt x="0" y="0"/>
                   </a:moveTo>
@@ -12646,12 +12637,12 @@
       </p:grpSp>
       <p:grpSp>
         <p:nvGrpSpPr>
-          <p:cNvPr name="Group 18" id="18"/>
+          <p:cNvPr id="18" name="Group 18"/>
           <p:cNvGrpSpPr/>
           <p:nvPr/>
         </p:nvGrpSpPr>
         <p:grpSpPr>
-          <a:xfrm rot="0">
+          <a:xfrm>
             <a:off x="992238" y="6254353"/>
             <a:ext cx="16303523" cy="17164"/>
             <a:chOff x="0" y="0"/>
@@ -12660,12 +12651,12 @@
         </p:grpSpPr>
         <p:sp>
           <p:nvSpPr>
-            <p:cNvPr name="Freeform 19" id="19"/>
+            <p:cNvPr id="19" name="Freeform 19"/>
             <p:cNvSpPr/>
             <p:nvPr/>
           </p:nvSpPr>
           <p:spPr>
-            <a:xfrm flipH="false" flipV="false" rot="0">
+            <a:xfrm>
               <a:off x="0" y="0"/>
               <a:ext cx="21738082" cy="22860"/>
             </a:xfrm>
@@ -12674,9 +12665,9 @@
               <a:gdLst/>
               <a:ahLst/>
               <a:cxnLst/>
-              <a:rect r="r" b="b" t="t" l="l"/>
+              <a:rect l="l" t="t" r="r" b="b"/>
               <a:pathLst>
-                <a:path h="22860" w="21738082">
+                <a:path w="21738082" h="22860">
                   <a:moveTo>
                     <a:pt x="0" y="0"/>
                   </a:moveTo>
@@ -12703,12 +12694,12 @@
       </p:grpSp>
       <p:grpSp>
         <p:nvGrpSpPr>
-          <p:cNvPr name="Group 20" id="20"/>
+          <p:cNvPr id="20" name="Group 20"/>
           <p:cNvGrpSpPr/>
           <p:nvPr/>
         </p:nvGrpSpPr>
         <p:grpSpPr>
-          <a:xfrm rot="0">
+          <a:xfrm>
             <a:off x="992238" y="7034660"/>
             <a:ext cx="16303523" cy="17164"/>
             <a:chOff x="0" y="0"/>
@@ -12717,12 +12708,12 @@
         </p:grpSpPr>
         <p:sp>
           <p:nvSpPr>
-            <p:cNvPr name="Freeform 21" id="21"/>
+            <p:cNvPr id="21" name="Freeform 21"/>
             <p:cNvSpPr/>
             <p:nvPr/>
           </p:nvSpPr>
           <p:spPr>
-            <a:xfrm flipH="false" flipV="false" rot="0">
+            <a:xfrm>
               <a:off x="0" y="0"/>
               <a:ext cx="21738082" cy="22860"/>
             </a:xfrm>
@@ -12731,9 +12722,9 @@
               <a:gdLst/>
               <a:ahLst/>
               <a:cxnLst/>
-              <a:rect r="r" b="b" t="t" l="l"/>
+              <a:rect l="l" t="t" r="r" b="b"/>
               <a:pathLst>
-                <a:path h="22860" w="21738082">
+                <a:path w="21738082" h="22860">
                   <a:moveTo>
                     <a:pt x="0" y="0"/>
                   </a:moveTo>
@@ -12760,12 +12751,12 @@
       </p:grpSp>
       <p:grpSp>
         <p:nvGrpSpPr>
-          <p:cNvPr name="Group 22" id="22"/>
+          <p:cNvPr id="22" name="Group 22"/>
           <p:cNvGrpSpPr/>
           <p:nvPr/>
         </p:nvGrpSpPr>
         <p:grpSpPr>
-          <a:xfrm rot="0">
+          <a:xfrm>
             <a:off x="992238" y="8247612"/>
             <a:ext cx="16303523" cy="17164"/>
             <a:chOff x="0" y="0"/>
@@ -12774,12 +12765,12 @@
         </p:grpSpPr>
         <p:sp>
           <p:nvSpPr>
-            <p:cNvPr name="Freeform 23" id="23"/>
+            <p:cNvPr id="23" name="Freeform 23"/>
             <p:cNvSpPr/>
             <p:nvPr/>
           </p:nvSpPr>
           <p:spPr>
-            <a:xfrm flipH="false" flipV="false" rot="0">
+            <a:xfrm>
               <a:off x="0" y="0"/>
               <a:ext cx="21738082" cy="22860"/>
             </a:xfrm>
@@ -12788,9 +12779,9 @@
               <a:gdLst/>
               <a:ahLst/>
               <a:cxnLst/>
-              <a:rect r="r" b="b" t="t" l="l"/>
+              <a:rect l="l" t="t" r="r" b="b"/>
               <a:pathLst>
-                <a:path h="22860" w="21738082">
+                <a:path w="21738082" h="22860">
                   <a:moveTo>
                     <a:pt x="0" y="0"/>
                   </a:moveTo>
@@ -12817,12 +12808,12 @@
       </p:grpSp>
       <p:sp>
         <p:nvSpPr>
-          <p:cNvPr name="TextBox 24" id="24"/>
-          <p:cNvSpPr txBox="true"/>
-          <p:nvPr/>
-        </p:nvSpPr>
-        <p:spPr>
-          <a:xfrm rot="0">
+          <p:cNvPr id="24" name="TextBox 24"/>
+          <p:cNvSpPr txBox="1"/>
+          <p:nvPr/>
+        </p:nvSpPr>
+        <p:spPr>
+          <a:xfrm>
             <a:off x="1276798" y="3230756"/>
             <a:ext cx="3947665" cy="508845"/>
           </a:xfrm>
@@ -12831,7 +12822,7 @@
           </a:prstGeom>
         </p:spPr>
         <p:txBody>
-          <a:bodyPr anchor="t" rtlCol="false" tIns="0" lIns="0" bIns="0" rIns="0">
+          <a:bodyPr lIns="0" tIns="0" rIns="0" bIns="0" rtlCol="0" anchor="t">
             <a:spAutoFit/>
           </a:bodyPr>
           <a:lstStyle/>
@@ -12842,7 +12833,7 @@
               </a:lnSpc>
             </a:pPr>
             <a:r>
-              <a:rPr lang="en-US" sz="2100" b="true">
+              <a:rPr lang="en-US" sz="2100" b="1">
                 <a:solidFill>
                   <a:srgbClr val="272525"/>
                 </a:solidFill>
@@ -12858,12 +12849,12 @@
       </p:sp>
       <p:sp>
         <p:nvSpPr>
-          <p:cNvPr name="TextBox 25" id="25"/>
-          <p:cNvSpPr txBox="true"/>
-          <p:nvPr/>
-        </p:nvSpPr>
-        <p:spPr>
-          <a:xfrm rot="0">
+          <p:cNvPr id="25" name="TextBox 25"/>
+          <p:cNvSpPr txBox="1"/>
+          <p:nvPr/>
+        </p:nvSpPr>
+        <p:spPr>
+          <a:xfrm>
             <a:off x="4859236" y="3230756"/>
             <a:ext cx="3296393" cy="508845"/>
           </a:xfrm>
@@ -12872,7 +12863,7 @@
           </a:prstGeom>
         </p:spPr>
         <p:txBody>
-          <a:bodyPr anchor="t" rtlCol="false" tIns="0" lIns="0" bIns="0" rIns="0">
+          <a:bodyPr lIns="0" tIns="0" rIns="0" bIns="0" rtlCol="0" anchor="t">
             <a:spAutoFit/>
           </a:bodyPr>
           <a:lstStyle/>
@@ -12883,7 +12874,7 @@
               </a:lnSpc>
             </a:pPr>
             <a:r>
-              <a:rPr lang="en-US" sz="2100" b="true">
+              <a:rPr lang="en-US" sz="2100" b="1">
                 <a:solidFill>
                   <a:srgbClr val="272525"/>
                 </a:solidFill>
@@ -12899,12 +12890,12 @@
       </p:sp>
       <p:sp>
         <p:nvSpPr>
-          <p:cNvPr name="TextBox 26" id="26"/>
-          <p:cNvSpPr txBox="true"/>
-          <p:nvPr/>
-        </p:nvSpPr>
-        <p:spPr>
-          <a:xfrm rot="0">
+          <p:cNvPr id="26" name="TextBox 26"/>
+          <p:cNvSpPr txBox="1"/>
+          <p:nvPr/>
+        </p:nvSpPr>
+        <p:spPr>
+          <a:xfrm>
             <a:off x="7790412" y="3230756"/>
             <a:ext cx="3622034" cy="508845"/>
           </a:xfrm>
@@ -12913,7 +12904,7 @@
           </a:prstGeom>
         </p:spPr>
         <p:txBody>
-          <a:bodyPr anchor="t" rtlCol="false" tIns="0" lIns="0" bIns="0" rIns="0">
+          <a:bodyPr lIns="0" tIns="0" rIns="0" bIns="0" rtlCol="0" anchor="t">
             <a:spAutoFit/>
           </a:bodyPr>
           <a:lstStyle/>
@@ -12924,7 +12915,7 @@
               </a:lnSpc>
             </a:pPr>
             <a:r>
-              <a:rPr lang="en-US" sz="2100" b="true">
+              <a:rPr lang="en-US" sz="2100" b="1">
                 <a:solidFill>
                   <a:srgbClr val="272525"/>
                 </a:solidFill>
@@ -12940,12 +12931,12 @@
       </p:sp>
       <p:sp>
         <p:nvSpPr>
-          <p:cNvPr name="TextBox 27" id="27"/>
-          <p:cNvSpPr txBox="true"/>
-          <p:nvPr/>
-        </p:nvSpPr>
-        <p:spPr>
-          <a:xfrm rot="0">
+          <p:cNvPr id="27" name="TextBox 27"/>
+          <p:cNvSpPr txBox="1"/>
+          <p:nvPr/>
+        </p:nvSpPr>
+        <p:spPr>
+          <a:xfrm>
             <a:off x="11047209" y="3230756"/>
             <a:ext cx="3622034" cy="508845"/>
           </a:xfrm>
@@ -12954,7 +12945,7 @@
           </a:prstGeom>
         </p:spPr>
         <p:txBody>
-          <a:bodyPr anchor="t" rtlCol="false" tIns="0" lIns="0" bIns="0" rIns="0">
+          <a:bodyPr lIns="0" tIns="0" rIns="0" bIns="0" rtlCol="0" anchor="t">
             <a:spAutoFit/>
           </a:bodyPr>
           <a:lstStyle/>
@@ -12965,7 +12956,7 @@
               </a:lnSpc>
             </a:pPr>
             <a:r>
-              <a:rPr lang="en-US" sz="2100" b="true">
+              <a:rPr lang="en-US" sz="2100" b="1">
                 <a:solidFill>
                   <a:srgbClr val="272525"/>
                 </a:solidFill>
@@ -12981,12 +12972,12 @@
       </p:sp>
       <p:sp>
         <p:nvSpPr>
-          <p:cNvPr name="TextBox 28" id="28"/>
-          <p:cNvSpPr txBox="true"/>
-          <p:nvPr/>
-        </p:nvSpPr>
-        <p:spPr>
-          <a:xfrm rot="0">
+          <p:cNvPr id="28" name="TextBox 28"/>
+          <p:cNvSpPr txBox="1"/>
+          <p:nvPr/>
+        </p:nvSpPr>
+        <p:spPr>
+          <a:xfrm>
             <a:off x="14304016" y="3230756"/>
             <a:ext cx="3622034" cy="508845"/>
           </a:xfrm>
@@ -12995,7 +12986,7 @@
           </a:prstGeom>
         </p:spPr>
         <p:txBody>
-          <a:bodyPr anchor="t" rtlCol="false" tIns="0" lIns="0" bIns="0" rIns="0">
+          <a:bodyPr lIns="0" tIns="0" rIns="0" bIns="0" rtlCol="0" anchor="t">
             <a:spAutoFit/>
           </a:bodyPr>
           <a:lstStyle/>
@@ -13006,7 +12997,7 @@
               </a:lnSpc>
             </a:pPr>
             <a:r>
-              <a:rPr lang="en-US" sz="2100" b="true">
+              <a:rPr lang="en-US" sz="2100" b="1">
                 <a:solidFill>
                   <a:srgbClr val="272525"/>
                 </a:solidFill>
@@ -13022,12 +13013,12 @@
       </p:sp>
       <p:sp>
         <p:nvSpPr>
-          <p:cNvPr name="TextBox 29" id="29"/>
-          <p:cNvSpPr txBox="true"/>
-          <p:nvPr/>
-        </p:nvSpPr>
-        <p:spPr>
-          <a:xfrm rot="0">
+          <p:cNvPr id="29" name="TextBox 29"/>
+          <p:cNvSpPr txBox="1"/>
+          <p:nvPr/>
+        </p:nvSpPr>
+        <p:spPr>
+          <a:xfrm>
             <a:off x="1276798" y="4011063"/>
             <a:ext cx="3947665" cy="508845"/>
           </a:xfrm>
@@ -13036,7 +13027,7 @@
           </a:prstGeom>
         </p:spPr>
         <p:txBody>
-          <a:bodyPr anchor="t" rtlCol="false" tIns="0" lIns="0" bIns="0" rIns="0">
+          <a:bodyPr lIns="0" tIns="0" rIns="0" bIns="0" rtlCol="0" anchor="t">
             <a:spAutoFit/>
           </a:bodyPr>
           <a:lstStyle/>
@@ -13063,12 +13054,12 @@
       </p:sp>
       <p:sp>
         <p:nvSpPr>
-          <p:cNvPr name="TextBox 30" id="30"/>
-          <p:cNvSpPr txBox="true"/>
-          <p:nvPr/>
-        </p:nvSpPr>
-        <p:spPr>
-          <a:xfrm rot="0">
+          <p:cNvPr id="30" name="TextBox 30"/>
+          <p:cNvSpPr txBox="1"/>
+          <p:nvPr/>
+        </p:nvSpPr>
+        <p:spPr>
+          <a:xfrm>
             <a:off x="4859236" y="4011063"/>
             <a:ext cx="3296393" cy="508845"/>
           </a:xfrm>
@@ -13077,7 +13068,7 @@
           </a:prstGeom>
         </p:spPr>
         <p:txBody>
-          <a:bodyPr anchor="t" rtlCol="false" tIns="0" lIns="0" bIns="0" rIns="0">
+          <a:bodyPr lIns="0" tIns="0" rIns="0" bIns="0" rtlCol="0" anchor="t">
             <a:spAutoFit/>
           </a:bodyPr>
           <a:lstStyle/>
@@ -13104,12 +13095,12 @@
       </p:sp>
       <p:sp>
         <p:nvSpPr>
-          <p:cNvPr name="TextBox 31" id="31"/>
-          <p:cNvSpPr txBox="true"/>
-          <p:nvPr/>
-        </p:nvSpPr>
-        <p:spPr>
-          <a:xfrm rot="0">
+          <p:cNvPr id="31" name="TextBox 31"/>
+          <p:cNvSpPr txBox="1"/>
+          <p:nvPr/>
+        </p:nvSpPr>
+        <p:spPr>
+          <a:xfrm>
             <a:off x="7790412" y="4011063"/>
             <a:ext cx="3622034" cy="508845"/>
           </a:xfrm>
@@ -13118,7 +13109,7 @@
           </a:prstGeom>
         </p:spPr>
         <p:txBody>
-          <a:bodyPr anchor="t" rtlCol="false" tIns="0" lIns="0" bIns="0" rIns="0">
+          <a:bodyPr lIns="0" tIns="0" rIns="0" bIns="0" rtlCol="0" anchor="t">
             <a:spAutoFit/>
           </a:bodyPr>
           <a:lstStyle/>
@@ -13145,12 +13136,12 @@
       </p:sp>
       <p:sp>
         <p:nvSpPr>
-          <p:cNvPr name="TextBox 32" id="32"/>
-          <p:cNvSpPr txBox="true"/>
-          <p:nvPr/>
-        </p:nvSpPr>
-        <p:spPr>
-          <a:xfrm rot="0">
+          <p:cNvPr id="32" name="TextBox 32"/>
+          <p:cNvSpPr txBox="1"/>
+          <p:nvPr/>
+        </p:nvSpPr>
+        <p:spPr>
+          <a:xfrm>
             <a:off x="11047209" y="4011063"/>
             <a:ext cx="3622034" cy="508845"/>
           </a:xfrm>
@@ -13159,7 +13150,7 @@
           </a:prstGeom>
         </p:spPr>
         <p:txBody>
-          <a:bodyPr anchor="t" rtlCol="false" tIns="0" lIns="0" bIns="0" rIns="0">
+          <a:bodyPr lIns="0" tIns="0" rIns="0" bIns="0" rtlCol="0" anchor="t">
             <a:spAutoFit/>
           </a:bodyPr>
           <a:lstStyle/>
@@ -13186,12 +13177,12 @@
       </p:sp>
       <p:sp>
         <p:nvSpPr>
-          <p:cNvPr name="TextBox 33" id="33"/>
-          <p:cNvSpPr txBox="true"/>
-          <p:nvPr/>
-        </p:nvSpPr>
-        <p:spPr>
-          <a:xfrm rot="0">
+          <p:cNvPr id="33" name="TextBox 33"/>
+          <p:cNvSpPr txBox="1"/>
+          <p:nvPr/>
+        </p:nvSpPr>
+        <p:spPr>
+          <a:xfrm>
             <a:off x="14304016" y="4011063"/>
             <a:ext cx="3622034" cy="508845"/>
           </a:xfrm>
@@ -13200,7 +13191,7 @@
           </a:prstGeom>
         </p:spPr>
         <p:txBody>
-          <a:bodyPr anchor="t" rtlCol="false" tIns="0" lIns="0" bIns="0" rIns="0">
+          <a:bodyPr lIns="0" tIns="0" rIns="0" bIns="0" rtlCol="0" anchor="t">
             <a:spAutoFit/>
           </a:bodyPr>
           <a:lstStyle/>
@@ -13227,12 +13218,12 @@
       </p:sp>
       <p:sp>
         <p:nvSpPr>
-          <p:cNvPr name="TextBox 34" id="34"/>
-          <p:cNvSpPr txBox="true"/>
-          <p:nvPr/>
-        </p:nvSpPr>
-        <p:spPr>
-          <a:xfrm rot="0">
+          <p:cNvPr id="34" name="TextBox 34"/>
+          <p:cNvSpPr txBox="1"/>
+          <p:nvPr/>
+        </p:nvSpPr>
+        <p:spPr>
+          <a:xfrm>
             <a:off x="1276798" y="4791370"/>
             <a:ext cx="3947665" cy="508845"/>
           </a:xfrm>
@@ -13241,7 +13232,7 @@
           </a:prstGeom>
         </p:spPr>
         <p:txBody>
-          <a:bodyPr anchor="t" rtlCol="false" tIns="0" lIns="0" bIns="0" rIns="0">
+          <a:bodyPr lIns="0" tIns="0" rIns="0" bIns="0" rtlCol="0" anchor="t">
             <a:spAutoFit/>
           </a:bodyPr>
           <a:lstStyle/>
@@ -13268,12 +13259,12 @@
       </p:sp>
       <p:sp>
         <p:nvSpPr>
-          <p:cNvPr name="TextBox 35" id="35"/>
-          <p:cNvSpPr txBox="true"/>
-          <p:nvPr/>
-        </p:nvSpPr>
-        <p:spPr>
-          <a:xfrm rot="0">
+          <p:cNvPr id="35" name="TextBox 35"/>
+          <p:cNvSpPr txBox="1"/>
+          <p:nvPr/>
+        </p:nvSpPr>
+        <p:spPr>
+          <a:xfrm>
             <a:off x="4859236" y="4791370"/>
             <a:ext cx="3296393" cy="508845"/>
           </a:xfrm>
@@ -13282,7 +13273,7 @@
           </a:prstGeom>
         </p:spPr>
         <p:txBody>
-          <a:bodyPr anchor="t" rtlCol="false" tIns="0" lIns="0" bIns="0" rIns="0">
+          <a:bodyPr lIns="0" tIns="0" rIns="0" bIns="0" rtlCol="0" anchor="t">
             <a:spAutoFit/>
           </a:bodyPr>
           <a:lstStyle/>
@@ -13309,12 +13300,12 @@
       </p:sp>
       <p:sp>
         <p:nvSpPr>
-          <p:cNvPr name="TextBox 36" id="36"/>
-          <p:cNvSpPr txBox="true"/>
-          <p:nvPr/>
-        </p:nvSpPr>
-        <p:spPr>
-          <a:xfrm rot="0">
+          <p:cNvPr id="36" name="TextBox 36"/>
+          <p:cNvSpPr txBox="1"/>
+          <p:nvPr/>
+        </p:nvSpPr>
+        <p:spPr>
+          <a:xfrm>
             <a:off x="7790412" y="4791370"/>
             <a:ext cx="3622034" cy="508845"/>
           </a:xfrm>
@@ -13323,7 +13314,7 @@
           </a:prstGeom>
         </p:spPr>
         <p:txBody>
-          <a:bodyPr anchor="t" rtlCol="false" tIns="0" lIns="0" bIns="0" rIns="0">
+          <a:bodyPr lIns="0" tIns="0" rIns="0" bIns="0" rtlCol="0" anchor="t">
             <a:spAutoFit/>
           </a:bodyPr>
           <a:lstStyle/>
@@ -13350,12 +13341,12 @@
       </p:sp>
       <p:sp>
         <p:nvSpPr>
-          <p:cNvPr name="TextBox 37" id="37"/>
-          <p:cNvSpPr txBox="true"/>
-          <p:nvPr/>
-        </p:nvSpPr>
-        <p:spPr>
-          <a:xfrm rot="0">
+          <p:cNvPr id="37" name="TextBox 37"/>
+          <p:cNvSpPr txBox="1"/>
+          <p:nvPr/>
+        </p:nvSpPr>
+        <p:spPr>
+          <a:xfrm>
             <a:off x="11047209" y="4791370"/>
             <a:ext cx="3622034" cy="508845"/>
           </a:xfrm>
@@ -13364,7 +13355,7 @@
           </a:prstGeom>
         </p:spPr>
         <p:txBody>
-          <a:bodyPr anchor="t" rtlCol="false" tIns="0" lIns="0" bIns="0" rIns="0">
+          <a:bodyPr lIns="0" tIns="0" rIns="0" bIns="0" rtlCol="0" anchor="t">
             <a:spAutoFit/>
           </a:bodyPr>
           <a:lstStyle/>
@@ -13391,12 +13382,12 @@
       </p:sp>
       <p:sp>
         <p:nvSpPr>
-          <p:cNvPr name="TextBox 38" id="38"/>
-          <p:cNvSpPr txBox="true"/>
-          <p:nvPr/>
-        </p:nvSpPr>
-        <p:spPr>
-          <a:xfrm rot="0">
+          <p:cNvPr id="38" name="TextBox 38"/>
+          <p:cNvSpPr txBox="1"/>
+          <p:nvPr/>
+        </p:nvSpPr>
+        <p:spPr>
+          <a:xfrm>
             <a:off x="14304016" y="4791370"/>
             <a:ext cx="3622034" cy="508845"/>
           </a:xfrm>
@@ -13405,7 +13396,7 @@
           </a:prstGeom>
         </p:spPr>
         <p:txBody>
-          <a:bodyPr anchor="t" rtlCol="false" tIns="0" lIns="0" bIns="0" rIns="0">
+          <a:bodyPr lIns="0" tIns="0" rIns="0" bIns="0" rtlCol="0" anchor="t">
             <a:spAutoFit/>
           </a:bodyPr>
           <a:lstStyle/>
@@ -13432,12 +13423,12 @@
       </p:sp>
       <p:sp>
         <p:nvSpPr>
-          <p:cNvPr name="TextBox 39" id="39"/>
-          <p:cNvSpPr txBox="true"/>
-          <p:nvPr/>
-        </p:nvSpPr>
-        <p:spPr>
-          <a:xfrm rot="0">
+          <p:cNvPr id="39" name="TextBox 39"/>
+          <p:cNvSpPr txBox="1"/>
+          <p:nvPr/>
+        </p:nvSpPr>
+        <p:spPr>
+          <a:xfrm>
             <a:off x="1276798" y="5571677"/>
             <a:ext cx="3947665" cy="508845"/>
           </a:xfrm>
@@ -13446,7 +13437,7 @@
           </a:prstGeom>
         </p:spPr>
         <p:txBody>
-          <a:bodyPr anchor="t" rtlCol="false" tIns="0" lIns="0" bIns="0" rIns="0">
+          <a:bodyPr lIns="0" tIns="0" rIns="0" bIns="0" rtlCol="0" anchor="t">
             <a:spAutoFit/>
           </a:bodyPr>
           <a:lstStyle/>
@@ -13473,12 +13464,12 @@
       </p:sp>
       <p:sp>
         <p:nvSpPr>
-          <p:cNvPr name="TextBox 40" id="40"/>
-          <p:cNvSpPr txBox="true"/>
-          <p:nvPr/>
-        </p:nvSpPr>
-        <p:spPr>
-          <a:xfrm rot="0">
+          <p:cNvPr id="40" name="TextBox 40"/>
+          <p:cNvSpPr txBox="1"/>
+          <p:nvPr/>
+        </p:nvSpPr>
+        <p:spPr>
+          <a:xfrm>
             <a:off x="4859236" y="5571677"/>
             <a:ext cx="3296393" cy="508845"/>
           </a:xfrm>
@@ -13487,7 +13478,7 @@
           </a:prstGeom>
         </p:spPr>
         <p:txBody>
-          <a:bodyPr anchor="t" rtlCol="false" tIns="0" lIns="0" bIns="0" rIns="0">
+          <a:bodyPr lIns="0" tIns="0" rIns="0" bIns="0" rtlCol="0" anchor="t">
             <a:spAutoFit/>
           </a:bodyPr>
           <a:lstStyle/>
@@ -13514,12 +13505,12 @@
       </p:sp>
       <p:sp>
         <p:nvSpPr>
-          <p:cNvPr name="TextBox 41" id="41"/>
-          <p:cNvSpPr txBox="true"/>
-          <p:nvPr/>
-        </p:nvSpPr>
-        <p:spPr>
-          <a:xfrm rot="0">
+          <p:cNvPr id="41" name="TextBox 41"/>
+          <p:cNvSpPr txBox="1"/>
+          <p:nvPr/>
+        </p:nvSpPr>
+        <p:spPr>
+          <a:xfrm>
             <a:off x="7790412" y="5571677"/>
             <a:ext cx="3622034" cy="508845"/>
           </a:xfrm>
@@ -13528,7 +13519,7 @@
           </a:prstGeom>
         </p:spPr>
         <p:txBody>
-          <a:bodyPr anchor="t" rtlCol="false" tIns="0" lIns="0" bIns="0" rIns="0">
+          <a:bodyPr lIns="0" tIns="0" rIns="0" bIns="0" rtlCol="0" anchor="t">
             <a:spAutoFit/>
           </a:bodyPr>
           <a:lstStyle/>
@@ -13555,12 +13546,12 @@
       </p:sp>
       <p:sp>
         <p:nvSpPr>
-          <p:cNvPr name="TextBox 42" id="42"/>
-          <p:cNvSpPr txBox="true"/>
-          <p:nvPr/>
-        </p:nvSpPr>
-        <p:spPr>
-          <a:xfrm rot="0">
+          <p:cNvPr id="42" name="TextBox 42"/>
+          <p:cNvSpPr txBox="1"/>
+          <p:nvPr/>
+        </p:nvSpPr>
+        <p:spPr>
+          <a:xfrm>
             <a:off x="11047209" y="5571677"/>
             <a:ext cx="3622034" cy="508845"/>
           </a:xfrm>
@@ -13569,7 +13560,7 @@
           </a:prstGeom>
         </p:spPr>
         <p:txBody>
-          <a:bodyPr anchor="t" rtlCol="false" tIns="0" lIns="0" bIns="0" rIns="0">
+          <a:bodyPr lIns="0" tIns="0" rIns="0" bIns="0" rtlCol="0" anchor="t">
             <a:spAutoFit/>
           </a:bodyPr>
           <a:lstStyle/>
@@ -13596,12 +13587,12 @@
       </p:sp>
       <p:sp>
         <p:nvSpPr>
-          <p:cNvPr name="TextBox 43" id="43"/>
-          <p:cNvSpPr txBox="true"/>
-          <p:nvPr/>
-        </p:nvSpPr>
-        <p:spPr>
-          <a:xfrm rot="0">
+          <p:cNvPr id="43" name="TextBox 43"/>
+          <p:cNvSpPr txBox="1"/>
+          <p:nvPr/>
+        </p:nvSpPr>
+        <p:spPr>
+          <a:xfrm>
             <a:off x="14304016" y="5571677"/>
             <a:ext cx="3622034" cy="508845"/>
           </a:xfrm>
@@ -13610,7 +13601,7 @@
           </a:prstGeom>
         </p:spPr>
         <p:txBody>
-          <a:bodyPr anchor="t" rtlCol="false" tIns="0" lIns="0" bIns="0" rIns="0">
+          <a:bodyPr lIns="0" tIns="0" rIns="0" bIns="0" rtlCol="0" anchor="t">
             <a:spAutoFit/>
           </a:bodyPr>
           <a:lstStyle/>
@@ -13637,12 +13628,12 @@
       </p:sp>
       <p:sp>
         <p:nvSpPr>
-          <p:cNvPr name="TextBox 44" id="44"/>
-          <p:cNvSpPr txBox="true"/>
-          <p:nvPr/>
-        </p:nvSpPr>
-        <p:spPr>
-          <a:xfrm rot="0">
+          <p:cNvPr id="44" name="TextBox 44"/>
+          <p:cNvSpPr txBox="1"/>
+          <p:nvPr/>
+        </p:nvSpPr>
+        <p:spPr>
+          <a:xfrm>
             <a:off x="1276798" y="6351984"/>
             <a:ext cx="3947665" cy="508845"/>
           </a:xfrm>
@@ -13651,7 +13642,7 @@
           </a:prstGeom>
         </p:spPr>
         <p:txBody>
-          <a:bodyPr anchor="t" rtlCol="false" tIns="0" lIns="0" bIns="0" rIns="0">
+          <a:bodyPr lIns="0" tIns="0" rIns="0" bIns="0" rtlCol="0" anchor="t">
             <a:spAutoFit/>
           </a:bodyPr>
           <a:lstStyle/>
@@ -13678,12 +13669,12 @@
       </p:sp>
       <p:sp>
         <p:nvSpPr>
-          <p:cNvPr name="TextBox 45" id="45"/>
-          <p:cNvSpPr txBox="true"/>
-          <p:nvPr/>
-        </p:nvSpPr>
-        <p:spPr>
-          <a:xfrm rot="0">
+          <p:cNvPr id="45" name="TextBox 45"/>
+          <p:cNvSpPr txBox="1"/>
+          <p:nvPr/>
+        </p:nvSpPr>
+        <p:spPr>
+          <a:xfrm>
             <a:off x="4859236" y="6351984"/>
             <a:ext cx="3296393" cy="508845"/>
           </a:xfrm>
@@ -13692,7 +13683,7 @@
           </a:prstGeom>
         </p:spPr>
         <p:txBody>
-          <a:bodyPr anchor="t" rtlCol="false" tIns="0" lIns="0" bIns="0" rIns="0">
+          <a:bodyPr lIns="0" tIns="0" rIns="0" bIns="0" rtlCol="0" anchor="t">
             <a:spAutoFit/>
           </a:bodyPr>
           <a:lstStyle/>
@@ -13719,12 +13710,12 @@
       </p:sp>
       <p:sp>
         <p:nvSpPr>
-          <p:cNvPr name="TextBox 46" id="46"/>
-          <p:cNvSpPr txBox="true"/>
-          <p:nvPr/>
-        </p:nvSpPr>
-        <p:spPr>
-          <a:xfrm rot="0">
+          <p:cNvPr id="46" name="TextBox 46"/>
+          <p:cNvSpPr txBox="1"/>
+          <p:nvPr/>
+        </p:nvSpPr>
+        <p:spPr>
+          <a:xfrm>
             <a:off x="7790412" y="6351984"/>
             <a:ext cx="3622034" cy="508845"/>
           </a:xfrm>
@@ -13733,7 +13724,7 @@
           </a:prstGeom>
         </p:spPr>
         <p:txBody>
-          <a:bodyPr anchor="t" rtlCol="false" tIns="0" lIns="0" bIns="0" rIns="0">
+          <a:bodyPr lIns="0" tIns="0" rIns="0" bIns="0" rtlCol="0" anchor="t">
             <a:spAutoFit/>
           </a:bodyPr>
           <a:lstStyle/>
@@ -13760,12 +13751,12 @@
       </p:sp>
       <p:sp>
         <p:nvSpPr>
-          <p:cNvPr name="TextBox 47" id="47"/>
-          <p:cNvSpPr txBox="true"/>
-          <p:nvPr/>
-        </p:nvSpPr>
-        <p:spPr>
-          <a:xfrm rot="0">
+          <p:cNvPr id="47" name="TextBox 47"/>
+          <p:cNvSpPr txBox="1"/>
+          <p:nvPr/>
+        </p:nvSpPr>
+        <p:spPr>
+          <a:xfrm>
             <a:off x="11047209" y="6351984"/>
             <a:ext cx="3622034" cy="508845"/>
           </a:xfrm>
@@ -13774,7 +13765,7 @@
           </a:prstGeom>
         </p:spPr>
         <p:txBody>
-          <a:bodyPr anchor="t" rtlCol="false" tIns="0" lIns="0" bIns="0" rIns="0">
+          <a:bodyPr lIns="0" tIns="0" rIns="0" bIns="0" rtlCol="0" anchor="t">
             <a:spAutoFit/>
           </a:bodyPr>
           <a:lstStyle/>
@@ -13801,12 +13792,12 @@
       </p:sp>
       <p:sp>
         <p:nvSpPr>
-          <p:cNvPr name="TextBox 48" id="48"/>
-          <p:cNvSpPr txBox="true"/>
-          <p:nvPr/>
-        </p:nvSpPr>
-        <p:spPr>
-          <a:xfrm rot="0">
+          <p:cNvPr id="48" name="TextBox 48"/>
+          <p:cNvSpPr txBox="1"/>
+          <p:nvPr/>
+        </p:nvSpPr>
+        <p:spPr>
+          <a:xfrm>
             <a:off x="14304016" y="6351984"/>
             <a:ext cx="3622034" cy="508845"/>
           </a:xfrm>
@@ -13815,7 +13806,7 @@
           </a:prstGeom>
         </p:spPr>
         <p:txBody>
-          <a:bodyPr anchor="t" rtlCol="false" tIns="0" lIns="0" bIns="0" rIns="0">
+          <a:bodyPr lIns="0" tIns="0" rIns="0" bIns="0" rtlCol="0" anchor="t">
             <a:spAutoFit/>
           </a:bodyPr>
           <a:lstStyle/>
@@ -13842,12 +13833,12 @@
       </p:sp>
       <p:sp>
         <p:nvSpPr>
-          <p:cNvPr name="TextBox 49" id="49"/>
-          <p:cNvSpPr txBox="true"/>
-          <p:nvPr/>
-        </p:nvSpPr>
-        <p:spPr>
-          <a:xfrm rot="0">
+          <p:cNvPr id="49" name="TextBox 49"/>
+          <p:cNvSpPr txBox="1"/>
+          <p:nvPr/>
+        </p:nvSpPr>
+        <p:spPr>
+          <a:xfrm>
             <a:off x="1276798" y="7132291"/>
             <a:ext cx="3947665" cy="508845"/>
           </a:xfrm>
@@ -13856,7 +13847,7 @@
           </a:prstGeom>
         </p:spPr>
         <p:txBody>
-          <a:bodyPr anchor="t" rtlCol="false" tIns="0" lIns="0" bIns="0" rIns="0">
+          <a:bodyPr lIns="0" tIns="0" rIns="0" bIns="0" rtlCol="0" anchor="t">
             <a:spAutoFit/>
           </a:bodyPr>
           <a:lstStyle/>
@@ -13883,12 +13874,12 @@
       </p:sp>
       <p:sp>
         <p:nvSpPr>
-          <p:cNvPr name="TextBox 50" id="50"/>
-          <p:cNvSpPr txBox="true"/>
-          <p:nvPr/>
-        </p:nvSpPr>
-        <p:spPr>
-          <a:xfrm rot="0">
+          <p:cNvPr id="50" name="TextBox 50"/>
+          <p:cNvSpPr txBox="1"/>
+          <p:nvPr/>
+        </p:nvSpPr>
+        <p:spPr>
+          <a:xfrm>
             <a:off x="4859236" y="7132291"/>
             <a:ext cx="2381993" cy="941489"/>
           </a:xfrm>
@@ -13897,7 +13888,7 @@
           </a:prstGeom>
         </p:spPr>
         <p:txBody>
-          <a:bodyPr anchor="t" rtlCol="false" tIns="0" lIns="0" bIns="0" rIns="0">
+          <a:bodyPr lIns="0" tIns="0" rIns="0" bIns="0" rtlCol="0" anchor="t">
             <a:spAutoFit/>
           </a:bodyPr>
           <a:lstStyle/>
@@ -13924,12 +13915,12 @@
       </p:sp>
       <p:sp>
         <p:nvSpPr>
-          <p:cNvPr name="TextBox 51" id="51"/>
-          <p:cNvSpPr txBox="true"/>
-          <p:nvPr/>
-        </p:nvSpPr>
-        <p:spPr>
-          <a:xfrm rot="0">
+          <p:cNvPr id="51" name="TextBox 51"/>
+          <p:cNvSpPr txBox="1"/>
+          <p:nvPr/>
+        </p:nvSpPr>
+        <p:spPr>
+          <a:xfrm>
             <a:off x="7790412" y="7132291"/>
             <a:ext cx="3622034" cy="508845"/>
           </a:xfrm>
@@ -13938,7 +13929,7 @@
           </a:prstGeom>
         </p:spPr>
         <p:txBody>
-          <a:bodyPr anchor="t" rtlCol="false" tIns="0" lIns="0" bIns="0" rIns="0">
+          <a:bodyPr lIns="0" tIns="0" rIns="0" bIns="0" rtlCol="0" anchor="t">
             <a:spAutoFit/>
           </a:bodyPr>
           <a:lstStyle/>
@@ -13965,12 +13956,12 @@
       </p:sp>
       <p:sp>
         <p:nvSpPr>
-          <p:cNvPr name="TextBox 52" id="52"/>
-          <p:cNvSpPr txBox="true"/>
-          <p:nvPr/>
-        </p:nvSpPr>
-        <p:spPr>
-          <a:xfrm rot="0">
+          <p:cNvPr id="52" name="TextBox 52"/>
+          <p:cNvSpPr txBox="1"/>
+          <p:nvPr/>
+        </p:nvSpPr>
+        <p:spPr>
+          <a:xfrm>
             <a:off x="11047209" y="7132291"/>
             <a:ext cx="3622034" cy="508845"/>
           </a:xfrm>
@@ -13979,7 +13970,7 @@
           </a:prstGeom>
         </p:spPr>
         <p:txBody>
-          <a:bodyPr anchor="t" rtlCol="false" tIns="0" lIns="0" bIns="0" rIns="0">
+          <a:bodyPr lIns="0" tIns="0" rIns="0" bIns="0" rtlCol="0" anchor="t">
             <a:spAutoFit/>
           </a:bodyPr>
           <a:lstStyle/>
@@ -14006,12 +13997,12 @@
       </p:sp>
       <p:sp>
         <p:nvSpPr>
-          <p:cNvPr name="TextBox 53" id="53"/>
-          <p:cNvSpPr txBox="true"/>
-          <p:nvPr/>
-        </p:nvSpPr>
-        <p:spPr>
-          <a:xfrm rot="0">
+          <p:cNvPr id="53" name="TextBox 53"/>
+          <p:cNvSpPr txBox="1"/>
+          <p:nvPr/>
+        </p:nvSpPr>
+        <p:spPr>
+          <a:xfrm>
             <a:off x="14304016" y="7132291"/>
             <a:ext cx="3622034" cy="508845"/>
           </a:xfrm>
@@ -14020,7 +14011,7 @@
           </a:prstGeom>
         </p:spPr>
         <p:txBody>
-          <a:bodyPr anchor="t" rtlCol="false" tIns="0" lIns="0" bIns="0" rIns="0">
+          <a:bodyPr lIns="0" tIns="0" rIns="0" bIns="0" rtlCol="0" anchor="t">
             <a:spAutoFit/>
           </a:bodyPr>
           <a:lstStyle/>
@@ -14047,12 +14038,12 @@
       </p:sp>
       <p:sp>
         <p:nvSpPr>
-          <p:cNvPr name="TextBox 54" id="54"/>
-          <p:cNvSpPr txBox="true"/>
-          <p:nvPr/>
-        </p:nvSpPr>
-        <p:spPr>
-          <a:xfrm rot="0">
+          <p:cNvPr id="54" name="TextBox 54"/>
+          <p:cNvSpPr txBox="1"/>
+          <p:nvPr/>
+        </p:nvSpPr>
+        <p:spPr>
+          <a:xfrm>
             <a:off x="1276798" y="8345243"/>
             <a:ext cx="3947665" cy="508845"/>
           </a:xfrm>
@@ -14061,7 +14052,7 @@
           </a:prstGeom>
         </p:spPr>
         <p:txBody>
-          <a:bodyPr anchor="t" rtlCol="false" tIns="0" lIns="0" bIns="0" rIns="0">
+          <a:bodyPr lIns="0" tIns="0" rIns="0" bIns="0" rtlCol="0" anchor="t">
             <a:spAutoFit/>
           </a:bodyPr>
           <a:lstStyle/>
@@ -14072,7 +14063,7 @@
               </a:lnSpc>
             </a:pPr>
             <a:r>
-              <a:rPr lang="en-US" sz="2100" b="true">
+              <a:rPr lang="en-US" sz="2100" b="1">
                 <a:solidFill>
                   <a:srgbClr val="272525"/>
                 </a:solidFill>
@@ -14088,12 +14079,12 @@
       </p:sp>
       <p:sp>
         <p:nvSpPr>
-          <p:cNvPr name="TextBox 55" id="55"/>
-          <p:cNvSpPr txBox="true"/>
-          <p:nvPr/>
-        </p:nvSpPr>
-        <p:spPr>
-          <a:xfrm rot="0">
+          <p:cNvPr id="55" name="TextBox 55"/>
+          <p:cNvSpPr txBox="1"/>
+          <p:nvPr/>
+        </p:nvSpPr>
+        <p:spPr>
+          <a:xfrm>
             <a:off x="4859236" y="8345243"/>
             <a:ext cx="3296393" cy="508845"/>
           </a:xfrm>
@@ -14102,7 +14093,7 @@
           </a:prstGeom>
         </p:spPr>
         <p:txBody>
-          <a:bodyPr anchor="t" rtlCol="false" tIns="0" lIns="0" bIns="0" rIns="0">
+          <a:bodyPr lIns="0" tIns="0" rIns="0" bIns="0" rtlCol="0" anchor="t">
             <a:spAutoFit/>
           </a:bodyPr>
           <a:lstStyle/>
@@ -14113,7 +14104,7 @@
               </a:lnSpc>
             </a:pPr>
             <a:r>
-              <a:rPr lang="en-US" sz="2100" b="true">
+              <a:rPr lang="en-US" sz="2100" b="1">
                 <a:solidFill>
                   <a:srgbClr val="272525"/>
                 </a:solidFill>
@@ -14129,12 +14120,12 @@
       </p:sp>
       <p:sp>
         <p:nvSpPr>
-          <p:cNvPr name="TextBox 56" id="56"/>
-          <p:cNvSpPr txBox="true"/>
-          <p:nvPr/>
-        </p:nvSpPr>
-        <p:spPr>
-          <a:xfrm rot="0">
+          <p:cNvPr id="56" name="TextBox 56"/>
+          <p:cNvSpPr txBox="1"/>
+          <p:nvPr/>
+        </p:nvSpPr>
+        <p:spPr>
+          <a:xfrm>
             <a:off x="7790412" y="8345243"/>
             <a:ext cx="3622034" cy="508845"/>
           </a:xfrm>
@@ -14143,7 +14134,7 @@
           </a:prstGeom>
         </p:spPr>
         <p:txBody>
-          <a:bodyPr anchor="t" rtlCol="false" tIns="0" lIns="0" bIns="0" rIns="0">
+          <a:bodyPr lIns="0" tIns="0" rIns="0" bIns="0" rtlCol="0" anchor="t">
             <a:spAutoFit/>
           </a:bodyPr>
           <a:lstStyle/>
@@ -14154,7 +14145,7 @@
               </a:lnSpc>
             </a:pPr>
             <a:r>
-              <a:rPr lang="en-US" sz="2100" b="true">
+              <a:rPr lang="en-US" sz="2100" b="1">
                 <a:solidFill>
                   <a:srgbClr val="272525"/>
                 </a:solidFill>
@@ -14170,12 +14161,12 @@
       </p:sp>
       <p:sp>
         <p:nvSpPr>
-          <p:cNvPr name="TextBox 57" id="57"/>
-          <p:cNvSpPr txBox="true"/>
-          <p:nvPr/>
-        </p:nvSpPr>
-        <p:spPr>
-          <a:xfrm rot="0">
+          <p:cNvPr id="57" name="TextBox 57"/>
+          <p:cNvSpPr txBox="1"/>
+          <p:nvPr/>
+        </p:nvSpPr>
+        <p:spPr>
+          <a:xfrm>
             <a:off x="11047209" y="8345243"/>
             <a:ext cx="3622034" cy="508845"/>
           </a:xfrm>
@@ -14184,7 +14175,7 @@
           </a:prstGeom>
         </p:spPr>
         <p:txBody>
-          <a:bodyPr anchor="t" rtlCol="false" tIns="0" lIns="0" bIns="0" rIns="0">
+          <a:bodyPr lIns="0" tIns="0" rIns="0" bIns="0" rtlCol="0" anchor="t">
             <a:spAutoFit/>
           </a:bodyPr>
           <a:lstStyle/>
@@ -14195,7 +14186,7 @@
               </a:lnSpc>
             </a:pPr>
             <a:r>
-              <a:rPr lang="en-US" sz="2100" b="true">
+              <a:rPr lang="en-US" sz="2100" b="1">
                 <a:solidFill>
                   <a:srgbClr val="272525"/>
                 </a:solidFill>
@@ -14211,12 +14202,12 @@
       </p:sp>
       <p:sp>
         <p:nvSpPr>
-          <p:cNvPr name="TextBox 58" id="58"/>
-          <p:cNvSpPr txBox="true"/>
-          <p:nvPr/>
-        </p:nvSpPr>
-        <p:spPr>
-          <a:xfrm rot="0">
+          <p:cNvPr id="58" name="TextBox 58"/>
+          <p:cNvSpPr txBox="1"/>
+          <p:nvPr/>
+        </p:nvSpPr>
+        <p:spPr>
+          <a:xfrm>
             <a:off x="14304016" y="8345243"/>
             <a:ext cx="3622034" cy="508845"/>
           </a:xfrm>
@@ -14225,7 +14216,7 @@
           </a:prstGeom>
         </p:spPr>
         <p:txBody>
-          <a:bodyPr anchor="t" rtlCol="false" tIns="0" lIns="0" bIns="0" rIns="0">
+          <a:bodyPr lIns="0" tIns="0" rIns="0" bIns="0" rtlCol="0" anchor="t">
             <a:spAutoFit/>
           </a:bodyPr>
           <a:lstStyle/>
@@ -14236,7 +14227,7 @@
               </a:lnSpc>
             </a:pPr>
             <a:r>
-              <a:rPr lang="en-US" sz="2100" b="true">
+              <a:rPr lang="en-US" sz="2100" b="1">
                 <a:solidFill>
                   <a:srgbClr val="272525"/>
                 </a:solidFill>
@@ -14259,7 +14250,7 @@
 </file>
 
 <file path=ppt/slides/slide9.xml><?xml version="1.0" encoding="utf-8"?>
-<p:sld xmlns:p="http://schemas.openxmlformats.org/presentationml/2006/main" xmlns:a="http://schemas.openxmlformats.org/drawingml/2006/main" xmlns:r="http://schemas.openxmlformats.org/officeDocument/2006/relationships">
+<p:sld xmlns:a="http://schemas.openxmlformats.org/drawingml/2006/main" xmlns:r="http://schemas.openxmlformats.org/officeDocument/2006/relationships" xmlns:p="http://schemas.openxmlformats.org/presentationml/2006/main">
   <p:cSld>
     <p:spTree>
       <p:nvGrpSpPr>
@@ -14277,12 +14268,12 @@
       </p:grpSpPr>
       <p:grpSp>
         <p:nvGrpSpPr>
-          <p:cNvPr name="Group 2" id="2"/>
+          <p:cNvPr id="2" name="Group 2"/>
           <p:cNvGrpSpPr/>
           <p:nvPr/>
         </p:nvGrpSpPr>
         <p:grpSpPr>
-          <a:xfrm rot="0">
+          <a:xfrm>
             <a:off x="0" y="0"/>
             <a:ext cx="18288000" cy="10287000"/>
             <a:chOff x="0" y="0"/>
@@ -14291,12 +14282,12 @@
         </p:grpSpPr>
         <p:sp>
           <p:nvSpPr>
-            <p:cNvPr name="Freeform 3" id="3"/>
+            <p:cNvPr id="3" name="Freeform 3"/>
             <p:cNvSpPr/>
             <p:nvPr/>
           </p:nvSpPr>
           <p:spPr>
-            <a:xfrm flipH="false" flipV="false" rot="0">
+            <a:xfrm>
               <a:off x="0" y="0"/>
               <a:ext cx="24384000" cy="13716000"/>
             </a:xfrm>
@@ -14305,9 +14296,9 @@
               <a:gdLst/>
               <a:ahLst/>
               <a:cxnLst/>
-              <a:rect r="r" b="b" t="t" l="l"/>
+              <a:rect l="l" t="t" r="r" b="b"/>
               <a:pathLst>
-                <a:path h="13716000" w="24384000">
+                <a:path w="24384000" h="13716000">
                   <a:moveTo>
                     <a:pt x="0" y="0"/>
                   </a:moveTo>
@@ -14332,12 +14323,12 @@
       </p:grpSp>
       <p:grpSp>
         <p:nvGrpSpPr>
-          <p:cNvPr name="Group 4" id="4"/>
+          <p:cNvPr id="4" name="Group 4"/>
           <p:cNvGrpSpPr/>
           <p:nvPr/>
         </p:nvGrpSpPr>
         <p:grpSpPr>
-          <a:xfrm rot="0">
+          <a:xfrm>
             <a:off x="0" y="0"/>
             <a:ext cx="18288000" cy="10287000"/>
             <a:chOff x="0" y="0"/>
@@ -14346,12 +14337,12 @@
         </p:grpSpPr>
         <p:sp>
           <p:nvSpPr>
-            <p:cNvPr name="Freeform 5" id="5"/>
+            <p:cNvPr id="5" name="Freeform 5"/>
             <p:cNvSpPr/>
             <p:nvPr/>
           </p:nvSpPr>
           <p:spPr>
-            <a:xfrm flipH="false" flipV="false" rot="0">
+            <a:xfrm>
               <a:off x="0" y="0"/>
               <a:ext cx="24384000" cy="13716000"/>
             </a:xfrm>
@@ -14360,9 +14351,9 @@
               <a:gdLst/>
               <a:ahLst/>
               <a:cxnLst/>
-              <a:rect r="r" b="b" t="t" l="l"/>
+              <a:rect l="l" t="t" r="r" b="b"/>
               <a:pathLst>
-                <a:path h="13716000" w="24384000">
+                <a:path w="24384000" h="13716000">
                   <a:moveTo>
                     <a:pt x="0" y="0"/>
                   </a:moveTo>
@@ -14387,12 +14378,12 @@
       </p:grpSp>
       <p:grpSp>
         <p:nvGrpSpPr>
-          <p:cNvPr name="Group 6" id="6"/>
+          <p:cNvPr id="6" name="Group 6"/>
           <p:cNvGrpSpPr/>
           <p:nvPr/>
         </p:nvGrpSpPr>
         <p:grpSpPr>
-          <a:xfrm rot="0">
+          <a:xfrm>
             <a:off x="992238" y="1336177"/>
             <a:ext cx="2614612" cy="532800"/>
             <a:chOff x="0" y="0"/>
@@ -14401,12 +14392,12 @@
         </p:grpSpPr>
         <p:sp>
           <p:nvSpPr>
-            <p:cNvPr name="Freeform 7" id="7"/>
+            <p:cNvPr id="7" name="Freeform 7"/>
             <p:cNvSpPr/>
             <p:nvPr/>
           </p:nvSpPr>
           <p:spPr>
-            <a:xfrm flipH="false" flipV="false" rot="0">
+            <a:xfrm>
               <a:off x="0" y="0"/>
               <a:ext cx="3486150" cy="710438"/>
             </a:xfrm>
@@ -14415,9 +14406,9 @@
               <a:gdLst/>
               <a:ahLst/>
               <a:cxnLst/>
-              <a:rect r="r" b="b" t="t" l="l"/>
+              <a:rect l="l" t="t" r="r" b="b"/>
               <a:pathLst>
-                <a:path h="710438" w="3486150">
+                <a:path w="3486150" h="710438">
                   <a:moveTo>
                     <a:pt x="0" y="127000"/>
                   </a:moveTo>
@@ -14462,12 +14453,12 @@
       </p:grpSp>
       <p:sp>
         <p:nvSpPr>
-          <p:cNvPr name="TextBox 8" id="8"/>
-          <p:cNvSpPr txBox="true"/>
-          <p:nvPr/>
-        </p:nvSpPr>
-        <p:spPr>
-          <a:xfrm rot="0">
+          <p:cNvPr id="8" name="TextBox 8"/>
+          <p:cNvSpPr txBox="1"/>
+          <p:nvPr/>
+        </p:nvSpPr>
+        <p:spPr>
+          <a:xfrm>
             <a:off x="1162345" y="1354484"/>
             <a:ext cx="3188789" cy="429520"/>
           </a:xfrm>
@@ -14476,7 +14467,7 @@
           </a:prstGeom>
         </p:spPr>
         <p:txBody>
-          <a:bodyPr anchor="t" rtlCol="false" tIns="0" lIns="0" bIns="0" rIns="0">
+          <a:bodyPr lIns="0" tIns="0" rIns="0" bIns="0" rtlCol="0" anchor="t">
             <a:spAutoFit/>
           </a:bodyPr>
           <a:lstStyle/>
@@ -14503,12 +14494,12 @@
       </p:sp>
       <p:sp>
         <p:nvSpPr>
-          <p:cNvPr name="TextBox 9" id="9"/>
-          <p:cNvSpPr txBox="true"/>
-          <p:nvPr/>
-        </p:nvSpPr>
-        <p:spPr>
-          <a:xfrm rot="0">
+          <p:cNvPr id="9" name="TextBox 9"/>
+          <p:cNvSpPr txBox="1"/>
+          <p:nvPr/>
+        </p:nvSpPr>
+        <p:spPr>
+          <a:xfrm>
             <a:off x="992238" y="1963341"/>
             <a:ext cx="16303523" cy="905027"/>
           </a:xfrm>
@@ -14517,7 +14508,7 @@
           </a:prstGeom>
         </p:spPr>
         <p:txBody>
-          <a:bodyPr anchor="t" rtlCol="false" tIns="0" lIns="0" bIns="0" rIns="0">
+          <a:bodyPr lIns="0" tIns="0" rIns="0" bIns="0" rtlCol="0" anchor="t">
             <a:spAutoFit/>
           </a:bodyPr>
           <a:lstStyle/>
@@ -14528,7 +14519,7 @@
               </a:lnSpc>
             </a:pPr>
             <a:r>
-              <a:rPr lang="en-US" sz="5500" b="true">
+              <a:rPr lang="en-US" sz="5500" b="1">
                 <a:solidFill>
                   <a:srgbClr val="000000"/>
                 </a:solidFill>
@@ -14544,12 +14535,12 @@
       </p:sp>
       <p:sp>
         <p:nvSpPr>
-          <p:cNvPr name="TextBox 10" id="10"/>
-          <p:cNvSpPr txBox="true"/>
-          <p:nvPr/>
-        </p:nvSpPr>
-        <p:spPr>
-          <a:xfrm rot="0">
+          <p:cNvPr id="10" name="TextBox 10"/>
+          <p:cNvSpPr txBox="1"/>
+          <p:nvPr/>
+        </p:nvSpPr>
+        <p:spPr>
+          <a:xfrm>
             <a:off x="992238" y="3462938"/>
             <a:ext cx="7805890" cy="3261122"/>
           </a:xfrm>
@@ -14558,7 +14549,7 @@
           </a:prstGeom>
         </p:spPr>
         <p:txBody>
-          <a:bodyPr anchor="t" rtlCol="false" tIns="0" lIns="0" bIns="0" rIns="0">
+          <a:bodyPr lIns="0" tIns="0" rIns="0" bIns="0" rtlCol="0" anchor="t">
             <a:spAutoFit/>
           </a:bodyPr>
           <a:lstStyle/>
@@ -14581,7 +14572,7 @@
               <a:t>This work builds on prior deep CNN efforts [14] but extends them to </a:t>
             </a:r>
             <a:r>
-              <a:rPr lang="en-US" sz="2200" b="true">
+              <a:rPr lang="en-US" sz="2200" b="1">
                 <a:solidFill>
                   <a:srgbClr val="272525"/>
                 </a:solidFill>
@@ -14605,7 +14596,7 @@
               <a:t> with higher obstacle density, </a:t>
             </a:r>
             <a:r>
-              <a:rPr lang="en-US" sz="2200" b="true">
+              <a:rPr lang="en-US" sz="2200" b="1">
                 <a:solidFill>
                   <a:srgbClr val="272525"/>
                 </a:solidFill>
@@ -14629,7 +14620,7 @@
               <a:t> (PKLot, CNRPark-Ext, custom), and </a:t>
             </a:r>
             <a:r>
-              <a:rPr lang="en-US" sz="2200" b="true">
+              <a:rPr lang="en-US" sz="2200" b="1">
                 <a:solidFill>
                   <a:srgbClr val="272525"/>
                 </a:solidFill>
@@ -14657,87 +14648,26 @@
       </p:sp>
       <p:grpSp>
         <p:nvGrpSpPr>
-          <p:cNvPr name="Group 11" id="11"/>
+          <p:cNvPr id="13" name="Group 13"/>
           <p:cNvGrpSpPr/>
           <p:nvPr/>
         </p:nvGrpSpPr>
         <p:grpSpPr>
-          <a:xfrm rot="0">
-            <a:off x="9499406" y="3718617"/>
-            <a:ext cx="5103609" cy="2835326"/>
+          <a:xfrm>
+            <a:off x="987476" y="7293321"/>
+            <a:ext cx="5254971" cy="1662265"/>
             <a:chOff x="0" y="0"/>
-            <a:chExt cx="6804812" cy="3780434"/>
+            <a:chExt cx="7006628" cy="2216353"/>
           </a:xfrm>
         </p:grpSpPr>
         <p:sp>
           <p:nvSpPr>
-            <p:cNvPr name="Freeform 12" id="12" descr="preencoded.png"/>
+            <p:cNvPr id="14" name="Freeform 14"/>
             <p:cNvSpPr/>
             <p:nvPr/>
           </p:nvSpPr>
           <p:spPr>
-            <a:xfrm flipH="false" flipV="false" rot="0">
-              <a:off x="0" y="0"/>
-              <a:ext cx="6804787" cy="3780409"/>
-            </a:xfrm>
-            <a:custGeom>
-              <a:avLst/>
-              <a:gdLst/>
-              <a:ahLst/>
-              <a:cxnLst/>
-              <a:rect r="r" b="b" t="t" l="l"/>
-              <a:pathLst>
-                <a:path h="3780409" w="6804787">
-                  <a:moveTo>
-                    <a:pt x="0" y="0"/>
-                  </a:moveTo>
-                  <a:lnTo>
-                    <a:pt x="6804787" y="0"/>
-                  </a:lnTo>
-                  <a:lnTo>
-                    <a:pt x="6804787" y="3780409"/>
-                  </a:lnTo>
-                  <a:lnTo>
-                    <a:pt x="0" y="3780409"/>
-                  </a:lnTo>
-                  <a:lnTo>
-                    <a:pt x="0" y="0"/>
-                  </a:lnTo>
-                  <a:close/>
-                </a:path>
-              </a:pathLst>
-            </a:custGeom>
-            <a:blipFill>
-              <a:blip r:embed="rId3"/>
-              <a:stretch>
-                <a:fillRect l="0" t="-37" r="0" b="-38"/>
-              </a:stretch>
-            </a:blipFill>
-          </p:spPr>
-        </p:sp>
-      </p:grpSp>
-      <p:grpSp>
-        <p:nvGrpSpPr>
-          <p:cNvPr name="Group 13" id="13"/>
-          <p:cNvGrpSpPr/>
-          <p:nvPr/>
-        </p:nvGrpSpPr>
-        <p:grpSpPr>
-          <a:xfrm rot="0">
-            <a:off x="987476" y="7293321"/>
-            <a:ext cx="5254971" cy="1662265"/>
-            <a:chOff x="0" y="0"/>
-            <a:chExt cx="7006628" cy="2216353"/>
-          </a:xfrm>
-        </p:grpSpPr>
-        <p:sp>
-          <p:nvSpPr>
-            <p:cNvPr name="Freeform 14" id="14"/>
-            <p:cNvSpPr/>
-            <p:nvPr/>
-          </p:nvSpPr>
-          <p:spPr>
-            <a:xfrm flipH="false" flipV="false" rot="0">
+            <a:xfrm>
               <a:off x="0" y="0"/>
               <a:ext cx="7006590" cy="2216277"/>
             </a:xfrm>
@@ -14746,9 +14676,9 @@
               <a:gdLst/>
               <a:ahLst/>
               <a:cxnLst/>
-              <a:rect r="r" b="b" t="t" l="l"/>
+              <a:rect l="l" t="t" r="r" b="b"/>
               <a:pathLst>
-                <a:path h="2216277" w="7006590">
+                <a:path w="7006590" h="2216277">
                   <a:moveTo>
                     <a:pt x="0" y="159639"/>
                   </a:moveTo>
@@ -14800,12 +14730,12 @@
       </p:grpSp>
       <p:sp>
         <p:nvSpPr>
-          <p:cNvPr name="TextBox 15" id="15"/>
-          <p:cNvSpPr txBox="true"/>
-          <p:nvPr/>
-        </p:nvSpPr>
-        <p:spPr>
-          <a:xfrm rot="0">
+          <p:cNvPr id="15" name="TextBox 15"/>
+          <p:cNvSpPr txBox="1"/>
+          <p:nvPr/>
+        </p:nvSpPr>
+        <p:spPr>
+          <a:xfrm>
             <a:off x="1285284" y="7581605"/>
             <a:ext cx="4659363" cy="452437"/>
           </a:xfrm>
@@ -14814,7 +14744,7 @@
           </a:prstGeom>
         </p:spPr>
         <p:txBody>
-          <a:bodyPr anchor="t" rtlCol="false" tIns="0" lIns="0" bIns="0" rIns="0">
+          <a:bodyPr lIns="0" tIns="0" rIns="0" bIns="0" rtlCol="0" anchor="t">
             <a:spAutoFit/>
           </a:bodyPr>
           <a:lstStyle/>
@@ -14825,7 +14755,7 @@
               </a:lnSpc>
             </a:pPr>
             <a:r>
-              <a:rPr lang="en-US" sz="2700" b="true">
+              <a:rPr lang="en-US" sz="2700" b="1">
                 <a:solidFill>
                   <a:srgbClr val="000000"/>
                 </a:solidFill>
@@ -14837,7 +14767,7 @@
               <a:t>✅</a:t>
             </a:r>
             <a:r>
-              <a:rPr lang="en-US" sz="2700" b="true">
+              <a:rPr lang="en-US" sz="2700" b="1">
                 <a:solidFill>
                   <a:srgbClr val="272525"/>
                 </a:solidFill>
@@ -14853,12 +14783,12 @@
       </p:sp>
       <p:sp>
         <p:nvSpPr>
-          <p:cNvPr name="TextBox 16" id="16"/>
-          <p:cNvSpPr txBox="true"/>
-          <p:nvPr/>
-        </p:nvSpPr>
-        <p:spPr>
-          <a:xfrm rot="0">
+          <p:cNvPr id="16" name="TextBox 16"/>
+          <p:cNvSpPr txBox="1"/>
+          <p:nvPr/>
+        </p:nvSpPr>
+        <p:spPr>
+          <a:xfrm>
             <a:off x="1285284" y="8118424"/>
             <a:ext cx="4659363" cy="539353"/>
           </a:xfrm>
@@ -14867,7 +14797,7 @@
           </a:prstGeom>
         </p:spPr>
         <p:txBody>
-          <a:bodyPr anchor="t" rtlCol="false" tIns="0" lIns="0" bIns="0" rIns="0">
+          <a:bodyPr lIns="0" tIns="0" rIns="0" bIns="0" rtlCol="0" anchor="t">
             <a:spAutoFit/>
           </a:bodyPr>
           <a:lstStyle/>
@@ -14894,12 +14824,12 @@
       </p:sp>
       <p:grpSp>
         <p:nvGrpSpPr>
-          <p:cNvPr name="Group 17" id="17"/>
+          <p:cNvPr id="17" name="Group 17"/>
           <p:cNvGrpSpPr/>
           <p:nvPr/>
         </p:nvGrpSpPr>
         <p:grpSpPr>
-          <a:xfrm rot="0">
+          <a:xfrm>
             <a:off x="6516443" y="7293321"/>
             <a:ext cx="5254971" cy="1662265"/>
             <a:chOff x="0" y="0"/>
@@ -14908,12 +14838,12 @@
         </p:grpSpPr>
         <p:sp>
           <p:nvSpPr>
-            <p:cNvPr name="Freeform 18" id="18"/>
+            <p:cNvPr id="18" name="Freeform 18"/>
             <p:cNvSpPr/>
             <p:nvPr/>
           </p:nvSpPr>
           <p:spPr>
-            <a:xfrm flipH="false" flipV="false" rot="0">
+            <a:xfrm>
               <a:off x="0" y="0"/>
               <a:ext cx="7006590" cy="2216277"/>
             </a:xfrm>
@@ -14922,9 +14852,9 @@
               <a:gdLst/>
               <a:ahLst/>
               <a:cxnLst/>
-              <a:rect r="r" b="b" t="t" l="l"/>
+              <a:rect l="l" t="t" r="r" b="b"/>
               <a:pathLst>
-                <a:path h="2216277" w="7006590">
+                <a:path w="7006590" h="2216277">
                   <a:moveTo>
                     <a:pt x="0" y="159639"/>
                   </a:moveTo>
@@ -14976,12 +14906,12 @@
       </p:grpSp>
       <p:sp>
         <p:nvSpPr>
-          <p:cNvPr name="TextBox 19" id="19"/>
-          <p:cNvSpPr txBox="true"/>
-          <p:nvPr/>
-        </p:nvSpPr>
-        <p:spPr>
-          <a:xfrm rot="0">
+          <p:cNvPr id="19" name="TextBox 19"/>
+          <p:cNvSpPr txBox="1"/>
+          <p:nvPr/>
+        </p:nvSpPr>
+        <p:spPr>
+          <a:xfrm>
             <a:off x="6814242" y="7581605"/>
             <a:ext cx="4659363" cy="452437"/>
           </a:xfrm>
@@ -14990,7 +14920,7 @@
           </a:prstGeom>
         </p:spPr>
         <p:txBody>
-          <a:bodyPr anchor="t" rtlCol="false" tIns="0" lIns="0" bIns="0" rIns="0">
+          <a:bodyPr lIns="0" tIns="0" rIns="0" bIns="0" rtlCol="0" anchor="t">
             <a:spAutoFit/>
           </a:bodyPr>
           <a:lstStyle/>
@@ -15001,7 +14931,7 @@
               </a:lnSpc>
             </a:pPr>
             <a:r>
-              <a:rPr lang="en-US" sz="2700" b="true">
+              <a:rPr lang="en-US" sz="2700" b="1">
                 <a:solidFill>
                   <a:srgbClr val="000000"/>
                 </a:solidFill>
@@ -15013,7 +14943,7 @@
               <a:t>✅</a:t>
             </a:r>
             <a:r>
-              <a:rPr lang="en-US" sz="2700" b="true">
+              <a:rPr lang="en-US" sz="2700" b="1">
                 <a:solidFill>
                   <a:srgbClr val="272525"/>
                 </a:solidFill>
@@ -15029,12 +14959,12 @@
       </p:sp>
       <p:sp>
         <p:nvSpPr>
-          <p:cNvPr name="TextBox 20" id="20"/>
-          <p:cNvSpPr txBox="true"/>
-          <p:nvPr/>
-        </p:nvSpPr>
-        <p:spPr>
-          <a:xfrm rot="0">
+          <p:cNvPr id="20" name="TextBox 20"/>
+          <p:cNvSpPr txBox="1"/>
+          <p:nvPr/>
+        </p:nvSpPr>
+        <p:spPr>
+          <a:xfrm>
             <a:off x="6814242" y="8118424"/>
             <a:ext cx="4659363" cy="539353"/>
           </a:xfrm>
@@ -15043,7 +14973,7 @@
           </a:prstGeom>
         </p:spPr>
         <p:txBody>
-          <a:bodyPr anchor="t" rtlCol="false" tIns="0" lIns="0" bIns="0" rIns="0">
+          <a:bodyPr lIns="0" tIns="0" rIns="0" bIns="0" rtlCol="0" anchor="t">
             <a:spAutoFit/>
           </a:bodyPr>
           <a:lstStyle/>
@@ -15070,12 +15000,12 @@
       </p:sp>
       <p:grpSp>
         <p:nvGrpSpPr>
-          <p:cNvPr name="Group 21" id="21"/>
+          <p:cNvPr id="21" name="Group 21"/>
           <p:cNvGrpSpPr/>
           <p:nvPr/>
         </p:nvGrpSpPr>
         <p:grpSpPr>
-          <a:xfrm rot="0">
+          <a:xfrm>
             <a:off x="12045401" y="7293321"/>
             <a:ext cx="5254971" cy="1662265"/>
             <a:chOff x="0" y="0"/>
@@ -15084,12 +15014,12 @@
         </p:grpSpPr>
         <p:sp>
           <p:nvSpPr>
-            <p:cNvPr name="Freeform 22" id="22"/>
+            <p:cNvPr id="22" name="Freeform 22"/>
             <p:cNvSpPr/>
             <p:nvPr/>
           </p:nvSpPr>
           <p:spPr>
-            <a:xfrm flipH="false" flipV="false" rot="0">
+            <a:xfrm>
               <a:off x="0" y="0"/>
               <a:ext cx="7006590" cy="2216277"/>
             </a:xfrm>
@@ -15098,9 +15028,9 @@
               <a:gdLst/>
               <a:ahLst/>
               <a:cxnLst/>
-              <a:rect r="r" b="b" t="t" l="l"/>
+              <a:rect l="l" t="t" r="r" b="b"/>
               <a:pathLst>
-                <a:path h="2216277" w="7006590">
+                <a:path w="7006590" h="2216277">
                   <a:moveTo>
                     <a:pt x="0" y="159639"/>
                   </a:moveTo>
@@ -15152,12 +15082,12 @@
       </p:grpSp>
       <p:sp>
         <p:nvSpPr>
-          <p:cNvPr name="TextBox 23" id="23"/>
-          <p:cNvSpPr txBox="true"/>
-          <p:nvPr/>
-        </p:nvSpPr>
-        <p:spPr>
-          <a:xfrm rot="0">
+          <p:cNvPr id="23" name="TextBox 23"/>
+          <p:cNvSpPr txBox="1"/>
+          <p:nvPr/>
+        </p:nvSpPr>
+        <p:spPr>
+          <a:xfrm>
             <a:off x="12343209" y="7581605"/>
             <a:ext cx="4659363" cy="452437"/>
           </a:xfrm>
@@ -15166,7 +15096,7 @@
           </a:prstGeom>
         </p:spPr>
         <p:txBody>
-          <a:bodyPr anchor="t" rtlCol="false" tIns="0" lIns="0" bIns="0" rIns="0">
+          <a:bodyPr lIns="0" tIns="0" rIns="0" bIns="0" rtlCol="0" anchor="t">
             <a:spAutoFit/>
           </a:bodyPr>
           <a:lstStyle/>
@@ -15177,7 +15107,7 @@
               </a:lnSpc>
             </a:pPr>
             <a:r>
-              <a:rPr lang="en-US" sz="2700" b="true">
+              <a:rPr lang="en-US" sz="2700" b="1">
                 <a:solidFill>
                   <a:srgbClr val="000000"/>
                 </a:solidFill>
@@ -15189,7 +15119,7 @@
               <a:t>✅</a:t>
             </a:r>
             <a:r>
-              <a:rPr lang="en-US" sz="2700" b="true">
+              <a:rPr lang="en-US" sz="2700" b="1">
                 <a:solidFill>
                   <a:srgbClr val="272525"/>
                 </a:solidFill>
@@ -15205,12 +15135,12 @@
       </p:sp>
       <p:sp>
         <p:nvSpPr>
-          <p:cNvPr name="TextBox 24" id="24"/>
-          <p:cNvSpPr txBox="true"/>
-          <p:nvPr/>
-        </p:nvSpPr>
-        <p:spPr>
-          <a:xfrm rot="0">
+          <p:cNvPr id="24" name="TextBox 24"/>
+          <p:cNvSpPr txBox="1"/>
+          <p:nvPr/>
+        </p:nvSpPr>
+        <p:spPr>
+          <a:xfrm>
             <a:off x="12343209" y="8118424"/>
             <a:ext cx="4659363" cy="539353"/>
           </a:xfrm>
@@ -15219,7 +15149,7 @@
           </a:prstGeom>
         </p:spPr>
         <p:txBody>
-          <a:bodyPr anchor="t" rtlCol="false" tIns="0" lIns="0" bIns="0" rIns="0">
+          <a:bodyPr lIns="0" tIns="0" rIns="0" bIns="0" rtlCol="0" anchor="t">
             <a:spAutoFit/>
           </a:bodyPr>
           <a:lstStyle/>
